--- a/pptx/Module17_Plan_de_tests.pptx
+++ b/pptx/Module17_Plan_de_tests.pptx
@@ -12,9 +12,10 @@
     <p:sldId id="260" r:id="rId6"/>
     <p:sldId id="261" r:id="rId7"/>
     <p:sldId id="262" r:id="rId8"/>
+    <p:sldId id="263" r:id="rId9"/>
   </p:sldIdLst>
   <p:notesMasterIdLst>
-    <p:notesMasterId r:id="rId9"/>
+    <p:notesMasterId r:id="rId10"/>
   </p:notesMasterIdLst>
   <p:sldSz cx="9144000" cy="5143500"/>
   <p:notesSz cx="5143500" cy="9144000"/>
@@ -596,7 +597,7 @@
           <a:p>
             <a:r>
               <a:rPr lang="en-US" dirty="0"/>
-              <a:t/>
+              <a:t>Sans tests, on ne peut pas prouver que le système fonctionne. C'est une exigence professionnelle.</a:t>
             </a:r>
             <a:endParaRPr lang="en-US" dirty="0"/>
           </a:p>
@@ -684,7 +685,7 @@
           <a:p>
             <a:r>
               <a:rPr lang="en-US" dirty="0"/>
-              <a:t/>
+              <a:t>En pratique, les étudiants feront surtout du white box (ils connaissent le SQL).</a:t>
             </a:r>
             <a:endParaRPr lang="en-US" dirty="0"/>
           </a:p>
@@ -772,7 +773,7 @@
           <a:p>
             <a:r>
               <a:rPr lang="en-US" dirty="0"/>
-              <a:t/>
+              <a:t>Les 3 types sont OBLIGATOIRES pour un plan de test complet. M4 demande de JUSTIFIER le choix.</a:t>
             </a:r>
             <a:endParaRPr lang="en-US" dirty="0"/>
           </a:p>
@@ -860,7 +861,7 @@
           <a:p>
             <a:r>
               <a:rPr lang="en-US" dirty="0"/>
-              <a:t/>
+              <a:t>Template Excel fourni. Les colonnes 'Résultat obtenu' et 'Statut' seront remplies au Module 18.</a:t>
             </a:r>
             <a:endParaRPr lang="en-US" dirty="0"/>
           </a:p>
@@ -948,7 +949,7 @@
           <a:p>
             <a:r>
               <a:rPr lang="en-US" dirty="0"/>
-              <a:t/>
+              <a:t>Le plan de test sera exécuté au Module 18. Bien le préparer maintenant.</a:t>
             </a:r>
             <a:endParaRPr lang="en-US" dirty="0"/>
           </a:p>
@@ -1060,6 +1061,94 @@
             <a:fld id="{F7021451-1387-4CA6-816F-3879F97B5CBC}" type="slidenum">
               <a:rPr lang="en-US"/>
               <a:t>7</a:t>
+            </a:fld>
+            <a:endParaRPr lang="en-US"/>
+          </a:p>
+        </p:txBody>
+      </p:sp>
+    </p:spTree>
+    <p:extLst>
+      <p:ext uri="{BB962C8B-B14F-4D97-AF65-F5344CB8AC3E}">
+        <p14:creationId xmlns:p14="http://schemas.microsoft.com/office/powerpoint/2010/main" val="1024086991"/>
+      </p:ext>
+    </p:extLst>
+  </p:cSld>
+  <p:clrMapOvr>
+    <a:masterClrMapping/>
+  </p:clrMapOvr>
+</p:notes>
+</file>
+
+<file path=ppt/notesSlides/notesSlide8.xml><?xml version="1.0" encoding="utf-8"?>
+<p:notes xmlns:a="http://schemas.openxmlformats.org/drawingml/2006/main" xmlns:r="http://schemas.openxmlformats.org/officeDocument/2006/relationships" xmlns:p="http://schemas.openxmlformats.org/presentationml/2006/main">
+  <p:cSld>
+    <p:spTree>
+      <p:nvGrpSpPr>
+        <p:cNvPr id="1" name=""/>
+        <p:cNvGrpSpPr/>
+        <p:nvPr/>
+      </p:nvGrpSpPr>
+      <p:grpSpPr>
+        <a:xfrm>
+          <a:off x="0" y="0"/>
+          <a:ext cx="0" cy="0"/>
+          <a:chOff x="0" y="0"/>
+          <a:chExt cx="0" cy="0"/>
+        </a:xfrm>
+      </p:grpSpPr>
+      <p:sp>
+        <p:nvSpPr>
+          <p:cNvPr id="2" name="Slide Image Placeholder 1"/>
+          <p:cNvSpPr>
+            <a:spLocks noGrp="1" noRot="1" noChangeAspect="1"/>
+          </p:cNvSpPr>
+          <p:nvPr>
+            <p:ph type="sldImg"/>
+          </p:nvPr>
+        </p:nvSpPr>
+        <p:spPr/>
+      </p:sp>
+      <p:sp>
+        <p:nvSpPr>
+          <p:cNvPr id="3" name="Notes Placeholder 2"/>
+          <p:cNvSpPr>
+            <a:spLocks noGrp="1"/>
+          </p:cNvSpPr>
+          <p:nvPr>
+            <p:ph type="body" idx="1"/>
+          </p:nvPr>
+        </p:nvSpPr>
+        <p:spPr/>
+        <p:txBody>
+          <a:bodyPr/>
+          <a:lstStyle/>
+          <a:p>
+            <a:r>
+              <a:rPr lang="en-US" dirty="0"/>
+              <a:t/>
+            </a:r>
+            <a:endParaRPr lang="en-US" dirty="0"/>
+          </a:p>
+        </p:txBody>
+      </p:sp>
+      <p:sp>
+        <p:nvSpPr>
+          <p:cNvPr id="4" name="Slide Number Placeholder 3"/>
+          <p:cNvSpPr>
+            <a:spLocks noGrp="1"/>
+          </p:cNvSpPr>
+          <p:nvPr>
+            <p:ph type="sldNum" sz="quarter" idx="10"/>
+          </p:nvPr>
+        </p:nvSpPr>
+        <p:spPr/>
+        <p:txBody>
+          <a:bodyPr/>
+          <a:lstStyle/>
+          <a:p>
+            <a:fld id="{F7021451-1387-4CA6-816F-3879F97B5CBC}" type="slidenum">
+              <a:rPr lang="en-US"/>
+              <a:t>8</a:t>
             </a:fld>
             <a:endParaRPr lang="en-US"/>
           </a:p>
@@ -1391,7 +1480,7 @@
     <p:bg>
       <p:bgPr>
         <a:solidFill>
-          <a:srgbClr val="E65100"/>
+          <a:srgbClr val="BF360C"/>
         </a:solidFill>
       </p:bgPr>
     </p:bg>
@@ -1424,7 +1513,7 @@
             <a:avLst/>
           </a:prstGeom>
           <a:solidFill>
-            <a:srgbClr val="F57C00"/>
+            <a:srgbClr val="E65100"/>
           </a:solidFill>
           <a:ln/>
         </p:spPr>
@@ -1445,7 +1534,7 @@
         </p:blipFill>
         <p:spPr>
           <a:xfrm>
-            <a:off x="3931920" y="457200"/>
+            <a:off x="3931920" y="365760"/>
             <a:ext cx="1280160" cy="1280160"/>
           </a:xfrm>
           <a:prstGeom prst="rect">
@@ -1461,7 +1550,7 @@
         </p:nvSpPr>
         <p:spPr>
           <a:xfrm>
-            <a:off x="457200" y="1828800"/>
+            <a:off x="457200" y="1737360"/>
             <a:ext cx="8229600" cy="457200"/>
           </a:xfrm>
           <a:prstGeom prst="rect">
@@ -1500,8 +1589,8 @@
         </p:nvSpPr>
         <p:spPr>
           <a:xfrm>
-            <a:off x="457200" y="2286000"/>
-            <a:ext cx="8229600" cy="822960"/>
+            <a:off x="274320" y="2194560"/>
+            <a:ext cx="8595360" cy="822960"/>
           </a:xfrm>
           <a:prstGeom prst="rect">
             <a:avLst/>
@@ -1517,7 +1606,7 @@
               <a:buNone/>
             </a:pPr>
             <a:r>
-              <a:rPr lang="en-US" sz="3400" b="1" dirty="0">
+              <a:rPr lang="en-US" sz="3200" b="1" dirty="0">
                 <a:solidFill>
                   <a:srgbClr val="FFFFFF"/>
                 </a:solidFill>
@@ -1527,7 +1616,7 @@
               </a:rPr>
               <a:t>Plan de tests</a:t>
             </a:r>
-            <a:endParaRPr lang="en-US" sz="3400" dirty="0"/>
+            <a:endParaRPr lang="en-US" sz="3200" dirty="0"/>
           </a:p>
         </p:txBody>
       </p:sp>
@@ -1539,7 +1628,7 @@
         </p:nvSpPr>
         <p:spPr>
           <a:xfrm>
-            <a:off x="457200" y="3108960"/>
+            <a:off x="457200" y="3017520"/>
             <a:ext cx="8229600" cy="457200"/>
           </a:xfrm>
           <a:prstGeom prst="rect">
@@ -1556,7 +1645,7 @@
               <a:buNone/>
             </a:pPr>
             <a:r>
-              <a:rPr lang="en-US" sz="1600" dirty="0">
+              <a:rPr lang="en-US" sz="1500" dirty="0">
                 <a:solidFill>
                   <a:srgbClr val="CCCCCC"/>
                 </a:solidFill>
@@ -1564,9 +1653,9 @@
                 <a:ea typeface="Calibri" pitchFamily="34" charset="-122"/>
                 <a:cs typeface="Calibri" pitchFamily="34" charset="-120"/>
               </a:rPr>
-              <a:t>White/black box, données de test, traçabilité</a:t>
-            </a:r>
-            <a:endParaRPr lang="en-US" sz="1600" dirty="0"/>
+              <a:t>White/black box · Données de test · Traçabilité</a:t>
+            </a:r>
+            <a:endParaRPr lang="en-US" sz="1500" dirty="0"/>
           </a:p>
         </p:txBody>
       </p:sp>
@@ -1597,54 +1686,15 @@
             <a:r>
               <a:rPr lang="en-US" sz="1100" dirty="0">
                 <a:solidFill>
-                  <a:srgbClr val="AAAACC"/>
+                  <a:srgbClr val="AA99CC"/>
                 </a:solidFill>
                 <a:latin typeface="Calibri" pitchFamily="34" charset="0"/>
                 <a:ea typeface="Calibri" pitchFamily="34" charset="-122"/>
                 <a:cs typeface="Calibri" pitchFamily="34" charset="-120"/>
               </a:rPr>
-              <a:t>Unit 4 — Database Design &amp; Development | SwissSound Studios</a:t>
+              <a:t>SwissSound Studios | BTEC: P4 M4 | LO3</a:t>
             </a:r>
             <a:endParaRPr lang="en-US" sz="1100" dirty="0"/>
-          </a:p>
-        </p:txBody>
-      </p:sp>
-      <p:sp>
-        <p:nvSpPr>
-          <p:cNvPr id="8" name="Text 5"/>
-          <p:cNvSpPr/>
-          <p:nvPr/>
-        </p:nvSpPr>
-        <p:spPr>
-          <a:xfrm>
-            <a:off x="457200" y="4434840"/>
-            <a:ext cx="8229600" cy="274320"/>
-          </a:xfrm>
-          <a:prstGeom prst="rect">
-            <a:avLst/>
-          </a:prstGeom>
-          <a:noFill/>
-          <a:ln/>
-        </p:spPr>
-        <p:txBody>
-          <a:bodyPr wrap="square" lIns="0" tIns="0" rIns="0" bIns="0" rtlCol="0" anchor="ctr"/>
-          <a:lstStyle/>
-          <a:p>
-            <a:pPr algn="ctr" indent="0" marL="0">
-              <a:buNone/>
-            </a:pPr>
-            <a:r>
-              <a:rPr lang="en-US" sz="1000" dirty="0">
-                <a:solidFill>
-                  <a:srgbClr val="8888AA"/>
-                </a:solidFill>
-                <a:latin typeface="Calibri" pitchFamily="34" charset="0"/>
-                <a:ea typeface="Calibri" pitchFamily="34" charset="-122"/>
-                <a:cs typeface="Calibri" pitchFamily="34" charset="-120"/>
-              </a:rPr>
-              <a:t>BTEC : P4 M4 | LO3</a:t>
-            </a:r>
-            <a:endParaRPr lang="en-US" sz="1000" dirty="0"/>
           </a:p>
         </p:txBody>
       </p:sp>
@@ -1689,13 +1739,13 @@
         <p:spPr>
           <a:xfrm>
             <a:off x="0" y="0"/>
-            <a:ext cx="9144000" cy="73152"/>
-          </a:xfrm>
-          <a:prstGeom prst="rect">
-            <a:avLst/>
-          </a:prstGeom>
-          <a:solidFill>
-            <a:srgbClr val="F57C00"/>
+            <a:ext cx="9144000" cy="54864"/>
+          </a:xfrm>
+          <a:prstGeom prst="rect">
+            <a:avLst/>
+          </a:prstGeom>
+          <a:solidFill>
+            <a:srgbClr val="E65100"/>
           </a:solidFill>
           <a:ln/>
         </p:spPr>
@@ -1708,8 +1758,8 @@
         </p:nvSpPr>
         <p:spPr>
           <a:xfrm>
-            <a:off x="457200" y="228600"/>
-            <a:ext cx="8229600" cy="640080"/>
+            <a:off x="457200" y="182880"/>
+            <a:ext cx="8229600" cy="594360"/>
           </a:xfrm>
           <a:prstGeom prst="rect">
             <a:avLst/>
@@ -1725,9 +1775,9 @@
               <a:buNone/>
             </a:pPr>
             <a:r>
-              <a:rPr lang="en-US" sz="2600" b="1" dirty="0">
+              <a:rPr lang="en-US" sz="2400" b="1" dirty="0">
                 <a:solidFill>
-                  <a:srgbClr val="E65100"/>
+                  <a:srgbClr val="BF360C"/>
                 </a:solidFill>
                 <a:latin typeface="Trebuchet MS" pitchFamily="34" charset="0"/>
                 <a:ea typeface="Trebuchet MS" pitchFamily="34" charset="-122"/>
@@ -1735,7 +1785,7 @@
               </a:rPr>
               <a:t>Pourquoi tester une BDD ?</a:t>
             </a:r>
-            <a:endParaRPr lang="en-US" sz="2600" dirty="0"/>
+            <a:endParaRPr lang="en-US" sz="2400" dirty="0"/>
           </a:p>
         </p:txBody>
       </p:sp>
@@ -1747,8 +1797,8 @@
         </p:nvSpPr>
         <p:spPr>
           <a:xfrm>
-            <a:off x="457200" y="1051560"/>
-            <a:ext cx="8229600" cy="640080"/>
+            <a:off x="457200" y="914400"/>
+            <a:ext cx="8229600" cy="521208"/>
           </a:xfrm>
           <a:prstGeom prst="rect">
             <a:avLst/>
@@ -1774,14 +1824,14 @@
         </p:nvSpPr>
         <p:spPr>
           <a:xfrm>
-            <a:off x="457200" y="1051560"/>
-            <a:ext cx="54864" cy="640080"/>
-          </a:xfrm>
-          <a:prstGeom prst="rect">
-            <a:avLst/>
-          </a:prstGeom>
-          <a:solidFill>
-            <a:srgbClr val="F57C00"/>
+            <a:off x="457200" y="914400"/>
+            <a:ext cx="45720" cy="521208"/>
+          </a:xfrm>
+          <a:prstGeom prst="rect">
+            <a:avLst/>
+          </a:prstGeom>
+          <a:solidFill>
+            <a:srgbClr val="E65100"/>
           </a:solidFill>
           <a:ln/>
         </p:spPr>
@@ -1794,8 +1844,8 @@
         </p:nvSpPr>
         <p:spPr>
           <a:xfrm>
-            <a:off x="731520" y="1051560"/>
-            <a:ext cx="7772400" cy="640080"/>
+            <a:off x="685800" y="914400"/>
+            <a:ext cx="7818120" cy="521208"/>
           </a:xfrm>
           <a:prstGeom prst="rect">
             <a:avLst/>
@@ -1811,7 +1861,7 @@
               <a:buNone/>
             </a:pPr>
             <a:r>
-              <a:rPr lang="en-US" sz="1300" dirty="0">
+              <a:rPr lang="en-US" sz="1200" dirty="0">
                 <a:solidFill>
                   <a:srgbClr val="1A1A2E"/>
                 </a:solidFill>
@@ -1819,9 +1869,9 @@
                 <a:ea typeface="Calibri" pitchFamily="34" charset="-122"/>
                 <a:cs typeface="Calibri" pitchFamily="34" charset="-120"/>
               </a:rPr>
-              <a:t>Vérifier que les contraintes fonctionnent</a:t>
-            </a:r>
-            <a:endParaRPr lang="en-US" sz="1300" dirty="0"/>
+              <a:t>Vérifier que les contraintes FONCTIONNENT (NOT NULL, FK, CHECK...)</a:t>
+            </a:r>
+            <a:endParaRPr lang="en-US" sz="1200" dirty="0"/>
           </a:p>
         </p:txBody>
       </p:sp>
@@ -1833,8 +1883,8 @@
         </p:nvSpPr>
         <p:spPr>
           <a:xfrm>
-            <a:off x="457200" y="1783080"/>
-            <a:ext cx="8229600" cy="640080"/>
+            <a:off x="457200" y="1463040"/>
+            <a:ext cx="8229600" cy="521208"/>
           </a:xfrm>
           <a:prstGeom prst="rect">
             <a:avLst/>
@@ -1860,14 +1910,14 @@
         </p:nvSpPr>
         <p:spPr>
           <a:xfrm>
-            <a:off x="457200" y="1783080"/>
-            <a:ext cx="54864" cy="640080"/>
-          </a:xfrm>
-          <a:prstGeom prst="rect">
-            <a:avLst/>
-          </a:prstGeom>
-          <a:solidFill>
-            <a:srgbClr val="F57C00"/>
+            <a:off x="457200" y="1463040"/>
+            <a:ext cx="45720" cy="521208"/>
+          </a:xfrm>
+          <a:prstGeom prst="rect">
+            <a:avLst/>
+          </a:prstGeom>
+          <a:solidFill>
+            <a:srgbClr val="E65100"/>
           </a:solidFill>
           <a:ln/>
         </p:spPr>
@@ -1880,8 +1930,8 @@
         </p:nvSpPr>
         <p:spPr>
           <a:xfrm>
-            <a:off x="731520" y="1783080"/>
-            <a:ext cx="7772400" cy="640080"/>
+            <a:off x="685800" y="1463040"/>
+            <a:ext cx="7818120" cy="521208"/>
           </a:xfrm>
           <a:prstGeom prst="rect">
             <a:avLst/>
@@ -1897,7 +1947,7 @@
               <a:buNone/>
             </a:pPr>
             <a:r>
-              <a:rPr lang="en-US" sz="1300" dirty="0">
+              <a:rPr lang="en-US" sz="1200" dirty="0">
                 <a:solidFill>
                   <a:srgbClr val="1A1A2E"/>
                 </a:solidFill>
@@ -1905,9 +1955,9 @@
                 <a:ea typeface="Calibri" pitchFamily="34" charset="-122"/>
                 <a:cs typeface="Calibri" pitchFamily="34" charset="-120"/>
               </a:rPr>
-              <a:t>Vérifier que les requêtes retournent les bons résultats</a:t>
-            </a:r>
-            <a:endParaRPr lang="en-US" sz="1300" dirty="0"/>
+              <a:t>Vérifier que les requêtes retournent les BONS résultats</a:t>
+            </a:r>
+            <a:endParaRPr lang="en-US" sz="1200" dirty="0"/>
           </a:p>
         </p:txBody>
       </p:sp>
@@ -1919,8 +1969,8 @@
         </p:nvSpPr>
         <p:spPr>
           <a:xfrm>
-            <a:off x="457200" y="2514600"/>
-            <a:ext cx="8229600" cy="640080"/>
+            <a:off x="457200" y="2011680"/>
+            <a:ext cx="8229600" cy="521208"/>
           </a:xfrm>
           <a:prstGeom prst="rect">
             <a:avLst/>
@@ -1946,14 +1996,14 @@
         </p:nvSpPr>
         <p:spPr>
           <a:xfrm>
-            <a:off x="457200" y="2514600"/>
-            <a:ext cx="54864" cy="640080"/>
-          </a:xfrm>
-          <a:prstGeom prst="rect">
-            <a:avLst/>
-          </a:prstGeom>
-          <a:solidFill>
-            <a:srgbClr val="F57C00"/>
+            <a:off x="457200" y="2011680"/>
+            <a:ext cx="45720" cy="521208"/>
+          </a:xfrm>
+          <a:prstGeom prst="rect">
+            <a:avLst/>
+          </a:prstGeom>
+          <a:solidFill>
+            <a:srgbClr val="E65100"/>
           </a:solidFill>
           <a:ln/>
         </p:spPr>
@@ -1966,8 +2016,8 @@
         </p:nvSpPr>
         <p:spPr>
           <a:xfrm>
-            <a:off x="731520" y="2514600"/>
-            <a:ext cx="7772400" cy="640080"/>
+            <a:off x="685800" y="2011680"/>
+            <a:ext cx="7818120" cy="521208"/>
           </a:xfrm>
           <a:prstGeom prst="rect">
             <a:avLst/>
@@ -1983,7 +2033,7 @@
               <a:buNone/>
             </a:pPr>
             <a:r>
-              <a:rPr lang="en-US" sz="1300" dirty="0">
+              <a:rPr lang="en-US" sz="1200" dirty="0">
                 <a:solidFill>
                   <a:srgbClr val="1A1A2E"/>
                 </a:solidFill>
@@ -1991,9 +2041,9 @@
                 <a:ea typeface="Calibri" pitchFamily="34" charset="-122"/>
                 <a:cs typeface="Calibri" pitchFamily="34" charset="-120"/>
               </a:rPr>
-              <a:t>Vérifier que la sécurité bloque les accès non autorisés</a:t>
-            </a:r>
-            <a:endParaRPr lang="en-US" sz="1300" dirty="0"/>
+              <a:t>Vérifier que la sécurité BLOQUE les accès non autorisés</a:t>
+            </a:r>
+            <a:endParaRPr lang="en-US" sz="1200" dirty="0"/>
           </a:p>
         </p:txBody>
       </p:sp>
@@ -2005,8 +2055,8 @@
         </p:nvSpPr>
         <p:spPr>
           <a:xfrm>
-            <a:off x="457200" y="3246120"/>
-            <a:ext cx="8229600" cy="640080"/>
+            <a:off x="457200" y="2560320"/>
+            <a:ext cx="8229600" cy="521208"/>
           </a:xfrm>
           <a:prstGeom prst="rect">
             <a:avLst/>
@@ -2032,14 +2082,14 @@
         </p:nvSpPr>
         <p:spPr>
           <a:xfrm>
-            <a:off x="457200" y="3246120"/>
-            <a:ext cx="54864" cy="640080"/>
-          </a:xfrm>
-          <a:prstGeom prst="rect">
-            <a:avLst/>
-          </a:prstGeom>
-          <a:solidFill>
-            <a:srgbClr val="F57C00"/>
+            <a:off x="457200" y="2560320"/>
+            <a:ext cx="45720" cy="521208"/>
+          </a:xfrm>
+          <a:prstGeom prst="rect">
+            <a:avLst/>
+          </a:prstGeom>
+          <a:solidFill>
+            <a:srgbClr val="E65100"/>
           </a:solidFill>
           <a:ln/>
         </p:spPr>
@@ -2052,8 +2102,8 @@
         </p:nvSpPr>
         <p:spPr>
           <a:xfrm>
-            <a:off x="731520" y="3246120"/>
-            <a:ext cx="7772400" cy="640080"/>
+            <a:off x="685800" y="2560320"/>
+            <a:ext cx="7818120" cy="521208"/>
           </a:xfrm>
           <a:prstGeom prst="rect">
             <a:avLst/>
@@ -2069,7 +2119,7 @@
               <a:buNone/>
             </a:pPr>
             <a:r>
-              <a:rPr lang="en-US" sz="1300" dirty="0">
+              <a:rPr lang="en-US" sz="1200" dirty="0">
                 <a:solidFill>
                   <a:srgbClr val="1A1A2E"/>
                 </a:solidFill>
@@ -2077,9 +2127,9 @@
                 <a:ea typeface="Calibri" pitchFamily="34" charset="-122"/>
                 <a:cs typeface="Calibri" pitchFamily="34" charset="-120"/>
               </a:rPr>
-              <a:t>Vérifier la robustesse (données invalides, cas limites)</a:t>
-            </a:r>
-            <a:endParaRPr lang="en-US" sz="1300" dirty="0"/>
+              <a:t>Vérifier la robustesse face aux données invalides</a:t>
+            </a:r>
+            <a:endParaRPr lang="en-US" sz="1200" dirty="0"/>
           </a:p>
         </p:txBody>
       </p:sp>
@@ -2091,8 +2141,8 @@
         </p:nvSpPr>
         <p:spPr>
           <a:xfrm>
-            <a:off x="457200" y="3977640"/>
-            <a:ext cx="8229600" cy="640080"/>
+            <a:off x="457200" y="3108960"/>
+            <a:ext cx="8229600" cy="521208"/>
           </a:xfrm>
           <a:prstGeom prst="rect">
             <a:avLst/>
@@ -2118,14 +2168,14 @@
         </p:nvSpPr>
         <p:spPr>
           <a:xfrm>
-            <a:off x="457200" y="3977640"/>
-            <a:ext cx="54864" cy="640080"/>
-          </a:xfrm>
-          <a:prstGeom prst="rect">
-            <a:avLst/>
-          </a:prstGeom>
-          <a:solidFill>
-            <a:srgbClr val="F57C00"/>
+            <a:off x="457200" y="3108960"/>
+            <a:ext cx="45720" cy="521208"/>
+          </a:xfrm>
+          <a:prstGeom prst="rect">
+            <a:avLst/>
+          </a:prstGeom>
+          <a:solidFill>
+            <a:srgbClr val="E65100"/>
           </a:solidFill>
           <a:ln/>
         </p:spPr>
@@ -2138,8 +2188,8 @@
         </p:nvSpPr>
         <p:spPr>
           <a:xfrm>
-            <a:off x="731520" y="3977640"/>
-            <a:ext cx="7772400" cy="640080"/>
+            <a:off x="685800" y="3108960"/>
+            <a:ext cx="7818120" cy="521208"/>
           </a:xfrm>
           <a:prstGeom prst="rect">
             <a:avLst/>
@@ -2155,7 +2205,7 @@
               <a:buNone/>
             </a:pPr>
             <a:r>
-              <a:rPr lang="en-US" sz="1300" dirty="0">
+              <a:rPr lang="en-US" sz="1200" dirty="0">
                 <a:solidFill>
                   <a:srgbClr val="1A1A2E"/>
                 </a:solidFill>
@@ -2163,22 +2213,69 @@
                 <a:ea typeface="Calibri" pitchFamily="34" charset="-122"/>
                 <a:cs typeface="Calibri" pitchFamily="34" charset="-120"/>
               </a:rPr>
-              <a:t>Documenter les résultats pour le rapport BTEC</a:t>
-            </a:r>
-            <a:endParaRPr lang="en-US" sz="1300" dirty="0"/>
-          </a:p>
-        </p:txBody>
-      </p:sp>
-      <p:sp>
-        <p:nvSpPr>
-          <p:cNvPr id="19" name="Text 17"/>
-          <p:cNvSpPr/>
-          <p:nvPr/>
-        </p:nvSpPr>
-        <p:spPr>
-          <a:xfrm>
-            <a:off x="8229600" y="4754880"/>
-            <a:ext cx="731520" cy="274320"/>
+              <a:t>Documenter les résultats pour le rapport BTEC (P4)</a:t>
+            </a:r>
+            <a:endParaRPr lang="en-US" sz="1200" dirty="0"/>
+          </a:p>
+        </p:txBody>
+      </p:sp>
+      <p:sp>
+        <p:nvSpPr>
+          <p:cNvPr id="19" name="Shape 17"/>
+          <p:cNvSpPr/>
+          <p:nvPr/>
+        </p:nvSpPr>
+        <p:spPr>
+          <a:xfrm>
+            <a:off x="457200" y="3657600"/>
+            <a:ext cx="8229600" cy="521208"/>
+          </a:xfrm>
+          <a:prstGeom prst="rect">
+            <a:avLst/>
+          </a:prstGeom>
+          <a:solidFill>
+            <a:srgbClr val="FFF3E0"/>
+          </a:solidFill>
+          <a:ln/>
+          <a:effectLst>
+            <a:outerShdw sx="100000" sy="100000" kx="0" ky="0" algn="bl" rotWithShape="0" blurRad="50800" dist="25400" dir="8100000">
+              <a:srgbClr val="000000">
+                <a:alpha val="12000"/>
+              </a:srgbClr>
+            </a:outerShdw>
+          </a:effectLst>
+        </p:spPr>
+      </p:sp>
+      <p:sp>
+        <p:nvSpPr>
+          <p:cNvPr id="20" name="Shape 18"/>
+          <p:cNvSpPr/>
+          <p:nvPr/>
+        </p:nvSpPr>
+        <p:spPr>
+          <a:xfrm>
+            <a:off x="457200" y="3657600"/>
+            <a:ext cx="45720" cy="521208"/>
+          </a:xfrm>
+          <a:prstGeom prst="rect">
+            <a:avLst/>
+          </a:prstGeom>
+          <a:solidFill>
+            <a:srgbClr val="E65100"/>
+          </a:solidFill>
+          <a:ln/>
+        </p:spPr>
+      </p:sp>
+      <p:sp>
+        <p:nvSpPr>
+          <p:cNvPr id="21" name="Text 19"/>
+          <p:cNvSpPr/>
+          <p:nvPr/>
+        </p:nvSpPr>
+        <p:spPr>
+          <a:xfrm>
+            <a:off x="685800" y="3657600"/>
+            <a:ext cx="7818120" cy="521208"/>
           </a:xfrm>
           <a:prstGeom prst="rect">
             <a:avLst/>
@@ -2190,21 +2287,21 @@
           <a:bodyPr wrap="square" lIns="0" tIns="0" rIns="0" bIns="0" rtlCol="0" anchor="ctr"/>
           <a:lstStyle/>
           <a:p>
-            <a:pPr algn="r" indent="0" marL="0">
+            <a:pPr indent="0" marL="0">
               <a:buNone/>
             </a:pPr>
             <a:r>
-              <a:rPr lang="en-US" sz="900" dirty="0">
+              <a:rPr lang="en-US" sz="1200" dirty="0">
                 <a:solidFill>
-                  <a:srgbClr val="AAAAAA"/>
+                  <a:srgbClr val="1A1A2E"/>
                 </a:solidFill>
                 <a:latin typeface="Calibri" pitchFamily="34" charset="0"/>
                 <a:ea typeface="Calibri" pitchFamily="34" charset="-122"/>
                 <a:cs typeface="Calibri" pitchFamily="34" charset="-120"/>
               </a:rPr>
-              <a:t>2/6</a:t>
-            </a:r>
-            <a:endParaRPr lang="en-US" sz="900" dirty="0"/>
+              <a:t>Les tests prouvent que le système MARCHE comme prévu</a:t>
+            </a:r>
+            <a:endParaRPr lang="en-US" sz="1200" dirty="0"/>
           </a:p>
         </p:txBody>
       </p:sp>
@@ -2249,13 +2346,13 @@
         <p:spPr>
           <a:xfrm>
             <a:off x="0" y="0"/>
-            <a:ext cx="9144000" cy="73152"/>
-          </a:xfrm>
-          <a:prstGeom prst="rect">
-            <a:avLst/>
-          </a:prstGeom>
-          <a:solidFill>
-            <a:srgbClr val="F57C00"/>
+            <a:ext cx="9144000" cy="54864"/>
+          </a:xfrm>
+          <a:prstGeom prst="rect">
+            <a:avLst/>
+          </a:prstGeom>
+          <a:solidFill>
+            <a:srgbClr val="E65100"/>
           </a:solidFill>
           <a:ln/>
         </p:spPr>
@@ -2268,8 +2365,8 @@
         </p:nvSpPr>
         <p:spPr>
           <a:xfrm>
-            <a:off x="457200" y="228600"/>
-            <a:ext cx="8229600" cy="640080"/>
+            <a:off x="457200" y="182880"/>
+            <a:ext cx="8229600" cy="594360"/>
           </a:xfrm>
           <a:prstGeom prst="rect">
             <a:avLst/>
@@ -2285,9 +2382,9 @@
               <a:buNone/>
             </a:pPr>
             <a:r>
-              <a:rPr lang="en-US" sz="2600" b="1" dirty="0">
+              <a:rPr lang="en-US" sz="2400" b="1" dirty="0">
                 <a:solidFill>
-                  <a:srgbClr val="E65100"/>
+                  <a:srgbClr val="BF360C"/>
                 </a:solidFill>
                 <a:latin typeface="Trebuchet MS" pitchFamily="34" charset="0"/>
                 <a:ea typeface="Trebuchet MS" pitchFamily="34" charset="-122"/>
@@ -2295,7 +2392,7 @@
               </a:rPr>
               <a:t>White box vs Black box</a:t>
             </a:r>
-            <a:endParaRPr lang="en-US" sz="2600" dirty="0"/>
+            <a:endParaRPr lang="en-US" sz="2400" dirty="0"/>
           </a:p>
         </p:txBody>
       </p:sp>
@@ -2307,8 +2404,8 @@
         </p:nvSpPr>
         <p:spPr>
           <a:xfrm>
-            <a:off x="457200" y="1051560"/>
-            <a:ext cx="8229600" cy="640080"/>
+            <a:off x="457200" y="914400"/>
+            <a:ext cx="8229600" cy="464058"/>
           </a:xfrm>
           <a:prstGeom prst="rect">
             <a:avLst/>
@@ -2334,14 +2431,14 @@
         </p:nvSpPr>
         <p:spPr>
           <a:xfrm>
-            <a:off x="457200" y="1051560"/>
-            <a:ext cx="54864" cy="640080"/>
-          </a:xfrm>
-          <a:prstGeom prst="rect">
-            <a:avLst/>
-          </a:prstGeom>
-          <a:solidFill>
-            <a:srgbClr val="F57C00"/>
+            <a:off x="457200" y="914400"/>
+            <a:ext cx="45720" cy="464058"/>
+          </a:xfrm>
+          <a:prstGeom prst="rect">
+            <a:avLst/>
+          </a:prstGeom>
+          <a:solidFill>
+            <a:srgbClr val="E65100"/>
           </a:solidFill>
           <a:ln/>
         </p:spPr>
@@ -2354,8 +2451,8 @@
         </p:nvSpPr>
         <p:spPr>
           <a:xfrm>
-            <a:off x="731520" y="1051560"/>
-            <a:ext cx="7772400" cy="640080"/>
+            <a:off x="685800" y="914400"/>
+            <a:ext cx="7818120" cy="464058"/>
           </a:xfrm>
           <a:prstGeom prst="rect">
             <a:avLst/>
@@ -2371,7 +2468,7 @@
               <a:buNone/>
             </a:pPr>
             <a:r>
-              <a:rPr lang="en-US" sz="1300" dirty="0">
+              <a:rPr lang="en-US" sz="1200" dirty="0">
                 <a:solidFill>
                   <a:srgbClr val="1A1A2E"/>
                 </a:solidFill>
@@ -2379,9 +2476,9 @@
                 <a:ea typeface="Calibri" pitchFamily="34" charset="-122"/>
                 <a:cs typeface="Calibri" pitchFamily="34" charset="-120"/>
               </a:rPr>
-              <a:t>White box : on CONNAÎT le code/la structure</a:t>
-            </a:r>
-            <a:endParaRPr lang="en-US" sz="1300" dirty="0"/>
+              <a:t>WHITE BOX : le testeur CONNAÎT le code/la structure</a:t>
+            </a:r>
+            <a:endParaRPr lang="en-US" sz="1200" dirty="0"/>
           </a:p>
         </p:txBody>
       </p:sp>
@@ -2393,8 +2490,8 @@
         </p:nvSpPr>
         <p:spPr>
           <a:xfrm>
-            <a:off x="457200" y="1783080"/>
-            <a:ext cx="8229600" cy="640080"/>
+            <a:off x="457200" y="1405890"/>
+            <a:ext cx="8229600" cy="464058"/>
           </a:xfrm>
           <a:prstGeom prst="rect">
             <a:avLst/>
@@ -2420,14 +2517,14 @@
         </p:nvSpPr>
         <p:spPr>
           <a:xfrm>
-            <a:off x="457200" y="1783080"/>
-            <a:ext cx="54864" cy="640080"/>
-          </a:xfrm>
-          <a:prstGeom prst="rect">
-            <a:avLst/>
-          </a:prstGeom>
-          <a:solidFill>
-            <a:srgbClr val="F57C00"/>
+            <a:off x="457200" y="1405890"/>
+            <a:ext cx="45720" cy="464058"/>
+          </a:xfrm>
+          <a:prstGeom prst="rect">
+            <a:avLst/>
+          </a:prstGeom>
+          <a:solidFill>
+            <a:srgbClr val="E65100"/>
           </a:solidFill>
           <a:ln/>
         </p:spPr>
@@ -2440,8 +2537,8 @@
         </p:nvSpPr>
         <p:spPr>
           <a:xfrm>
-            <a:off x="731520" y="1783080"/>
-            <a:ext cx="7772400" cy="640080"/>
+            <a:off x="685800" y="1405890"/>
+            <a:ext cx="7818120" cy="464058"/>
           </a:xfrm>
           <a:prstGeom prst="rect">
             <a:avLst/>
@@ -2457,17 +2554,17 @@
               <a:buNone/>
             </a:pPr>
             <a:r>
-              <a:rPr lang="en-US" sz="1100" dirty="0">
+              <a:rPr lang="en-US" sz="1200" dirty="0">
                 <a:solidFill>
-                  <a:srgbClr val="E65100"/>
+                  <a:srgbClr val="1A1A2E"/>
                 </a:solidFill>
-                <a:latin typeface="JetBrains Mono" pitchFamily="34" charset="0"/>
-                <a:ea typeface="JetBrains Mono" pitchFamily="34" charset="-122"/>
-                <a:cs typeface="JetBrains Mono" pitchFamily="34" charset="-120"/>
+                <a:latin typeface="Calibri" pitchFamily="34" charset="0"/>
+                <a:ea typeface="Calibri" pitchFamily="34" charset="-122"/>
+                <a:cs typeface="Calibri" pitchFamily="34" charset="-120"/>
               </a:rPr>
-              <a:t>→ Tester chaque contrainte, chaque requête SQL</a:t>
-            </a:r>
-            <a:endParaRPr lang="en-US" sz="1100" dirty="0"/>
+              <a:t>→ Tester chaque contrainte SQL individuellement</a:t>
+            </a:r>
+            <a:endParaRPr lang="en-US" sz="1200" dirty="0"/>
           </a:p>
         </p:txBody>
       </p:sp>
@@ -2479,8 +2576,8 @@
         </p:nvSpPr>
         <p:spPr>
           <a:xfrm>
-            <a:off x="457200" y="2514600"/>
-            <a:ext cx="8229600" cy="640080"/>
+            <a:off x="457200" y="1897380"/>
+            <a:ext cx="8229600" cy="464058"/>
           </a:xfrm>
           <a:prstGeom prst="rect">
             <a:avLst/>
@@ -2506,14 +2603,14 @@
         </p:nvSpPr>
         <p:spPr>
           <a:xfrm>
-            <a:off x="457200" y="2514600"/>
-            <a:ext cx="54864" cy="640080"/>
-          </a:xfrm>
-          <a:prstGeom prst="rect">
-            <a:avLst/>
-          </a:prstGeom>
-          <a:solidFill>
-            <a:srgbClr val="F57C00"/>
+            <a:off x="457200" y="1897380"/>
+            <a:ext cx="45720" cy="464058"/>
+          </a:xfrm>
+          <a:prstGeom prst="rect">
+            <a:avLst/>
+          </a:prstGeom>
+          <a:solidFill>
+            <a:srgbClr val="E65100"/>
           </a:solidFill>
           <a:ln/>
         </p:spPr>
@@ -2526,8 +2623,8 @@
         </p:nvSpPr>
         <p:spPr>
           <a:xfrm>
-            <a:off x="731520" y="2514600"/>
-            <a:ext cx="7772400" cy="640080"/>
+            <a:off x="685800" y="1897380"/>
+            <a:ext cx="7818120" cy="464058"/>
           </a:xfrm>
           <a:prstGeom prst="rect">
             <a:avLst/>
@@ -2543,7 +2640,7 @@
               <a:buNone/>
             </a:pPr>
             <a:r>
-              <a:rPr lang="en-US" sz="1300" dirty="0">
+              <a:rPr lang="en-US" sz="1200" dirty="0">
                 <a:solidFill>
                   <a:srgbClr val="1A1A2E"/>
                 </a:solidFill>
@@ -2551,9 +2648,9 @@
                 <a:ea typeface="Calibri" pitchFamily="34" charset="-122"/>
                 <a:cs typeface="Calibri" pitchFamily="34" charset="-120"/>
               </a:rPr>
-              <a:t>Black box : on teste les RÉSULTATS sans voir le code</a:t>
-            </a:r>
-            <a:endParaRPr lang="en-US" sz="1300" dirty="0"/>
+              <a:t>→ Vérifier chaque requête SELECT retourne le bon résultat</a:t>
+            </a:r>
+            <a:endParaRPr lang="en-US" sz="1200" dirty="0"/>
           </a:p>
         </p:txBody>
       </p:sp>
@@ -2565,8 +2662,8 @@
         </p:nvSpPr>
         <p:spPr>
           <a:xfrm>
-            <a:off x="457200" y="3246120"/>
-            <a:ext cx="8229600" cy="640080"/>
+            <a:off x="457200" y="2388870"/>
+            <a:ext cx="8229600" cy="464058"/>
           </a:xfrm>
           <a:prstGeom prst="rect">
             <a:avLst/>
@@ -2592,14 +2689,14 @@
         </p:nvSpPr>
         <p:spPr>
           <a:xfrm>
-            <a:off x="457200" y="3246120"/>
-            <a:ext cx="54864" cy="640080"/>
-          </a:xfrm>
-          <a:prstGeom prst="rect">
-            <a:avLst/>
-          </a:prstGeom>
-          <a:solidFill>
-            <a:srgbClr val="F57C00"/>
+            <a:off x="457200" y="2388870"/>
+            <a:ext cx="45720" cy="464058"/>
+          </a:xfrm>
+          <a:prstGeom prst="rect">
+            <a:avLst/>
+          </a:prstGeom>
+          <a:solidFill>
+            <a:srgbClr val="E65100"/>
           </a:solidFill>
           <a:ln/>
         </p:spPr>
@@ -2612,8 +2709,8 @@
         </p:nvSpPr>
         <p:spPr>
           <a:xfrm>
-            <a:off x="731520" y="3246120"/>
-            <a:ext cx="7772400" cy="640080"/>
+            <a:off x="685800" y="2388870"/>
+            <a:ext cx="7818120" cy="464058"/>
           </a:xfrm>
           <a:prstGeom prst="rect">
             <a:avLst/>
@@ -2629,17 +2726,17 @@
               <a:buNone/>
             </a:pPr>
             <a:r>
-              <a:rPr lang="en-US" sz="1100" dirty="0">
+              <a:rPr lang="en-US" sz="1200" dirty="0">
                 <a:solidFill>
-                  <a:srgbClr val="E65100"/>
+                  <a:srgbClr val="1A1A2E"/>
                 </a:solidFill>
-                <a:latin typeface="JetBrains Mono" pitchFamily="34" charset="0"/>
-                <a:ea typeface="JetBrains Mono" pitchFamily="34" charset="-122"/>
-                <a:cs typeface="JetBrains Mono" pitchFamily="34" charset="-120"/>
+                <a:latin typeface="Calibri" pitchFamily="34" charset="0"/>
+                <a:ea typeface="Calibri" pitchFamily="34" charset="-122"/>
+                <a:cs typeface="Calibri" pitchFamily="34" charset="-120"/>
               </a:rPr>
-              <a:t>→ Tester les fonctionnalités comme un utilisateur</a:t>
-            </a:r>
-            <a:endParaRPr lang="en-US" sz="1100" dirty="0"/>
+              <a:t>→ Tester chaque procédure stockée avec différents paramètres</a:t>
+            </a:r>
+            <a:endParaRPr lang="en-US" sz="1200" dirty="0"/>
           </a:p>
         </p:txBody>
       </p:sp>
@@ -2651,8 +2748,8 @@
         </p:nvSpPr>
         <p:spPr>
           <a:xfrm>
-            <a:off x="457200" y="3977640"/>
-            <a:ext cx="8229600" cy="640080"/>
+            <a:off x="457200" y="2880360"/>
+            <a:ext cx="8229600" cy="464058"/>
           </a:xfrm>
           <a:prstGeom prst="rect">
             <a:avLst/>
@@ -2678,14 +2775,14 @@
         </p:nvSpPr>
         <p:spPr>
           <a:xfrm>
-            <a:off x="457200" y="3977640"/>
-            <a:ext cx="54864" cy="640080"/>
-          </a:xfrm>
-          <a:prstGeom prst="rect">
-            <a:avLst/>
-          </a:prstGeom>
-          <a:solidFill>
-            <a:srgbClr val="F57C00"/>
+            <a:off x="457200" y="2880360"/>
+            <a:ext cx="45720" cy="464058"/>
+          </a:xfrm>
+          <a:prstGeom prst="rect">
+            <a:avLst/>
+          </a:prstGeom>
+          <a:solidFill>
+            <a:srgbClr val="E65100"/>
           </a:solidFill>
           <a:ln/>
         </p:spPr>
@@ -2698,8 +2795,8 @@
         </p:nvSpPr>
         <p:spPr>
           <a:xfrm>
-            <a:off x="731520" y="3977640"/>
-            <a:ext cx="7772400" cy="640080"/>
+            <a:off x="685800" y="2880360"/>
+            <a:ext cx="7818120" cy="464058"/>
           </a:xfrm>
           <a:prstGeom prst="rect">
             <a:avLst/>
@@ -2715,7 +2812,7 @@
               <a:buNone/>
             </a:pPr>
             <a:r>
-              <a:rPr lang="en-US" sz="1300" dirty="0">
+              <a:rPr lang="en-US" sz="1200" dirty="0">
                 <a:solidFill>
                   <a:srgbClr val="1A1A2E"/>
                 </a:solidFill>
@@ -2723,22 +2820,69 @@
                 <a:ea typeface="Calibri" pitchFamily="34" charset="-122"/>
                 <a:cs typeface="Calibri" pitchFamily="34" charset="-120"/>
               </a:rPr>
-              <a:t>SwissSound : on fait les deux (white box + black box)</a:t>
-            </a:r>
-            <a:endParaRPr lang="en-US" sz="1300" dirty="0"/>
-          </a:p>
-        </p:txBody>
-      </p:sp>
-      <p:sp>
-        <p:nvSpPr>
-          <p:cNvPr id="19" name="Text 17"/>
-          <p:cNvSpPr/>
-          <p:nvPr/>
-        </p:nvSpPr>
-        <p:spPr>
-          <a:xfrm>
-            <a:off x="8229600" y="4754880"/>
-            <a:ext cx="731520" cy="274320"/>
+              <a:t>BLACK BOX : le testeur ne voit que les entrées/sorties</a:t>
+            </a:r>
+            <a:endParaRPr lang="en-US" sz="1200" dirty="0"/>
+          </a:p>
+        </p:txBody>
+      </p:sp>
+      <p:sp>
+        <p:nvSpPr>
+          <p:cNvPr id="19" name="Shape 17"/>
+          <p:cNvSpPr/>
+          <p:nvPr/>
+        </p:nvSpPr>
+        <p:spPr>
+          <a:xfrm>
+            <a:off x="457200" y="3371850"/>
+            <a:ext cx="8229600" cy="464058"/>
+          </a:xfrm>
+          <a:prstGeom prst="rect">
+            <a:avLst/>
+          </a:prstGeom>
+          <a:solidFill>
+            <a:srgbClr val="FFF3E0"/>
+          </a:solidFill>
+          <a:ln/>
+          <a:effectLst>
+            <a:outerShdw sx="100000" sy="100000" kx="0" ky="0" algn="bl" rotWithShape="0" blurRad="50800" dist="25400" dir="8100000">
+              <a:srgbClr val="000000">
+                <a:alpha val="12000"/>
+              </a:srgbClr>
+            </a:outerShdw>
+          </a:effectLst>
+        </p:spPr>
+      </p:sp>
+      <p:sp>
+        <p:nvSpPr>
+          <p:cNvPr id="20" name="Shape 18"/>
+          <p:cNvSpPr/>
+          <p:nvPr/>
+        </p:nvSpPr>
+        <p:spPr>
+          <a:xfrm>
+            <a:off x="457200" y="3371850"/>
+            <a:ext cx="45720" cy="464058"/>
+          </a:xfrm>
+          <a:prstGeom prst="rect">
+            <a:avLst/>
+          </a:prstGeom>
+          <a:solidFill>
+            <a:srgbClr val="E65100"/>
+          </a:solidFill>
+          <a:ln/>
+        </p:spPr>
+      </p:sp>
+      <p:sp>
+        <p:nvSpPr>
+          <p:cNvPr id="21" name="Text 19"/>
+          <p:cNvSpPr/>
+          <p:nvPr/>
+        </p:nvSpPr>
+        <p:spPr>
+          <a:xfrm>
+            <a:off x="685800" y="3371850"/>
+            <a:ext cx="7818120" cy="464058"/>
           </a:xfrm>
           <a:prstGeom prst="rect">
             <a:avLst/>
@@ -2750,21 +2894,193 @@
           <a:bodyPr wrap="square" lIns="0" tIns="0" rIns="0" bIns="0" rtlCol="0" anchor="ctr"/>
           <a:lstStyle/>
           <a:p>
-            <a:pPr algn="r" indent="0" marL="0">
+            <a:pPr indent="0" marL="0">
               <a:buNone/>
             </a:pPr>
             <a:r>
-              <a:rPr lang="en-US" sz="900" dirty="0">
+              <a:rPr lang="en-US" sz="1200" dirty="0">
                 <a:solidFill>
-                  <a:srgbClr val="AAAAAA"/>
+                  <a:srgbClr val="1A1A2E"/>
                 </a:solidFill>
                 <a:latin typeface="Calibri" pitchFamily="34" charset="0"/>
                 <a:ea typeface="Calibri" pitchFamily="34" charset="-122"/>
                 <a:cs typeface="Calibri" pitchFamily="34" charset="-120"/>
               </a:rPr>
-              <a:t>3/6</a:t>
-            </a:r>
-            <a:endParaRPr lang="en-US" sz="900" dirty="0"/>
+              <a:t>→ Tester les formulaires : saisir un email invalide → rejet ?</a:t>
+            </a:r>
+            <a:endParaRPr lang="en-US" sz="1200" dirty="0"/>
+          </a:p>
+        </p:txBody>
+      </p:sp>
+      <p:sp>
+        <p:nvSpPr>
+          <p:cNvPr id="22" name="Shape 20"/>
+          <p:cNvSpPr/>
+          <p:nvPr/>
+        </p:nvSpPr>
+        <p:spPr>
+          <a:xfrm>
+            <a:off x="457200" y="3863340"/>
+            <a:ext cx="8229600" cy="464058"/>
+          </a:xfrm>
+          <a:prstGeom prst="rect">
+            <a:avLst/>
+          </a:prstGeom>
+          <a:solidFill>
+            <a:srgbClr val="FFFFFF"/>
+          </a:solidFill>
+          <a:ln/>
+          <a:effectLst>
+            <a:outerShdw sx="100000" sy="100000" kx="0" ky="0" algn="bl" rotWithShape="0" blurRad="50800" dist="25400" dir="8100000">
+              <a:srgbClr val="000000">
+                <a:alpha val="12000"/>
+              </a:srgbClr>
+            </a:outerShdw>
+          </a:effectLst>
+        </p:spPr>
+      </p:sp>
+      <p:sp>
+        <p:nvSpPr>
+          <p:cNvPr id="23" name="Shape 21"/>
+          <p:cNvSpPr/>
+          <p:nvPr/>
+        </p:nvSpPr>
+        <p:spPr>
+          <a:xfrm>
+            <a:off x="457200" y="3863340"/>
+            <a:ext cx="45720" cy="464058"/>
+          </a:xfrm>
+          <a:prstGeom prst="rect">
+            <a:avLst/>
+          </a:prstGeom>
+          <a:solidFill>
+            <a:srgbClr val="E65100"/>
+          </a:solidFill>
+          <a:ln/>
+        </p:spPr>
+      </p:sp>
+      <p:sp>
+        <p:nvSpPr>
+          <p:cNvPr id="24" name="Text 22"/>
+          <p:cNvSpPr/>
+          <p:nvPr/>
+        </p:nvSpPr>
+        <p:spPr>
+          <a:xfrm>
+            <a:off x="685800" y="3863340"/>
+            <a:ext cx="7818120" cy="464058"/>
+          </a:xfrm>
+          <a:prstGeom prst="rect">
+            <a:avLst/>
+          </a:prstGeom>
+          <a:noFill/>
+          <a:ln/>
+        </p:spPr>
+        <p:txBody>
+          <a:bodyPr wrap="square" lIns="0" tIns="0" rIns="0" bIns="0" rtlCol="0" anchor="ctr"/>
+          <a:lstStyle/>
+          <a:p>
+            <a:pPr indent="0" marL="0">
+              <a:buNone/>
+            </a:pPr>
+            <a:r>
+              <a:rPr lang="en-US" sz="1200" dirty="0">
+                <a:solidFill>
+                  <a:srgbClr val="1A1A2E"/>
+                </a:solidFill>
+                <a:latin typeface="Calibri" pitchFamily="34" charset="0"/>
+                <a:ea typeface="Calibri" pitchFamily="34" charset="-122"/>
+                <a:cs typeface="Calibri" pitchFamily="34" charset="-120"/>
+              </a:rPr>
+              <a:t>→ Tester les fonctionnalités : ajouter un artiste → il apparaît ?</a:t>
+            </a:r>
+            <a:endParaRPr lang="en-US" sz="1200" dirty="0"/>
+          </a:p>
+        </p:txBody>
+      </p:sp>
+      <p:sp>
+        <p:nvSpPr>
+          <p:cNvPr id="25" name="Shape 23"/>
+          <p:cNvSpPr/>
+          <p:nvPr/>
+        </p:nvSpPr>
+        <p:spPr>
+          <a:xfrm>
+            <a:off x="457200" y="4354830"/>
+            <a:ext cx="8229600" cy="464058"/>
+          </a:xfrm>
+          <a:prstGeom prst="rect">
+            <a:avLst/>
+          </a:prstGeom>
+          <a:solidFill>
+            <a:srgbClr val="FFF3E0"/>
+          </a:solidFill>
+          <a:ln/>
+          <a:effectLst>
+            <a:outerShdw sx="100000" sy="100000" kx="0" ky="0" algn="bl" rotWithShape="0" blurRad="50800" dist="25400" dir="8100000">
+              <a:srgbClr val="000000">
+                <a:alpha val="12000"/>
+              </a:srgbClr>
+            </a:outerShdw>
+          </a:effectLst>
+        </p:spPr>
+      </p:sp>
+      <p:sp>
+        <p:nvSpPr>
+          <p:cNvPr id="26" name="Shape 24"/>
+          <p:cNvSpPr/>
+          <p:nvPr/>
+        </p:nvSpPr>
+        <p:spPr>
+          <a:xfrm>
+            <a:off x="457200" y="4354830"/>
+            <a:ext cx="45720" cy="464058"/>
+          </a:xfrm>
+          <a:prstGeom prst="rect">
+            <a:avLst/>
+          </a:prstGeom>
+          <a:solidFill>
+            <a:srgbClr val="E65100"/>
+          </a:solidFill>
+          <a:ln/>
+        </p:spPr>
+      </p:sp>
+      <p:sp>
+        <p:nvSpPr>
+          <p:cNvPr id="27" name="Text 25"/>
+          <p:cNvSpPr/>
+          <p:nvPr/>
+        </p:nvSpPr>
+        <p:spPr>
+          <a:xfrm>
+            <a:off x="685800" y="4354830"/>
+            <a:ext cx="7818120" cy="464058"/>
+          </a:xfrm>
+          <a:prstGeom prst="rect">
+            <a:avLst/>
+          </a:prstGeom>
+          <a:noFill/>
+          <a:ln/>
+        </p:spPr>
+        <p:txBody>
+          <a:bodyPr wrap="square" lIns="0" tIns="0" rIns="0" bIns="0" rtlCol="0" anchor="ctr"/>
+          <a:lstStyle/>
+          <a:p>
+            <a:pPr indent="0" marL="0">
+              <a:buNone/>
+            </a:pPr>
+            <a:r>
+              <a:rPr lang="en-US" sz="1200" dirty="0">
+                <a:solidFill>
+                  <a:srgbClr val="1A1A2E"/>
+                </a:solidFill>
+                <a:latin typeface="Calibri" pitchFamily="34" charset="0"/>
+                <a:ea typeface="Calibri" pitchFamily="34" charset="-122"/>
+                <a:cs typeface="Calibri" pitchFamily="34" charset="-120"/>
+              </a:rPr>
+              <a:t>SwissSound : on fait les DEUX types de tests</a:t>
+            </a:r>
+            <a:endParaRPr lang="en-US" sz="1200" dirty="0"/>
           </a:p>
         </p:txBody>
       </p:sp>
@@ -2809,13 +3125,13 @@
         <p:spPr>
           <a:xfrm>
             <a:off x="0" y="0"/>
-            <a:ext cx="9144000" cy="73152"/>
-          </a:xfrm>
-          <a:prstGeom prst="rect">
-            <a:avLst/>
-          </a:prstGeom>
-          <a:solidFill>
-            <a:srgbClr val="F57C00"/>
+            <a:ext cx="9144000" cy="54864"/>
+          </a:xfrm>
+          <a:prstGeom prst="rect">
+            <a:avLst/>
+          </a:prstGeom>
+          <a:solidFill>
+            <a:srgbClr val="E65100"/>
           </a:solidFill>
           <a:ln/>
         </p:spPr>
@@ -2828,8 +3144,8 @@
         </p:nvSpPr>
         <p:spPr>
           <a:xfrm>
-            <a:off x="457200" y="228600"/>
-            <a:ext cx="8229600" cy="640080"/>
+            <a:off x="457200" y="182880"/>
+            <a:ext cx="8229600" cy="594360"/>
           </a:xfrm>
           <a:prstGeom prst="rect">
             <a:avLst/>
@@ -2845,17 +3161,17 @@
               <a:buNone/>
             </a:pPr>
             <a:r>
-              <a:rPr lang="en-US" sz="2600" b="1" dirty="0">
+              <a:rPr lang="en-US" sz="2400" b="1" dirty="0">
                 <a:solidFill>
-                  <a:srgbClr val="E65100"/>
+                  <a:srgbClr val="BF360C"/>
                 </a:solidFill>
                 <a:latin typeface="Trebuchet MS" pitchFamily="34" charset="0"/>
                 <a:ea typeface="Trebuchet MS" pitchFamily="34" charset="-122"/>
                 <a:cs typeface="Trebuchet MS" pitchFamily="34" charset="-120"/>
               </a:rPr>
-              <a:t>Données de test</a:t>
-            </a:r>
-            <a:endParaRPr lang="en-US" sz="2600" dirty="0"/>
+              <a:t>Données de test : 3 types obligatoires</a:t>
+            </a:r>
+            <a:endParaRPr lang="en-US" sz="2400" dirty="0"/>
           </a:p>
         </p:txBody>
       </p:sp>
@@ -2867,8 +3183,8 @@
         </p:nvSpPr>
         <p:spPr>
           <a:xfrm>
-            <a:off x="457200" y="1051560"/>
-            <a:ext cx="8229600" cy="640080"/>
+            <a:off x="457200" y="914400"/>
+            <a:ext cx="8229600" cy="409448"/>
           </a:xfrm>
           <a:prstGeom prst="rect">
             <a:avLst/>
@@ -2894,14 +3210,14 @@
         </p:nvSpPr>
         <p:spPr>
           <a:xfrm>
-            <a:off x="457200" y="1051560"/>
-            <a:ext cx="54864" cy="640080"/>
-          </a:xfrm>
-          <a:prstGeom prst="rect">
-            <a:avLst/>
-          </a:prstGeom>
-          <a:solidFill>
-            <a:srgbClr val="F57C00"/>
+            <a:off x="457200" y="914400"/>
+            <a:ext cx="45720" cy="409448"/>
+          </a:xfrm>
+          <a:prstGeom prst="rect">
+            <a:avLst/>
+          </a:prstGeom>
+          <a:solidFill>
+            <a:srgbClr val="E65100"/>
           </a:solidFill>
           <a:ln/>
         </p:spPr>
@@ -2914,8 +3230,8 @@
         </p:nvSpPr>
         <p:spPr>
           <a:xfrm>
-            <a:off x="731520" y="1051560"/>
-            <a:ext cx="7772400" cy="640080"/>
+            <a:off x="685800" y="914400"/>
+            <a:ext cx="7818120" cy="409448"/>
           </a:xfrm>
           <a:prstGeom prst="rect">
             <a:avLst/>
@@ -2931,7 +3247,7 @@
               <a:buNone/>
             </a:pPr>
             <a:r>
-              <a:rPr lang="en-US" sz="1300" dirty="0">
+              <a:rPr lang="en-US" sz="1200" dirty="0">
                 <a:solidFill>
                   <a:srgbClr val="1A1A2E"/>
                 </a:solidFill>
@@ -2939,9 +3255,9 @@
                 <a:ea typeface="Calibri" pitchFamily="34" charset="-122"/>
                 <a:cs typeface="Calibri" pitchFamily="34" charset="-120"/>
               </a:rPr>
-              <a:t>Normales : données valides typiques (nom = 'Léman')</a:t>
-            </a:r>
-            <a:endParaRPr lang="en-US" sz="1300" dirty="0"/>
+              <a:t>NORMALES : données valides typiques</a:t>
+            </a:r>
+            <a:endParaRPr lang="en-US" sz="1200" dirty="0"/>
           </a:p>
         </p:txBody>
       </p:sp>
@@ -2953,8 +3269,8 @@
         </p:nvSpPr>
         <p:spPr>
           <a:xfrm>
-            <a:off x="457200" y="1783080"/>
-            <a:ext cx="8229600" cy="640080"/>
+            <a:off x="457200" y="1351280"/>
+            <a:ext cx="8229600" cy="409448"/>
           </a:xfrm>
           <a:prstGeom prst="rect">
             <a:avLst/>
@@ -2980,14 +3296,14 @@
         </p:nvSpPr>
         <p:spPr>
           <a:xfrm>
-            <a:off x="457200" y="1783080"/>
-            <a:ext cx="54864" cy="640080"/>
-          </a:xfrm>
-          <a:prstGeom prst="rect">
-            <a:avLst/>
-          </a:prstGeom>
-          <a:solidFill>
-            <a:srgbClr val="F57C00"/>
+            <a:off x="457200" y="1351280"/>
+            <a:ext cx="45720" cy="409448"/>
+          </a:xfrm>
+          <a:prstGeom prst="rect">
+            <a:avLst/>
+          </a:prstGeom>
+          <a:solidFill>
+            <a:srgbClr val="E65100"/>
           </a:solidFill>
           <a:ln/>
         </p:spPr>
@@ -3000,8 +3316,8 @@
         </p:nvSpPr>
         <p:spPr>
           <a:xfrm>
-            <a:off x="731520" y="1783080"/>
-            <a:ext cx="7772400" cy="640080"/>
+            <a:off x="685800" y="1351280"/>
+            <a:ext cx="7818120" cy="409448"/>
           </a:xfrm>
           <a:prstGeom prst="rect">
             <a:avLst/>
@@ -3017,17 +3333,17 @@
               <a:buNone/>
             </a:pPr>
             <a:r>
-              <a:rPr lang="en-US" sz="1100" dirty="0">
+              <a:rPr lang="en-US" sz="1200" dirty="0">
                 <a:solidFill>
-                  <a:srgbClr val="E65100"/>
+                  <a:srgbClr val="1A1A2E"/>
                 </a:solidFill>
-                <a:latin typeface="JetBrains Mono" pitchFamily="34" charset="0"/>
-                <a:ea typeface="JetBrains Mono" pitchFamily="34" charset="-122"/>
-                <a:cs typeface="JetBrains Mono" pitchFamily="34" charset="-120"/>
+                <a:latin typeface="Calibri" pitchFamily="34" charset="0"/>
+                <a:ea typeface="Calibri" pitchFamily="34" charset="-122"/>
+                <a:cs typeface="Calibri" pitchFamily="34" charset="-120"/>
               </a:rPr>
-              <a:t>Limites : valeurs aux bornes (VARCHAR(100) → exactement 100 caractères)</a:t>
-            </a:r>
-            <a:endParaRPr lang="en-US" sz="1100" dirty="0"/>
+              <a:t>→ nom = 'Léman', prix = 24.90, email = 'test@mail.ch'</a:t>
+            </a:r>
+            <a:endParaRPr lang="en-US" sz="1200" dirty="0"/>
           </a:p>
         </p:txBody>
       </p:sp>
@@ -3039,8 +3355,8 @@
         </p:nvSpPr>
         <p:spPr>
           <a:xfrm>
-            <a:off x="457200" y="2514600"/>
-            <a:ext cx="8229600" cy="640080"/>
+            <a:off x="457200" y="1788160"/>
+            <a:ext cx="8229600" cy="409448"/>
           </a:xfrm>
           <a:prstGeom prst="rect">
             <a:avLst/>
@@ -3066,14 +3382,14 @@
         </p:nvSpPr>
         <p:spPr>
           <a:xfrm>
-            <a:off x="457200" y="2514600"/>
-            <a:ext cx="54864" cy="640080"/>
-          </a:xfrm>
-          <a:prstGeom prst="rect">
-            <a:avLst/>
-          </a:prstGeom>
-          <a:solidFill>
-            <a:srgbClr val="F57C00"/>
+            <a:off x="457200" y="1788160"/>
+            <a:ext cx="45720" cy="409448"/>
+          </a:xfrm>
+          <a:prstGeom prst="rect">
+            <a:avLst/>
+          </a:prstGeom>
+          <a:solidFill>
+            <a:srgbClr val="E65100"/>
           </a:solidFill>
           <a:ln/>
         </p:spPr>
@@ -3086,8 +3402,8 @@
         </p:nvSpPr>
         <p:spPr>
           <a:xfrm>
-            <a:off x="731520" y="2514600"/>
-            <a:ext cx="7772400" cy="640080"/>
+            <a:off x="685800" y="1788160"/>
+            <a:ext cx="7818120" cy="409448"/>
           </a:xfrm>
           <a:prstGeom prst="rect">
             <a:avLst/>
@@ -3103,7 +3419,93 @@
               <a:buNone/>
             </a:pPr>
             <a:r>
-              <a:rPr lang="en-US" sz="1300" dirty="0">
+              <a:rPr lang="en-US" sz="1000" dirty="0">
+                <a:solidFill>
+                  <a:srgbClr val="BF360C"/>
+                </a:solidFill>
+                <a:latin typeface="JetBrains Mono" pitchFamily="34" charset="0"/>
+                <a:ea typeface="JetBrains Mono" pitchFamily="34" charset="-122"/>
+                <a:cs typeface="JetBrains Mono" pitchFamily="34" charset="-120"/>
+              </a:rPr>
+              <a:t>LIMITES : valeurs aux bornes</a:t>
+            </a:r>
+            <a:endParaRPr lang="en-US" sz="1000" dirty="0"/>
+          </a:p>
+        </p:txBody>
+      </p:sp>
+      <p:sp>
+        <p:nvSpPr>
+          <p:cNvPr id="13" name="Shape 11"/>
+          <p:cNvSpPr/>
+          <p:nvPr/>
+        </p:nvSpPr>
+        <p:spPr>
+          <a:xfrm>
+            <a:off x="457200" y="2225040"/>
+            <a:ext cx="8229600" cy="409448"/>
+          </a:xfrm>
+          <a:prstGeom prst="rect">
+            <a:avLst/>
+          </a:prstGeom>
+          <a:solidFill>
+            <a:srgbClr val="FFF3E0"/>
+          </a:solidFill>
+          <a:ln/>
+          <a:effectLst>
+            <a:outerShdw sx="100000" sy="100000" kx="0" ky="0" algn="bl" rotWithShape="0" blurRad="50800" dist="25400" dir="8100000">
+              <a:srgbClr val="000000">
+                <a:alpha val="12000"/>
+              </a:srgbClr>
+            </a:outerShdw>
+          </a:effectLst>
+        </p:spPr>
+      </p:sp>
+      <p:sp>
+        <p:nvSpPr>
+          <p:cNvPr id="14" name="Shape 12"/>
+          <p:cNvSpPr/>
+          <p:nvPr/>
+        </p:nvSpPr>
+        <p:spPr>
+          <a:xfrm>
+            <a:off x="457200" y="2225040"/>
+            <a:ext cx="45720" cy="409448"/>
+          </a:xfrm>
+          <a:prstGeom prst="rect">
+            <a:avLst/>
+          </a:prstGeom>
+          <a:solidFill>
+            <a:srgbClr val="E65100"/>
+          </a:solidFill>
+          <a:ln/>
+        </p:spPr>
+      </p:sp>
+      <p:sp>
+        <p:nvSpPr>
+          <p:cNvPr id="15" name="Text 13"/>
+          <p:cNvSpPr/>
+          <p:nvPr/>
+        </p:nvSpPr>
+        <p:spPr>
+          <a:xfrm>
+            <a:off x="685800" y="2225040"/>
+            <a:ext cx="7818120" cy="409448"/>
+          </a:xfrm>
+          <a:prstGeom prst="rect">
+            <a:avLst/>
+          </a:prstGeom>
+          <a:noFill/>
+          <a:ln/>
+        </p:spPr>
+        <p:txBody>
+          <a:bodyPr wrap="square" lIns="0" tIns="0" rIns="0" bIns="0" rtlCol="0" anchor="ctr"/>
+          <a:lstStyle/>
+          <a:p>
+            <a:pPr indent="0" marL="0">
+              <a:buNone/>
+            </a:pPr>
+            <a:r>
+              <a:rPr lang="en-US" sz="1200" dirty="0">
                 <a:solidFill>
                   <a:srgbClr val="1A1A2E"/>
                 </a:solidFill>
@@ -3111,28 +3513,28 @@
                 <a:ea typeface="Calibri" pitchFamily="34" charset="-122"/>
                 <a:cs typeface="Calibri" pitchFamily="34" charset="-120"/>
               </a:rPr>
-              <a:t>Erronées : données volontairement invalides (email sans @, prix négatif)</a:t>
-            </a:r>
-            <a:endParaRPr lang="en-US" sz="1300" dirty="0"/>
-          </a:p>
-        </p:txBody>
-      </p:sp>
-      <p:sp>
-        <p:nvSpPr>
-          <p:cNvPr id="13" name="Shape 11"/>
-          <p:cNvSpPr/>
-          <p:nvPr/>
-        </p:nvSpPr>
-        <p:spPr>
-          <a:xfrm>
-            <a:off x="457200" y="3246120"/>
-            <a:ext cx="8229600" cy="640080"/>
-          </a:xfrm>
-          <a:prstGeom prst="rect">
-            <a:avLst/>
-          </a:prstGeom>
-          <a:solidFill>
-            <a:srgbClr val="FFF3E0"/>
+              <a:t>→ VARCHAR(100) → chaîne de 100 caractères exactement</a:t>
+            </a:r>
+            <a:endParaRPr lang="en-US" sz="1200" dirty="0"/>
+          </a:p>
+        </p:txBody>
+      </p:sp>
+      <p:sp>
+        <p:nvSpPr>
+          <p:cNvPr id="16" name="Shape 14"/>
+          <p:cNvSpPr/>
+          <p:nvPr/>
+        </p:nvSpPr>
+        <p:spPr>
+          <a:xfrm>
+            <a:off x="457200" y="2661920"/>
+            <a:ext cx="8229600" cy="409448"/>
+          </a:xfrm>
+          <a:prstGeom prst="rect">
+            <a:avLst/>
+          </a:prstGeom>
+          <a:solidFill>
+            <a:srgbClr val="FFFFFF"/>
           </a:solidFill>
           <a:ln/>
           <a:effectLst>
@@ -3146,34 +3548,34 @@
       </p:sp>
       <p:sp>
         <p:nvSpPr>
-          <p:cNvPr id="14" name="Shape 12"/>
-          <p:cNvSpPr/>
-          <p:nvPr/>
-        </p:nvSpPr>
-        <p:spPr>
-          <a:xfrm>
-            <a:off x="457200" y="3246120"/>
-            <a:ext cx="54864" cy="640080"/>
-          </a:xfrm>
-          <a:prstGeom prst="rect">
-            <a:avLst/>
-          </a:prstGeom>
-          <a:solidFill>
-            <a:srgbClr val="F57C00"/>
-          </a:solidFill>
-          <a:ln/>
-        </p:spPr>
-      </p:sp>
-      <p:sp>
-        <p:nvSpPr>
-          <p:cNvPr id="15" name="Text 13"/>
-          <p:cNvSpPr/>
-          <p:nvPr/>
-        </p:nvSpPr>
-        <p:spPr>
-          <a:xfrm>
-            <a:off x="731520" y="3246120"/>
-            <a:ext cx="7772400" cy="640080"/>
+          <p:cNvPr id="17" name="Shape 15"/>
+          <p:cNvSpPr/>
+          <p:nvPr/>
+        </p:nvSpPr>
+        <p:spPr>
+          <a:xfrm>
+            <a:off x="457200" y="2661920"/>
+            <a:ext cx="45720" cy="409448"/>
+          </a:xfrm>
+          <a:prstGeom prst="rect">
+            <a:avLst/>
+          </a:prstGeom>
+          <a:solidFill>
+            <a:srgbClr val="E65100"/>
+          </a:solidFill>
+          <a:ln/>
+        </p:spPr>
+      </p:sp>
+      <p:sp>
+        <p:nvSpPr>
+          <p:cNvPr id="18" name="Text 16"/>
+          <p:cNvSpPr/>
+          <p:nvPr/>
+        </p:nvSpPr>
+        <p:spPr>
+          <a:xfrm>
+            <a:off x="685800" y="2661920"/>
+            <a:ext cx="7818120" cy="409448"/>
           </a:xfrm>
           <a:prstGeom prst="rect">
             <a:avLst/>
@@ -3189,7 +3591,7 @@
               <a:buNone/>
             </a:pPr>
             <a:r>
-              <a:rPr lang="en-US" sz="1300" dirty="0">
+              <a:rPr lang="en-US" sz="1200" dirty="0">
                 <a:solidFill>
                   <a:srgbClr val="1A1A2E"/>
                 </a:solidFill>
@@ -3197,28 +3599,28 @@
                 <a:ea typeface="Calibri" pitchFamily="34" charset="-122"/>
                 <a:cs typeface="Calibri" pitchFamily="34" charset="-120"/>
               </a:rPr>
-              <a:t>NULL : tester les champs obligatoires et optionnels</a:t>
-            </a:r>
-            <a:endParaRPr lang="en-US" sz="1300" dirty="0"/>
-          </a:p>
-        </p:txBody>
-      </p:sp>
-      <p:sp>
-        <p:nvSpPr>
-          <p:cNvPr id="16" name="Shape 14"/>
-          <p:cNvSpPr/>
-          <p:nvPr/>
-        </p:nvSpPr>
-        <p:spPr>
-          <a:xfrm>
-            <a:off x="457200" y="3977640"/>
-            <a:ext cx="8229600" cy="640080"/>
-          </a:xfrm>
-          <a:prstGeom prst="rect">
-            <a:avLst/>
-          </a:prstGeom>
-          <a:solidFill>
-            <a:srgbClr val="FFFFFF"/>
+              <a:t>→ CHECK prix &gt;= 0 → prix = 0 (limite basse)</a:t>
+            </a:r>
+            <a:endParaRPr lang="en-US" sz="1200" dirty="0"/>
+          </a:p>
+        </p:txBody>
+      </p:sp>
+      <p:sp>
+        <p:nvSpPr>
+          <p:cNvPr id="19" name="Shape 17"/>
+          <p:cNvSpPr/>
+          <p:nvPr/>
+        </p:nvSpPr>
+        <p:spPr>
+          <a:xfrm>
+            <a:off x="457200" y="3098800"/>
+            <a:ext cx="8229600" cy="409448"/>
+          </a:xfrm>
+          <a:prstGeom prst="rect">
+            <a:avLst/>
+          </a:prstGeom>
+          <a:solidFill>
+            <a:srgbClr val="FFF3E0"/>
           </a:solidFill>
           <a:ln/>
           <a:effectLst>
@@ -3232,34 +3634,34 @@
       </p:sp>
       <p:sp>
         <p:nvSpPr>
-          <p:cNvPr id="17" name="Shape 15"/>
-          <p:cNvSpPr/>
-          <p:nvPr/>
-        </p:nvSpPr>
-        <p:spPr>
-          <a:xfrm>
-            <a:off x="457200" y="3977640"/>
-            <a:ext cx="54864" cy="640080"/>
-          </a:xfrm>
-          <a:prstGeom prst="rect">
-            <a:avLst/>
-          </a:prstGeom>
-          <a:solidFill>
-            <a:srgbClr val="F57C00"/>
-          </a:solidFill>
-          <a:ln/>
-        </p:spPr>
-      </p:sp>
-      <p:sp>
-        <p:nvSpPr>
-          <p:cNvPr id="18" name="Text 16"/>
-          <p:cNvSpPr/>
-          <p:nvPr/>
-        </p:nvSpPr>
-        <p:spPr>
-          <a:xfrm>
-            <a:off x="731520" y="3977640"/>
-            <a:ext cx="7772400" cy="640080"/>
+          <p:cNvPr id="20" name="Shape 18"/>
+          <p:cNvSpPr/>
+          <p:nvPr/>
+        </p:nvSpPr>
+        <p:spPr>
+          <a:xfrm>
+            <a:off x="457200" y="3098800"/>
+            <a:ext cx="45720" cy="409448"/>
+          </a:xfrm>
+          <a:prstGeom prst="rect">
+            <a:avLst/>
+          </a:prstGeom>
+          <a:solidFill>
+            <a:srgbClr val="E65100"/>
+          </a:solidFill>
+          <a:ln/>
+        </p:spPr>
+      </p:sp>
+      <p:sp>
+        <p:nvSpPr>
+          <p:cNvPr id="21" name="Text 19"/>
+          <p:cNvSpPr/>
+          <p:nvPr/>
+        </p:nvSpPr>
+        <p:spPr>
+          <a:xfrm>
+            <a:off x="685800" y="3098800"/>
+            <a:ext cx="7818120" cy="409448"/>
           </a:xfrm>
           <a:prstGeom prst="rect">
             <a:avLst/>
@@ -3275,7 +3677,7 @@
               <a:buNone/>
             </a:pPr>
             <a:r>
-              <a:rPr lang="en-US" sz="1300" dirty="0">
+              <a:rPr lang="en-US" sz="1200" dirty="0">
                 <a:solidFill>
                   <a:srgbClr val="1A1A2E"/>
                 </a:solidFill>
@@ -3283,22 +3685,69 @@
                 <a:ea typeface="Calibri" pitchFamily="34" charset="-122"/>
                 <a:cs typeface="Calibri" pitchFamily="34" charset="-120"/>
               </a:rPr>
-              <a:t>Règle : 3 types de données par cas de test</a:t>
-            </a:r>
-            <a:endParaRPr lang="en-US" sz="1300" dirty="0"/>
-          </a:p>
-        </p:txBody>
-      </p:sp>
-      <p:sp>
-        <p:nvSpPr>
-          <p:cNvPr id="19" name="Text 17"/>
-          <p:cNvSpPr/>
-          <p:nvPr/>
-        </p:nvSpPr>
-        <p:spPr>
-          <a:xfrm>
-            <a:off x="8229600" y="4754880"/>
-            <a:ext cx="731520" cy="274320"/>
+              <a:t>ERRONÉES : données volontairement invalides</a:t>
+            </a:r>
+            <a:endParaRPr lang="en-US" sz="1200" dirty="0"/>
+          </a:p>
+        </p:txBody>
+      </p:sp>
+      <p:sp>
+        <p:nvSpPr>
+          <p:cNvPr id="22" name="Shape 20"/>
+          <p:cNvSpPr/>
+          <p:nvPr/>
+        </p:nvSpPr>
+        <p:spPr>
+          <a:xfrm>
+            <a:off x="457200" y="3535680"/>
+            <a:ext cx="8229600" cy="409448"/>
+          </a:xfrm>
+          <a:prstGeom prst="rect">
+            <a:avLst/>
+          </a:prstGeom>
+          <a:solidFill>
+            <a:srgbClr val="FFFFFF"/>
+          </a:solidFill>
+          <a:ln/>
+          <a:effectLst>
+            <a:outerShdw sx="100000" sy="100000" kx="0" ky="0" algn="bl" rotWithShape="0" blurRad="50800" dist="25400" dir="8100000">
+              <a:srgbClr val="000000">
+                <a:alpha val="12000"/>
+              </a:srgbClr>
+            </a:outerShdw>
+          </a:effectLst>
+        </p:spPr>
+      </p:sp>
+      <p:sp>
+        <p:nvSpPr>
+          <p:cNvPr id="23" name="Shape 21"/>
+          <p:cNvSpPr/>
+          <p:nvPr/>
+        </p:nvSpPr>
+        <p:spPr>
+          <a:xfrm>
+            <a:off x="457200" y="3535680"/>
+            <a:ext cx="45720" cy="409448"/>
+          </a:xfrm>
+          <a:prstGeom prst="rect">
+            <a:avLst/>
+          </a:prstGeom>
+          <a:solidFill>
+            <a:srgbClr val="E65100"/>
+          </a:solidFill>
+          <a:ln/>
+        </p:spPr>
+      </p:sp>
+      <p:sp>
+        <p:nvSpPr>
+          <p:cNvPr id="24" name="Text 22"/>
+          <p:cNvSpPr/>
+          <p:nvPr/>
+        </p:nvSpPr>
+        <p:spPr>
+          <a:xfrm>
+            <a:off x="685800" y="3535680"/>
+            <a:ext cx="7818120" cy="409448"/>
           </a:xfrm>
           <a:prstGeom prst="rect">
             <a:avLst/>
@@ -3310,21 +3759,193 @@
           <a:bodyPr wrap="square" lIns="0" tIns="0" rIns="0" bIns="0" rtlCol="0" anchor="ctr"/>
           <a:lstStyle/>
           <a:p>
-            <a:pPr algn="r" indent="0" marL="0">
+            <a:pPr indent="0" marL="0">
               <a:buNone/>
             </a:pPr>
             <a:r>
-              <a:rPr lang="en-US" sz="900" dirty="0">
+              <a:rPr lang="en-US" sz="1200" dirty="0">
                 <a:solidFill>
-                  <a:srgbClr val="AAAAAA"/>
+                  <a:srgbClr val="1A1A2E"/>
                 </a:solidFill>
                 <a:latin typeface="Calibri" pitchFamily="34" charset="0"/>
                 <a:ea typeface="Calibri" pitchFamily="34" charset="-122"/>
                 <a:cs typeface="Calibri" pitchFamily="34" charset="-120"/>
               </a:rPr>
-              <a:t>4/6</a:t>
-            </a:r>
-            <a:endParaRPr lang="en-US" sz="900" dirty="0"/>
+              <a:t>→ email = 'pasunemail', prix = -5, FK id_artiste = 99999</a:t>
+            </a:r>
+            <a:endParaRPr lang="en-US" sz="1200" dirty="0"/>
+          </a:p>
+        </p:txBody>
+      </p:sp>
+      <p:sp>
+        <p:nvSpPr>
+          <p:cNvPr id="25" name="Shape 23"/>
+          <p:cNvSpPr/>
+          <p:nvPr/>
+        </p:nvSpPr>
+        <p:spPr>
+          <a:xfrm>
+            <a:off x="457200" y="3972560"/>
+            <a:ext cx="8229600" cy="409448"/>
+          </a:xfrm>
+          <a:prstGeom prst="rect">
+            <a:avLst/>
+          </a:prstGeom>
+          <a:solidFill>
+            <a:srgbClr val="FFF3E0"/>
+          </a:solidFill>
+          <a:ln/>
+          <a:effectLst>
+            <a:outerShdw sx="100000" sy="100000" kx="0" ky="0" algn="bl" rotWithShape="0" blurRad="50800" dist="25400" dir="8100000">
+              <a:srgbClr val="000000">
+                <a:alpha val="12000"/>
+              </a:srgbClr>
+            </a:outerShdw>
+          </a:effectLst>
+        </p:spPr>
+      </p:sp>
+      <p:sp>
+        <p:nvSpPr>
+          <p:cNvPr id="26" name="Shape 24"/>
+          <p:cNvSpPr/>
+          <p:nvPr/>
+        </p:nvSpPr>
+        <p:spPr>
+          <a:xfrm>
+            <a:off x="457200" y="3972560"/>
+            <a:ext cx="45720" cy="409448"/>
+          </a:xfrm>
+          <a:prstGeom prst="rect">
+            <a:avLst/>
+          </a:prstGeom>
+          <a:solidFill>
+            <a:srgbClr val="E65100"/>
+          </a:solidFill>
+          <a:ln/>
+        </p:spPr>
+      </p:sp>
+      <p:sp>
+        <p:nvSpPr>
+          <p:cNvPr id="27" name="Text 25"/>
+          <p:cNvSpPr/>
+          <p:nvPr/>
+        </p:nvSpPr>
+        <p:spPr>
+          <a:xfrm>
+            <a:off x="685800" y="3972560"/>
+            <a:ext cx="7818120" cy="409448"/>
+          </a:xfrm>
+          <a:prstGeom prst="rect">
+            <a:avLst/>
+          </a:prstGeom>
+          <a:noFill/>
+          <a:ln/>
+        </p:spPr>
+        <p:txBody>
+          <a:bodyPr wrap="square" lIns="0" tIns="0" rIns="0" bIns="0" rtlCol="0" anchor="ctr"/>
+          <a:lstStyle/>
+          <a:p>
+            <a:pPr indent="0" marL="0">
+              <a:buNone/>
+            </a:pPr>
+            <a:r>
+              <a:rPr lang="en-US" sz="1200" dirty="0">
+                <a:solidFill>
+                  <a:srgbClr val="1A1A2E"/>
+                </a:solidFill>
+                <a:latin typeface="Calibri" pitchFamily="34" charset="0"/>
+                <a:ea typeface="Calibri" pitchFamily="34" charset="-122"/>
+                <a:cs typeface="Calibri" pitchFamily="34" charset="-120"/>
+              </a:rPr>
+              <a:t>→ Le système DOIT les rejeter</a:t>
+            </a:r>
+            <a:endParaRPr lang="en-US" sz="1200" dirty="0"/>
+          </a:p>
+        </p:txBody>
+      </p:sp>
+      <p:sp>
+        <p:nvSpPr>
+          <p:cNvPr id="28" name="Shape 26"/>
+          <p:cNvSpPr/>
+          <p:nvPr/>
+        </p:nvSpPr>
+        <p:spPr>
+          <a:xfrm>
+            <a:off x="457200" y="4409440"/>
+            <a:ext cx="8229600" cy="409448"/>
+          </a:xfrm>
+          <a:prstGeom prst="rect">
+            <a:avLst/>
+          </a:prstGeom>
+          <a:solidFill>
+            <a:srgbClr val="FFFFFF"/>
+          </a:solidFill>
+          <a:ln/>
+          <a:effectLst>
+            <a:outerShdw sx="100000" sy="100000" kx="0" ky="0" algn="bl" rotWithShape="0" blurRad="50800" dist="25400" dir="8100000">
+              <a:srgbClr val="000000">
+                <a:alpha val="12000"/>
+              </a:srgbClr>
+            </a:outerShdw>
+          </a:effectLst>
+        </p:spPr>
+      </p:sp>
+      <p:sp>
+        <p:nvSpPr>
+          <p:cNvPr id="29" name="Shape 27"/>
+          <p:cNvSpPr/>
+          <p:nvPr/>
+        </p:nvSpPr>
+        <p:spPr>
+          <a:xfrm>
+            <a:off x="457200" y="4409440"/>
+            <a:ext cx="45720" cy="409448"/>
+          </a:xfrm>
+          <a:prstGeom prst="rect">
+            <a:avLst/>
+          </a:prstGeom>
+          <a:solidFill>
+            <a:srgbClr val="E65100"/>
+          </a:solidFill>
+          <a:ln/>
+        </p:spPr>
+      </p:sp>
+      <p:sp>
+        <p:nvSpPr>
+          <p:cNvPr id="30" name="Text 28"/>
+          <p:cNvSpPr/>
+          <p:nvPr/>
+        </p:nvSpPr>
+        <p:spPr>
+          <a:xfrm>
+            <a:off x="685800" y="4409440"/>
+            <a:ext cx="7818120" cy="409448"/>
+          </a:xfrm>
+          <a:prstGeom prst="rect">
+            <a:avLst/>
+          </a:prstGeom>
+          <a:noFill/>
+          <a:ln/>
+        </p:spPr>
+        <p:txBody>
+          <a:bodyPr wrap="square" lIns="0" tIns="0" rIns="0" bIns="0" rtlCol="0" anchor="ctr"/>
+          <a:lstStyle/>
+          <a:p>
+            <a:pPr indent="0" marL="0">
+              <a:buNone/>
+            </a:pPr>
+            <a:r>
+              <a:rPr lang="en-US" sz="1200" dirty="0">
+                <a:solidFill>
+                  <a:srgbClr val="1A1A2E"/>
+                </a:solidFill>
+                <a:latin typeface="Calibri" pitchFamily="34" charset="0"/>
+                <a:ea typeface="Calibri" pitchFamily="34" charset="-122"/>
+                <a:cs typeface="Calibri" pitchFamily="34" charset="-120"/>
+              </a:rPr>
+              <a:t>Pour CHAQUE test : 1 donnée normale + 1 limite + 1 erronée</a:t>
+            </a:r>
+            <a:endParaRPr lang="en-US" sz="1200" dirty="0"/>
           </a:p>
         </p:txBody>
       </p:sp>
@@ -3369,13 +3990,13 @@
         <p:spPr>
           <a:xfrm>
             <a:off x="0" y="0"/>
-            <a:ext cx="9144000" cy="73152"/>
-          </a:xfrm>
-          <a:prstGeom prst="rect">
-            <a:avLst/>
-          </a:prstGeom>
-          <a:solidFill>
-            <a:srgbClr val="F57C00"/>
+            <a:ext cx="9144000" cy="54864"/>
+          </a:xfrm>
+          <a:prstGeom prst="rect">
+            <a:avLst/>
+          </a:prstGeom>
+          <a:solidFill>
+            <a:srgbClr val="E65100"/>
           </a:solidFill>
           <a:ln/>
         </p:spPr>
@@ -3388,8 +4009,8 @@
         </p:nvSpPr>
         <p:spPr>
           <a:xfrm>
-            <a:off x="457200" y="228600"/>
-            <a:ext cx="8229600" cy="640080"/>
+            <a:off x="457200" y="182880"/>
+            <a:ext cx="8229600" cy="594360"/>
           </a:xfrm>
           <a:prstGeom prst="rect">
             <a:avLst/>
@@ -3405,17 +4026,17 @@
               <a:buNone/>
             </a:pPr>
             <a:r>
-              <a:rPr lang="en-US" sz="2600" b="1" dirty="0">
+              <a:rPr lang="en-US" sz="2400" b="1" dirty="0">
                 <a:solidFill>
-                  <a:srgbClr val="E65100"/>
+                  <a:srgbClr val="BF360C"/>
                 </a:solidFill>
                 <a:latin typeface="Trebuchet MS" pitchFamily="34" charset="0"/>
                 <a:ea typeface="Trebuchet MS" pitchFamily="34" charset="-122"/>
                 <a:cs typeface="Trebuchet MS" pitchFamily="34" charset="-120"/>
               </a:rPr>
-              <a:t>Matrice de traçabilité</a:t>
-            </a:r>
-            <a:endParaRPr lang="en-US" sz="2600" dirty="0"/>
+              <a:t>Plan de test — template SwissSound</a:t>
+            </a:r>
+            <a:endParaRPr lang="en-US" sz="2400" dirty="0"/>
           </a:p>
         </p:txBody>
       </p:sp>
@@ -3427,8 +4048,8 @@
         </p:nvSpPr>
         <p:spPr>
           <a:xfrm>
-            <a:off x="457200" y="1051560"/>
-            <a:ext cx="8229600" cy="640080"/>
+            <a:off x="457200" y="914400"/>
+            <a:ext cx="8229600" cy="521208"/>
           </a:xfrm>
           <a:prstGeom prst="rect">
             <a:avLst/>
@@ -3454,14 +4075,14 @@
         </p:nvSpPr>
         <p:spPr>
           <a:xfrm>
-            <a:off x="457200" y="1051560"/>
-            <a:ext cx="54864" cy="640080"/>
-          </a:xfrm>
-          <a:prstGeom prst="rect">
-            <a:avLst/>
-          </a:prstGeom>
-          <a:solidFill>
-            <a:srgbClr val="F57C00"/>
+            <a:off x="457200" y="914400"/>
+            <a:ext cx="45720" cy="521208"/>
+          </a:xfrm>
+          <a:prstGeom prst="rect">
+            <a:avLst/>
+          </a:prstGeom>
+          <a:solidFill>
+            <a:srgbClr val="E65100"/>
           </a:solidFill>
           <a:ln/>
         </p:spPr>
@@ -3474,8 +4095,8 @@
         </p:nvSpPr>
         <p:spPr>
           <a:xfrm>
-            <a:off x="731520" y="1051560"/>
-            <a:ext cx="7772400" cy="640080"/>
+            <a:off x="685800" y="914400"/>
+            <a:ext cx="7818120" cy="521208"/>
           </a:xfrm>
           <a:prstGeom prst="rect">
             <a:avLst/>
@@ -3491,17 +4112,17 @@
               <a:buNone/>
             </a:pPr>
             <a:r>
-              <a:rPr lang="en-US" sz="1100" dirty="0">
+              <a:rPr lang="en-US" sz="1200" dirty="0">
                 <a:solidFill>
-                  <a:srgbClr val="E65100"/>
+                  <a:srgbClr val="1A1A2E"/>
                 </a:solidFill>
-                <a:latin typeface="JetBrains Mono" pitchFamily="34" charset="0"/>
-                <a:ea typeface="JetBrains Mono" pitchFamily="34" charset="-122"/>
-                <a:cs typeface="JetBrains Mono" pitchFamily="34" charset="-120"/>
+                <a:latin typeface="Calibri" pitchFamily="34" charset="0"/>
+                <a:ea typeface="Calibri" pitchFamily="34" charset="-122"/>
+                <a:cs typeface="Calibri" pitchFamily="34" charset="-120"/>
               </a:rPr>
-              <a:t>Chaque besoin du cahier des charges → au moins 1 test</a:t>
-            </a:r>
-            <a:endParaRPr lang="en-US" sz="1100" dirty="0"/>
+              <a:t>| ID | Description | Type | Entrée | Résultat attendu | Résultat obtenu | Statut |</a:t>
+            </a:r>
+            <a:endParaRPr lang="en-US" sz="1200" dirty="0"/>
           </a:p>
         </p:txBody>
       </p:sp>
@@ -3513,8 +4134,8 @@
         </p:nvSpPr>
         <p:spPr>
           <a:xfrm>
-            <a:off x="457200" y="1783080"/>
-            <a:ext cx="8229600" cy="640080"/>
+            <a:off x="457200" y="1463040"/>
+            <a:ext cx="8229600" cy="521208"/>
           </a:xfrm>
           <a:prstGeom prst="rect">
             <a:avLst/>
@@ -3540,14 +4161,14 @@
         </p:nvSpPr>
         <p:spPr>
           <a:xfrm>
-            <a:off x="457200" y="1783080"/>
-            <a:ext cx="54864" cy="640080"/>
-          </a:xfrm>
-          <a:prstGeom prst="rect">
-            <a:avLst/>
-          </a:prstGeom>
-          <a:solidFill>
-            <a:srgbClr val="F57C00"/>
+            <a:off x="457200" y="1463040"/>
+            <a:ext cx="45720" cy="521208"/>
+          </a:xfrm>
+          <a:prstGeom prst="rect">
+            <a:avLst/>
+          </a:prstGeom>
+          <a:solidFill>
+            <a:srgbClr val="E65100"/>
           </a:solidFill>
           <a:ln/>
         </p:spPr>
@@ -3560,8 +4181,8 @@
         </p:nvSpPr>
         <p:spPr>
           <a:xfrm>
-            <a:off x="731520" y="1783080"/>
-            <a:ext cx="7772400" cy="640080"/>
+            <a:off x="685800" y="1463040"/>
+            <a:ext cx="7818120" cy="521208"/>
           </a:xfrm>
           <a:prstGeom prst="rect">
             <a:avLst/>
@@ -3577,7 +4198,7 @@
               <a:buNone/>
             </a:pPr>
             <a:r>
-              <a:rPr lang="en-US" sz="1300" dirty="0">
+              <a:rPr lang="en-US" sz="1200" dirty="0">
                 <a:solidFill>
                   <a:srgbClr val="1A1A2E"/>
                 </a:solidFill>
@@ -3585,9 +4206,9 @@
                 <a:ea typeface="Calibri" pitchFamily="34" charset="-122"/>
                 <a:cs typeface="Calibri" pitchFamily="34" charset="-120"/>
               </a:rPr>
-              <a:t>| Besoin | Test | Données | Résultat attendu | Statut |</a:t>
-            </a:r>
-            <a:endParaRPr lang="en-US" sz="1300" dirty="0"/>
+              <a:t>| T01 | INSERT artiste valide | Normal | nom='Test' | Succès, 1 ligne insérée | — | — |</a:t>
+            </a:r>
+            <a:endParaRPr lang="en-US" sz="1200" dirty="0"/>
           </a:p>
         </p:txBody>
       </p:sp>
@@ -3599,8 +4220,8 @@
         </p:nvSpPr>
         <p:spPr>
           <a:xfrm>
-            <a:off x="457200" y="2514600"/>
-            <a:ext cx="8229600" cy="640080"/>
+            <a:off x="457200" y="2011680"/>
+            <a:ext cx="8229600" cy="521208"/>
           </a:xfrm>
           <a:prstGeom prst="rect">
             <a:avLst/>
@@ -3626,14 +4247,14 @@
         </p:nvSpPr>
         <p:spPr>
           <a:xfrm>
-            <a:off x="457200" y="2514600"/>
-            <a:ext cx="54864" cy="640080"/>
-          </a:xfrm>
-          <a:prstGeom prst="rect">
-            <a:avLst/>
-          </a:prstGeom>
-          <a:solidFill>
-            <a:srgbClr val="F57C00"/>
+            <a:off x="457200" y="2011680"/>
+            <a:ext cx="45720" cy="521208"/>
+          </a:xfrm>
+          <a:prstGeom prst="rect">
+            <a:avLst/>
+          </a:prstGeom>
+          <a:solidFill>
+            <a:srgbClr val="E65100"/>
           </a:solidFill>
           <a:ln/>
         </p:spPr>
@@ -3646,8 +4267,8 @@
         </p:nvSpPr>
         <p:spPr>
           <a:xfrm>
-            <a:off x="731520" y="2514600"/>
-            <a:ext cx="7772400" cy="640080"/>
+            <a:off x="685800" y="2011680"/>
+            <a:ext cx="7818120" cy="521208"/>
           </a:xfrm>
           <a:prstGeom prst="rect">
             <a:avLst/>
@@ -3663,7 +4284,7 @@
               <a:buNone/>
             </a:pPr>
             <a:r>
-              <a:rPr lang="en-US" sz="1300" dirty="0">
+              <a:rPr lang="en-US" sz="1200" dirty="0">
                 <a:solidFill>
                   <a:srgbClr val="1A1A2E"/>
                 </a:solidFill>
@@ -3671,9 +4292,9 @@
                 <a:ea typeface="Calibri" pitchFamily="34" charset="-122"/>
                 <a:cs typeface="Calibri" pitchFamily="34" charset="-120"/>
               </a:rPr>
-              <a:t>Couverture = nb besoins testés / nb besoins total</a:t>
-            </a:r>
-            <a:endParaRPr lang="en-US" sz="1300" dirty="0"/>
+              <a:t>| T02 | INSERT email doublon | Erroné | email existant | Erreur 1062 | — | — |</a:t>
+            </a:r>
+            <a:endParaRPr lang="en-US" sz="1200" dirty="0"/>
           </a:p>
         </p:txBody>
       </p:sp>
@@ -3685,8 +4306,8 @@
         </p:nvSpPr>
         <p:spPr>
           <a:xfrm>
-            <a:off x="457200" y="3246120"/>
-            <a:ext cx="8229600" cy="640080"/>
+            <a:off x="457200" y="2560320"/>
+            <a:ext cx="8229600" cy="521208"/>
           </a:xfrm>
           <a:prstGeom prst="rect">
             <a:avLst/>
@@ -3712,14 +4333,14 @@
         </p:nvSpPr>
         <p:spPr>
           <a:xfrm>
-            <a:off x="457200" y="3246120"/>
-            <a:ext cx="54864" cy="640080"/>
-          </a:xfrm>
-          <a:prstGeom prst="rect">
-            <a:avLst/>
-          </a:prstGeom>
-          <a:solidFill>
-            <a:srgbClr val="F57C00"/>
+            <a:off x="457200" y="2560320"/>
+            <a:ext cx="45720" cy="521208"/>
+          </a:xfrm>
+          <a:prstGeom prst="rect">
+            <a:avLst/>
+          </a:prstGeom>
+          <a:solidFill>
+            <a:srgbClr val="E65100"/>
           </a:solidFill>
           <a:ln/>
         </p:spPr>
@@ -3732,8 +4353,8 @@
         </p:nvSpPr>
         <p:spPr>
           <a:xfrm>
-            <a:off x="731520" y="3246120"/>
-            <a:ext cx="7772400" cy="640080"/>
+            <a:off x="685800" y="2560320"/>
+            <a:ext cx="7818120" cy="521208"/>
           </a:xfrm>
           <a:prstGeom prst="rect">
             <a:avLst/>
@@ -3749,7 +4370,7 @@
               <a:buNone/>
             </a:pPr>
             <a:r>
-              <a:rPr lang="en-US" sz="1300" dirty="0">
+              <a:rPr lang="en-US" sz="1200" dirty="0">
                 <a:solidFill>
                   <a:srgbClr val="1A1A2E"/>
                 </a:solidFill>
@@ -3757,9 +4378,9 @@
                 <a:ea typeface="Calibri" pitchFamily="34" charset="-122"/>
                 <a:cs typeface="Calibri" pitchFamily="34" charset="-120"/>
               </a:rPr>
-              <a:t>Objectif : 100% de couverture des besoins</a:t>
-            </a:r>
-            <a:endParaRPr lang="en-US" sz="1300" dirty="0"/>
+              <a:t>| T03 | INSERT FK invalide | Erroné | id_artiste=999 | Erreur 1452 | — | — |</a:t>
+            </a:r>
+            <a:endParaRPr lang="en-US" sz="1200" dirty="0"/>
           </a:p>
         </p:txBody>
       </p:sp>
@@ -3771,8 +4392,8 @@
         </p:nvSpPr>
         <p:spPr>
           <a:xfrm>
-            <a:off x="457200" y="3977640"/>
-            <a:ext cx="8229600" cy="640080"/>
+            <a:off x="457200" y="3108960"/>
+            <a:ext cx="8229600" cy="521208"/>
           </a:xfrm>
           <a:prstGeom prst="rect">
             <a:avLst/>
@@ -3798,14 +4419,14 @@
         </p:nvSpPr>
         <p:spPr>
           <a:xfrm>
-            <a:off x="457200" y="3977640"/>
-            <a:ext cx="54864" cy="640080"/>
-          </a:xfrm>
-          <a:prstGeom prst="rect">
-            <a:avLst/>
-          </a:prstGeom>
-          <a:solidFill>
-            <a:srgbClr val="F57C00"/>
+            <a:off x="457200" y="3108960"/>
+            <a:ext cx="45720" cy="521208"/>
+          </a:xfrm>
+          <a:prstGeom prst="rect">
+            <a:avLst/>
+          </a:prstGeom>
+          <a:solidFill>
+            <a:srgbClr val="E65100"/>
           </a:solidFill>
           <a:ln/>
         </p:spPr>
@@ -3818,8 +4439,8 @@
         </p:nvSpPr>
         <p:spPr>
           <a:xfrm>
-            <a:off x="731520" y="3977640"/>
-            <a:ext cx="7772400" cy="640080"/>
+            <a:off x="685800" y="3108960"/>
+            <a:ext cx="7818120" cy="521208"/>
           </a:xfrm>
           <a:prstGeom prst="rect">
             <a:avLst/>
@@ -3835,7 +4456,7 @@
               <a:buNone/>
             </a:pPr>
             <a:r>
-              <a:rPr lang="en-US" sz="1300" dirty="0">
+              <a:rPr lang="en-US" sz="1200" dirty="0">
                 <a:solidFill>
                   <a:srgbClr val="1A1A2E"/>
                 </a:solidFill>
@@ -3843,22 +4464,69 @@
                 <a:ea typeface="Calibri" pitchFamily="34" charset="-122"/>
                 <a:cs typeface="Calibri" pitchFamily="34" charset="-120"/>
               </a:rPr>
-              <a:t>Template Excel fourni pour SwissSound</a:t>
-            </a:r>
-            <a:endParaRPr lang="en-US" sz="1300" dirty="0"/>
-          </a:p>
-        </p:txBody>
-      </p:sp>
-      <p:sp>
-        <p:nvSpPr>
-          <p:cNvPr id="19" name="Text 17"/>
-          <p:cNvSpPr/>
-          <p:nvPr/>
-        </p:nvSpPr>
-        <p:spPr>
-          <a:xfrm>
-            <a:off x="8229600" y="4754880"/>
-            <a:ext cx="731520" cy="274320"/>
+              <a:t>| T04 | DELETE artiste avec albums | Erroné | RESTRICT | Erreur 1451 | — | — |</a:t>
+            </a:r>
+            <a:endParaRPr lang="en-US" sz="1200" dirty="0"/>
+          </a:p>
+        </p:txBody>
+      </p:sp>
+      <p:sp>
+        <p:nvSpPr>
+          <p:cNvPr id="19" name="Shape 17"/>
+          <p:cNvSpPr/>
+          <p:nvPr/>
+        </p:nvSpPr>
+        <p:spPr>
+          <a:xfrm>
+            <a:off x="457200" y="3657600"/>
+            <a:ext cx="8229600" cy="521208"/>
+          </a:xfrm>
+          <a:prstGeom prst="rect">
+            <a:avLst/>
+          </a:prstGeom>
+          <a:solidFill>
+            <a:srgbClr val="FFF3E0"/>
+          </a:solidFill>
+          <a:ln/>
+          <a:effectLst>
+            <a:outerShdw sx="100000" sy="100000" kx="0" ky="0" algn="bl" rotWithShape="0" blurRad="50800" dist="25400" dir="8100000">
+              <a:srgbClr val="000000">
+                <a:alpha val="12000"/>
+              </a:srgbClr>
+            </a:outerShdw>
+          </a:effectLst>
+        </p:spPr>
+      </p:sp>
+      <p:sp>
+        <p:nvSpPr>
+          <p:cNvPr id="20" name="Shape 18"/>
+          <p:cNvSpPr/>
+          <p:nvPr/>
+        </p:nvSpPr>
+        <p:spPr>
+          <a:xfrm>
+            <a:off x="457200" y="3657600"/>
+            <a:ext cx="45720" cy="521208"/>
+          </a:xfrm>
+          <a:prstGeom prst="rect">
+            <a:avLst/>
+          </a:prstGeom>
+          <a:solidFill>
+            <a:srgbClr val="E65100"/>
+          </a:solidFill>
+          <a:ln/>
+        </p:spPr>
+      </p:sp>
+      <p:sp>
+        <p:nvSpPr>
+          <p:cNvPr id="21" name="Text 19"/>
+          <p:cNvSpPr/>
+          <p:nvPr/>
+        </p:nvSpPr>
+        <p:spPr>
+          <a:xfrm>
+            <a:off x="685800" y="3657600"/>
+            <a:ext cx="7818120" cy="521208"/>
           </a:xfrm>
           <a:prstGeom prst="rect">
             <a:avLst/>
@@ -3870,21 +4538,107 @@
           <a:bodyPr wrap="square" lIns="0" tIns="0" rIns="0" bIns="0" rtlCol="0" anchor="ctr"/>
           <a:lstStyle/>
           <a:p>
-            <a:pPr algn="r" indent="0" marL="0">
+            <a:pPr indent="0" marL="0">
               <a:buNone/>
             </a:pPr>
             <a:r>
-              <a:rPr lang="en-US" sz="900" dirty="0">
+              <a:rPr lang="en-US" sz="1200" dirty="0">
                 <a:solidFill>
-                  <a:srgbClr val="AAAAAA"/>
+                  <a:srgbClr val="1A1A2E"/>
                 </a:solidFill>
                 <a:latin typeface="Calibri" pitchFamily="34" charset="0"/>
                 <a:ea typeface="Calibri" pitchFamily="34" charset="-122"/>
                 <a:cs typeface="Calibri" pitchFamily="34" charset="-120"/>
               </a:rPr>
-              <a:t>5/6</a:t>
-            </a:r>
-            <a:endParaRPr lang="en-US" sz="900" dirty="0"/>
+              <a:t>| T05 | SELECT artistes actifs | Normal | WHERE actif=1 | 19 lignes | — | — |</a:t>
+            </a:r>
+            <a:endParaRPr lang="en-US" sz="1200" dirty="0"/>
+          </a:p>
+        </p:txBody>
+      </p:sp>
+      <p:sp>
+        <p:nvSpPr>
+          <p:cNvPr id="22" name="Shape 20"/>
+          <p:cNvSpPr/>
+          <p:nvPr/>
+        </p:nvSpPr>
+        <p:spPr>
+          <a:xfrm>
+            <a:off x="457200" y="4206240"/>
+            <a:ext cx="8229600" cy="521208"/>
+          </a:xfrm>
+          <a:prstGeom prst="rect">
+            <a:avLst/>
+          </a:prstGeom>
+          <a:solidFill>
+            <a:srgbClr val="FFFFFF"/>
+          </a:solidFill>
+          <a:ln/>
+          <a:effectLst>
+            <a:outerShdw sx="100000" sy="100000" kx="0" ky="0" algn="bl" rotWithShape="0" blurRad="50800" dist="25400" dir="8100000">
+              <a:srgbClr val="000000">
+                <a:alpha val="12000"/>
+              </a:srgbClr>
+            </a:outerShdw>
+          </a:effectLst>
+        </p:spPr>
+      </p:sp>
+      <p:sp>
+        <p:nvSpPr>
+          <p:cNvPr id="23" name="Shape 21"/>
+          <p:cNvSpPr/>
+          <p:nvPr/>
+        </p:nvSpPr>
+        <p:spPr>
+          <a:xfrm>
+            <a:off x="457200" y="4206240"/>
+            <a:ext cx="45720" cy="521208"/>
+          </a:xfrm>
+          <a:prstGeom prst="rect">
+            <a:avLst/>
+          </a:prstGeom>
+          <a:solidFill>
+            <a:srgbClr val="E65100"/>
+          </a:solidFill>
+          <a:ln/>
+        </p:spPr>
+      </p:sp>
+      <p:sp>
+        <p:nvSpPr>
+          <p:cNvPr id="24" name="Text 22"/>
+          <p:cNvSpPr/>
+          <p:nvPr/>
+        </p:nvSpPr>
+        <p:spPr>
+          <a:xfrm>
+            <a:off x="685800" y="4206240"/>
+            <a:ext cx="7818120" cy="521208"/>
+          </a:xfrm>
+          <a:prstGeom prst="rect">
+            <a:avLst/>
+          </a:prstGeom>
+          <a:noFill/>
+          <a:ln/>
+        </p:spPr>
+        <p:txBody>
+          <a:bodyPr wrap="square" lIns="0" tIns="0" rIns="0" bIns="0" rtlCol="0" anchor="ctr"/>
+          <a:lstStyle/>
+          <a:p>
+            <a:pPr indent="0" marL="0">
+              <a:buNone/>
+            </a:pPr>
+            <a:r>
+              <a:rPr lang="en-US" sz="1200" dirty="0">
+                <a:solidFill>
+                  <a:srgbClr val="1A1A2E"/>
+                </a:solidFill>
+                <a:latin typeface="Calibri" pitchFamily="34" charset="0"/>
+                <a:ea typeface="Calibri" pitchFamily="34" charset="-122"/>
+                <a:cs typeface="Calibri" pitchFamily="34" charset="-120"/>
+              </a:rPr>
+              <a:t>20 cas minimum couvrant : contraintes, requêtes, sécurité</a:t>
+            </a:r>
+            <a:endParaRPr lang="en-US" sz="1200" dirty="0"/>
           </a:p>
         </p:txBody>
       </p:sp>
@@ -3899,199 +4653,6 @@
 <file path=ppt/slides/slide6.xml><?xml version="1.0" encoding="utf-8"?>
 <p:sld xmlns:a="http://schemas.openxmlformats.org/drawingml/2006/main" xmlns:r="http://schemas.openxmlformats.org/officeDocument/2006/relationships" xmlns:p="http://schemas.openxmlformats.org/presentationml/2006/main">
   <p:cSld name="Slide 6">
-    <p:bg>
-      <p:bgPr>
-        <a:solidFill>
-          <a:srgbClr val="E65100"/>
-        </a:solidFill>
-      </p:bgPr>
-    </p:bg>
-    <p:spTree>
-      <p:nvGrpSpPr>
-        <p:cNvPr id="1" name=""/>
-        <p:cNvGrpSpPr/>
-        <p:nvPr/>
-      </p:nvGrpSpPr>
-      <p:grpSpPr>
-        <a:xfrm>
-          <a:off x="0" y="0"/>
-          <a:ext cx="0" cy="0"/>
-          <a:chOff x="0" y="0"/>
-          <a:chExt cx="0" cy="0"/>
-        </a:xfrm>
-      </p:grpSpPr>
-      <p:pic>
-        <p:nvPicPr>
-          <p:cNvPr id="2" name="Image 0" descr="preencoded.png">    </p:cNvPr>
-          <p:cNvPicPr>
-            <a:picLocks noChangeAspect="1"/>
-          </p:cNvPicPr>
-          <p:nvPr/>
-        </p:nvPicPr>
-        <p:blipFill>
-          <a:blip r:embed="rId1"/>
-          <a:stretch>
-            <a:fillRect/>
-          </a:stretch>
-        </p:blipFill>
-        <p:spPr>
-          <a:xfrm>
-            <a:off x="4023360" y="457200"/>
-            <a:ext cx="1097280" cy="1097280"/>
-          </a:xfrm>
-          <a:prstGeom prst="rect">
-            <a:avLst/>
-          </a:prstGeom>
-        </p:spPr>
-      </p:pic>
-      <p:sp>
-        <p:nvSpPr>
-          <p:cNvPr id="3" name="Text 0"/>
-          <p:cNvSpPr/>
-          <p:nvPr/>
-        </p:nvSpPr>
-        <p:spPr>
-          <a:xfrm>
-            <a:off x="457200" y="1737360"/>
-            <a:ext cx="8229600" cy="548640"/>
-          </a:xfrm>
-          <a:prstGeom prst="rect">
-            <a:avLst/>
-          </a:prstGeom>
-          <a:noFill/>
-          <a:ln/>
-        </p:spPr>
-        <p:txBody>
-          <a:bodyPr wrap="square" lIns="0" tIns="0" rIns="0" bIns="0" rtlCol="0" anchor="ctr"/>
-          <a:lstStyle/>
-          <a:p>
-            <a:pPr algn="ctr" indent="0" marL="0">
-              <a:buNone/>
-            </a:pPr>
-            <a:r>
-              <a:rPr lang="en-US" sz="2600" b="1" dirty="0">
-                <a:solidFill>
-                  <a:srgbClr val="FFFFFF"/>
-                </a:solidFill>
-                <a:latin typeface="Trebuchet MS" pitchFamily="34" charset="0"/>
-                <a:ea typeface="Trebuchet MS" pitchFamily="34" charset="-122"/>
-                <a:cs typeface="Trebuchet MS" pitchFamily="34" charset="-120"/>
-              </a:rPr>
-              <a:t>🎮 Mini-jeu : Module 17</a:t>
-            </a:r>
-            <a:endParaRPr lang="en-US" sz="2600" dirty="0"/>
-          </a:p>
-        </p:txBody>
-      </p:sp>
-      <p:sp>
-        <p:nvSpPr>
-          <p:cNvPr id="4" name="Text 1"/>
-          <p:cNvSpPr/>
-          <p:nvPr/>
-        </p:nvSpPr>
-        <p:spPr>
-          <a:xfrm>
-            <a:off x="914400" y="2377440"/>
-            <a:ext cx="7315200" cy="457200"/>
-          </a:xfrm>
-          <a:prstGeom prst="rect">
-            <a:avLst/>
-          </a:prstGeom>
-          <a:noFill/>
-          <a:ln/>
-        </p:spPr>
-        <p:txBody>
-          <a:bodyPr wrap="square" lIns="0" tIns="0" rIns="0" bIns="0" rtlCol="0" anchor="ctr"/>
-          <a:lstStyle/>
-          <a:p>
-            <a:pPr algn="ctr" indent="0" marL="0">
-              <a:buNone/>
-            </a:pPr>
-            <a:r>
-              <a:rPr lang="en-US" sz="1400" dirty="0">
-                <a:solidFill>
-                  <a:srgbClr val="CCCCCC"/>
-                </a:solidFill>
-                <a:latin typeface="Calibri" pitchFamily="34" charset="0"/>
-                <a:ea typeface="Calibri" pitchFamily="34" charset="-122"/>
-                <a:cs typeface="Calibri" pitchFamily="34" charset="-120"/>
-              </a:rPr>
-              <a:t>Quiz interactif + Score + Correction automatique</a:t>
-            </a:r>
-            <a:endParaRPr lang="en-US" sz="1400" dirty="0"/>
-          </a:p>
-        </p:txBody>
-      </p:sp>
-      <p:sp>
-        <p:nvSpPr>
-          <p:cNvPr id="5" name="Shape 2"/>
-          <p:cNvSpPr/>
-          <p:nvPr/>
-        </p:nvSpPr>
-        <p:spPr>
-          <a:xfrm>
-            <a:off x="2286000" y="3200400"/>
-            <a:ext cx="4572000" cy="548640"/>
-          </a:xfrm>
-          <a:prstGeom prst="rect">
-            <a:avLst/>
-          </a:prstGeom>
-          <a:solidFill>
-            <a:srgbClr val="1565C0"/>
-          </a:solidFill>
-          <a:ln/>
-        </p:spPr>
-      </p:sp>
-      <p:sp>
-        <p:nvSpPr>
-          <p:cNvPr id="6" name="Text 3"/>
-          <p:cNvSpPr/>
-          <p:nvPr/>
-        </p:nvSpPr>
-        <p:spPr>
-          <a:xfrm>
-            <a:off x="2286000" y="3200400"/>
-            <a:ext cx="4572000" cy="548640"/>
-          </a:xfrm>
-          <a:prstGeom prst="rect">
-            <a:avLst/>
-          </a:prstGeom>
-          <a:noFill/>
-          <a:ln/>
-        </p:spPr>
-        <p:txBody>
-          <a:bodyPr wrap="square" lIns="0" tIns="0" rIns="0" bIns="0" rtlCol="0" anchor="ctr"/>
-          <a:lstStyle/>
-          <a:p>
-            <a:pPr algn="ctr" indent="0" marL="0">
-              <a:buNone/>
-            </a:pPr>
-            <a:r>
-              <a:rPr lang="en-US" sz="1800" b="1" dirty="0">
-                <a:solidFill>
-                  <a:srgbClr val="FFFFFF"/>
-                </a:solidFill>
-                <a:latin typeface="Trebuchet MS" pitchFamily="34" charset="0"/>
-                <a:ea typeface="Trebuchet MS" pitchFamily="34" charset="-122"/>
-                <a:cs typeface="Trebuchet MS" pitchFamily="34" charset="-120"/>
-              </a:rPr>
-              <a:t>▶  Lancer le jeu sur Vercel</a:t>
-            </a:r>
-            <a:endParaRPr lang="en-US" sz="1800" dirty="0"/>
-          </a:p>
-        </p:txBody>
-      </p:sp>
-    </p:spTree>
-  </p:cSld>
-  <p:clrMapOvr>
-    <a:masterClrMapping/>
-  </p:clrMapOvr>
-</p:sld>
-</file>
-
-<file path=ppt/slides/slide7.xml><?xml version="1.0" encoding="utf-8"?>
-<p:sld xmlns:a="http://schemas.openxmlformats.org/drawingml/2006/main" xmlns:r="http://schemas.openxmlformats.org/officeDocument/2006/relationships" xmlns:p="http://schemas.openxmlformats.org/presentationml/2006/main">
-  <p:cSld name="Slide 7">
     <p:bg>
       <p:bgPr>
         <a:solidFill>
@@ -4115,14 +4676,34 @@
       </p:grpSpPr>
       <p:sp>
         <p:nvSpPr>
-          <p:cNvPr id="2" name="Text 0"/>
-          <p:cNvSpPr/>
-          <p:nvPr/>
-        </p:nvSpPr>
-        <p:spPr>
-          <a:xfrm>
-            <a:off x="457200" y="228600"/>
-            <a:ext cx="8229600" cy="457200"/>
+          <p:cNvPr id="2" name="Shape 0"/>
+          <p:cNvSpPr/>
+          <p:nvPr/>
+        </p:nvSpPr>
+        <p:spPr>
+          <a:xfrm>
+            <a:off x="0" y="0"/>
+            <a:ext cx="9144000" cy="54864"/>
+          </a:xfrm>
+          <a:prstGeom prst="rect">
+            <a:avLst/>
+          </a:prstGeom>
+          <a:solidFill>
+            <a:srgbClr val="E65100"/>
+          </a:solidFill>
+          <a:ln/>
+        </p:spPr>
+      </p:sp>
+      <p:sp>
+        <p:nvSpPr>
+          <p:cNvPr id="3" name="Text 1"/>
+          <p:cNvSpPr/>
+          <p:nvPr/>
+        </p:nvSpPr>
+        <p:spPr>
+          <a:xfrm>
+            <a:off x="457200" y="182880"/>
+            <a:ext cx="8229600" cy="594360"/>
           </a:xfrm>
           <a:prstGeom prst="rect">
             <a:avLst/>
@@ -4138,50 +4719,77 @@
               <a:buNone/>
             </a:pPr>
             <a:r>
-              <a:rPr lang="en-US" sz="2000" b="1" dirty="0">
+              <a:rPr lang="en-US" sz="2400" b="1" dirty="0">
                 <a:solidFill>
-                  <a:srgbClr val="E65100"/>
+                  <a:srgbClr val="BF360C"/>
                 </a:solidFill>
                 <a:latin typeface="Trebuchet MS" pitchFamily="34" charset="0"/>
                 <a:ea typeface="Trebuchet MS" pitchFamily="34" charset="-122"/>
                 <a:cs typeface="Trebuchet MS" pitchFamily="34" charset="-120"/>
               </a:rPr>
-              <a:t>📋 Mémo Module 17 — Plan de tests</a:t>
-            </a:r>
-            <a:endParaRPr lang="en-US" sz="2000" dirty="0"/>
-          </a:p>
-        </p:txBody>
-      </p:sp>
-      <p:sp>
-        <p:nvSpPr>
-          <p:cNvPr id="3" name="Shape 1"/>
-          <p:cNvSpPr/>
-          <p:nvPr/>
-        </p:nvSpPr>
-        <p:spPr>
-          <a:xfrm>
-            <a:off x="457200" y="731520"/>
-            <a:ext cx="8229600" cy="320040"/>
-          </a:xfrm>
-          <a:prstGeom prst="rect">
-            <a:avLst/>
-          </a:prstGeom>
-          <a:solidFill>
-            <a:srgbClr val="FFF3E0"/>
-          </a:solidFill>
-          <a:ln/>
-        </p:spPr>
-      </p:sp>
-      <p:sp>
-        <p:nvSpPr>
-          <p:cNvPr id="4" name="Text 2"/>
-          <p:cNvSpPr/>
-          <p:nvPr/>
-        </p:nvSpPr>
-        <p:spPr>
-          <a:xfrm>
-            <a:off x="640080" y="731520"/>
-            <a:ext cx="7772400" cy="320040"/>
+              <a:t>Exercice Module 17</a:t>
+            </a:r>
+            <a:endParaRPr lang="en-US" sz="2400" dirty="0"/>
+          </a:p>
+        </p:txBody>
+      </p:sp>
+      <p:sp>
+        <p:nvSpPr>
+          <p:cNvPr id="4" name="Shape 2"/>
+          <p:cNvSpPr/>
+          <p:nvPr/>
+        </p:nvSpPr>
+        <p:spPr>
+          <a:xfrm>
+            <a:off x="457200" y="914400"/>
+            <a:ext cx="8229600" cy="521208"/>
+          </a:xfrm>
+          <a:prstGeom prst="rect">
+            <a:avLst/>
+          </a:prstGeom>
+          <a:solidFill>
+            <a:srgbClr val="FFFFFF"/>
+          </a:solidFill>
+          <a:ln/>
+          <a:effectLst>
+            <a:outerShdw sx="100000" sy="100000" kx="0" ky="0" algn="bl" rotWithShape="0" blurRad="50800" dist="25400" dir="8100000">
+              <a:srgbClr val="000000">
+                <a:alpha val="12000"/>
+              </a:srgbClr>
+            </a:outerShdw>
+          </a:effectLst>
+        </p:spPr>
+      </p:sp>
+      <p:sp>
+        <p:nvSpPr>
+          <p:cNvPr id="5" name="Shape 3"/>
+          <p:cNvSpPr/>
+          <p:nvPr/>
+        </p:nvSpPr>
+        <p:spPr>
+          <a:xfrm>
+            <a:off x="457200" y="914400"/>
+            <a:ext cx="45720" cy="521208"/>
+          </a:xfrm>
+          <a:prstGeom prst="rect">
+            <a:avLst/>
+          </a:prstGeom>
+          <a:solidFill>
+            <a:srgbClr val="E65100"/>
+          </a:solidFill>
+          <a:ln/>
+        </p:spPr>
+      </p:sp>
+      <p:sp>
+        <p:nvSpPr>
+          <p:cNvPr id="6" name="Text 4"/>
+          <p:cNvSpPr/>
+          <p:nvPr/>
+        </p:nvSpPr>
+        <p:spPr>
+          <a:xfrm>
+            <a:off x="685800" y="914400"/>
+            <a:ext cx="7818120" cy="521208"/>
           </a:xfrm>
           <a:prstGeom prst="rect">
             <a:avLst/>
@@ -4197,7 +4805,772 @@
               <a:buNone/>
             </a:pPr>
             <a:r>
-              <a:rPr lang="en-US" sz="1000" b="1" dirty="0">
+              <a:rPr lang="en-US" sz="1200" dirty="0">
+                <a:solidFill>
+                  <a:srgbClr val="1A1A2E"/>
+                </a:solidFill>
+                <a:latin typeface="Calibri" pitchFamily="34" charset="0"/>
+                <a:ea typeface="Calibri" pitchFamily="34" charset="-122"/>
+                <a:cs typeface="Calibri" pitchFamily="34" charset="-120"/>
+              </a:rPr>
+              <a:t>Rédiger 20 cas de test pour SwissSound (template Excel fourni)</a:t>
+            </a:r>
+            <a:endParaRPr lang="en-US" sz="1200" dirty="0"/>
+          </a:p>
+        </p:txBody>
+      </p:sp>
+      <p:sp>
+        <p:nvSpPr>
+          <p:cNvPr id="7" name="Shape 5"/>
+          <p:cNvSpPr/>
+          <p:nvPr/>
+        </p:nvSpPr>
+        <p:spPr>
+          <a:xfrm>
+            <a:off x="457200" y="1463040"/>
+            <a:ext cx="8229600" cy="521208"/>
+          </a:xfrm>
+          <a:prstGeom prst="rect">
+            <a:avLst/>
+          </a:prstGeom>
+          <a:solidFill>
+            <a:srgbClr val="FFF3E0"/>
+          </a:solidFill>
+          <a:ln/>
+          <a:effectLst>
+            <a:outerShdw sx="100000" sy="100000" kx="0" ky="0" algn="bl" rotWithShape="0" blurRad="50800" dist="25400" dir="8100000">
+              <a:srgbClr val="000000">
+                <a:alpha val="12000"/>
+              </a:srgbClr>
+            </a:outerShdw>
+          </a:effectLst>
+        </p:spPr>
+      </p:sp>
+      <p:sp>
+        <p:nvSpPr>
+          <p:cNvPr id="8" name="Shape 6"/>
+          <p:cNvSpPr/>
+          <p:nvPr/>
+        </p:nvSpPr>
+        <p:spPr>
+          <a:xfrm>
+            <a:off x="457200" y="1463040"/>
+            <a:ext cx="45720" cy="521208"/>
+          </a:xfrm>
+          <a:prstGeom prst="rect">
+            <a:avLst/>
+          </a:prstGeom>
+          <a:solidFill>
+            <a:srgbClr val="E65100"/>
+          </a:solidFill>
+          <a:ln/>
+        </p:spPr>
+      </p:sp>
+      <p:sp>
+        <p:nvSpPr>
+          <p:cNvPr id="9" name="Text 7"/>
+          <p:cNvSpPr/>
+          <p:nvPr/>
+        </p:nvSpPr>
+        <p:spPr>
+          <a:xfrm>
+            <a:off x="685800" y="1463040"/>
+            <a:ext cx="7818120" cy="521208"/>
+          </a:xfrm>
+          <a:prstGeom prst="rect">
+            <a:avLst/>
+          </a:prstGeom>
+          <a:noFill/>
+          <a:ln/>
+        </p:spPr>
+        <p:txBody>
+          <a:bodyPr wrap="square" lIns="0" tIns="0" rIns="0" bIns="0" rtlCol="0" anchor="ctr"/>
+          <a:lstStyle/>
+          <a:p>
+            <a:pPr indent="0" marL="0">
+              <a:buNone/>
+            </a:pPr>
+            <a:r>
+              <a:rPr lang="en-US" sz="1200" dirty="0">
+                <a:solidFill>
+                  <a:srgbClr val="1A1A2E"/>
+                </a:solidFill>
+                <a:latin typeface="Calibri" pitchFamily="34" charset="0"/>
+                <a:ea typeface="Calibri" pitchFamily="34" charset="-122"/>
+                <a:cs typeface="Calibri" pitchFamily="34" charset="-120"/>
+              </a:rPr>
+              <a:t>Couvrir : 5 contraintes, 5 requêtes SELECT, 5 JOIN, 3 sécurité, 2 procédures</a:t>
+            </a:r>
+            <a:endParaRPr lang="en-US" sz="1200" dirty="0"/>
+          </a:p>
+        </p:txBody>
+      </p:sp>
+      <p:sp>
+        <p:nvSpPr>
+          <p:cNvPr id="10" name="Shape 8"/>
+          <p:cNvSpPr/>
+          <p:nvPr/>
+        </p:nvSpPr>
+        <p:spPr>
+          <a:xfrm>
+            <a:off x="457200" y="2011680"/>
+            <a:ext cx="8229600" cy="521208"/>
+          </a:xfrm>
+          <a:prstGeom prst="rect">
+            <a:avLst/>
+          </a:prstGeom>
+          <a:solidFill>
+            <a:srgbClr val="FFFFFF"/>
+          </a:solidFill>
+          <a:ln/>
+          <a:effectLst>
+            <a:outerShdw sx="100000" sy="100000" kx="0" ky="0" algn="bl" rotWithShape="0" blurRad="50800" dist="25400" dir="8100000">
+              <a:srgbClr val="000000">
+                <a:alpha val="12000"/>
+              </a:srgbClr>
+            </a:outerShdw>
+          </a:effectLst>
+        </p:spPr>
+      </p:sp>
+      <p:sp>
+        <p:nvSpPr>
+          <p:cNvPr id="11" name="Shape 9"/>
+          <p:cNvSpPr/>
+          <p:nvPr/>
+        </p:nvSpPr>
+        <p:spPr>
+          <a:xfrm>
+            <a:off x="457200" y="2011680"/>
+            <a:ext cx="45720" cy="521208"/>
+          </a:xfrm>
+          <a:prstGeom prst="rect">
+            <a:avLst/>
+          </a:prstGeom>
+          <a:solidFill>
+            <a:srgbClr val="E65100"/>
+          </a:solidFill>
+          <a:ln/>
+        </p:spPr>
+      </p:sp>
+      <p:sp>
+        <p:nvSpPr>
+          <p:cNvPr id="12" name="Text 10"/>
+          <p:cNvSpPr/>
+          <p:nvPr/>
+        </p:nvSpPr>
+        <p:spPr>
+          <a:xfrm>
+            <a:off x="685800" y="2011680"/>
+            <a:ext cx="7818120" cy="521208"/>
+          </a:xfrm>
+          <a:prstGeom prst="rect">
+            <a:avLst/>
+          </a:prstGeom>
+          <a:noFill/>
+          <a:ln/>
+        </p:spPr>
+        <p:txBody>
+          <a:bodyPr wrap="square" lIns="0" tIns="0" rIns="0" bIns="0" rtlCol="0" anchor="ctr"/>
+          <a:lstStyle/>
+          <a:p>
+            <a:pPr indent="0" marL="0">
+              <a:buNone/>
+            </a:pPr>
+            <a:r>
+              <a:rPr lang="en-US" sz="1200" dirty="0">
+                <a:solidFill>
+                  <a:srgbClr val="1A1A2E"/>
+                </a:solidFill>
+                <a:latin typeface="Calibri" pitchFamily="34" charset="0"/>
+                <a:ea typeface="Calibri" pitchFamily="34" charset="-122"/>
+                <a:cs typeface="Calibri" pitchFamily="34" charset="-120"/>
+              </a:rPr>
+              <a:t>Pour chaque test : données normales + limites + erronées</a:t>
+            </a:r>
+            <a:endParaRPr lang="en-US" sz="1200" dirty="0"/>
+          </a:p>
+        </p:txBody>
+      </p:sp>
+      <p:sp>
+        <p:nvSpPr>
+          <p:cNvPr id="13" name="Shape 11"/>
+          <p:cNvSpPr/>
+          <p:nvPr/>
+        </p:nvSpPr>
+        <p:spPr>
+          <a:xfrm>
+            <a:off x="457200" y="2560320"/>
+            <a:ext cx="8229600" cy="521208"/>
+          </a:xfrm>
+          <a:prstGeom prst="rect">
+            <a:avLst/>
+          </a:prstGeom>
+          <a:solidFill>
+            <a:srgbClr val="FFF3E0"/>
+          </a:solidFill>
+          <a:ln/>
+          <a:effectLst>
+            <a:outerShdw sx="100000" sy="100000" kx="0" ky="0" algn="bl" rotWithShape="0" blurRad="50800" dist="25400" dir="8100000">
+              <a:srgbClr val="000000">
+                <a:alpha val="12000"/>
+              </a:srgbClr>
+            </a:outerShdw>
+          </a:effectLst>
+        </p:spPr>
+      </p:sp>
+      <p:sp>
+        <p:nvSpPr>
+          <p:cNvPr id="14" name="Shape 12"/>
+          <p:cNvSpPr/>
+          <p:nvPr/>
+        </p:nvSpPr>
+        <p:spPr>
+          <a:xfrm>
+            <a:off x="457200" y="2560320"/>
+            <a:ext cx="45720" cy="521208"/>
+          </a:xfrm>
+          <a:prstGeom prst="rect">
+            <a:avLst/>
+          </a:prstGeom>
+          <a:solidFill>
+            <a:srgbClr val="E65100"/>
+          </a:solidFill>
+          <a:ln/>
+        </p:spPr>
+      </p:sp>
+      <p:sp>
+        <p:nvSpPr>
+          <p:cNvPr id="15" name="Text 13"/>
+          <p:cNvSpPr/>
+          <p:nvPr/>
+        </p:nvSpPr>
+        <p:spPr>
+          <a:xfrm>
+            <a:off x="685800" y="2560320"/>
+            <a:ext cx="7818120" cy="521208"/>
+          </a:xfrm>
+          <a:prstGeom prst="rect">
+            <a:avLst/>
+          </a:prstGeom>
+          <a:noFill/>
+          <a:ln/>
+        </p:spPr>
+        <p:txBody>
+          <a:bodyPr wrap="square" lIns="0" tIns="0" rIns="0" bIns="0" rtlCol="0" anchor="ctr"/>
+          <a:lstStyle/>
+          <a:p>
+            <a:pPr indent="0" marL="0">
+              <a:buNone/>
+            </a:pPr>
+            <a:r>
+              <a:rPr lang="en-US" sz="1200" dirty="0">
+                <a:solidFill>
+                  <a:srgbClr val="1A1A2E"/>
+                </a:solidFill>
+                <a:latin typeface="Calibri" pitchFamily="34" charset="0"/>
+                <a:ea typeface="Calibri" pitchFamily="34" charset="-122"/>
+                <a:cs typeface="Calibri" pitchFamily="34" charset="-120"/>
+              </a:rPr>
+              <a:t>Créer la matrice de traçabilité (test ↔ besoin du cahier des charges)</a:t>
+            </a:r>
+            <a:endParaRPr lang="en-US" sz="1200" dirty="0"/>
+          </a:p>
+        </p:txBody>
+      </p:sp>
+      <p:sp>
+        <p:nvSpPr>
+          <p:cNvPr id="16" name="Shape 14"/>
+          <p:cNvSpPr/>
+          <p:nvPr/>
+        </p:nvSpPr>
+        <p:spPr>
+          <a:xfrm>
+            <a:off x="457200" y="3108960"/>
+            <a:ext cx="8229600" cy="521208"/>
+          </a:xfrm>
+          <a:prstGeom prst="rect">
+            <a:avLst/>
+          </a:prstGeom>
+          <a:solidFill>
+            <a:srgbClr val="FFFFFF"/>
+          </a:solidFill>
+          <a:ln/>
+          <a:effectLst>
+            <a:outerShdw sx="100000" sy="100000" kx="0" ky="0" algn="bl" rotWithShape="0" blurRad="50800" dist="25400" dir="8100000">
+              <a:srgbClr val="000000">
+                <a:alpha val="12000"/>
+              </a:srgbClr>
+            </a:outerShdw>
+          </a:effectLst>
+        </p:spPr>
+      </p:sp>
+      <p:sp>
+        <p:nvSpPr>
+          <p:cNvPr id="17" name="Shape 15"/>
+          <p:cNvSpPr/>
+          <p:nvPr/>
+        </p:nvSpPr>
+        <p:spPr>
+          <a:xfrm>
+            <a:off x="457200" y="3108960"/>
+            <a:ext cx="45720" cy="521208"/>
+          </a:xfrm>
+          <a:prstGeom prst="rect">
+            <a:avLst/>
+          </a:prstGeom>
+          <a:solidFill>
+            <a:srgbClr val="E65100"/>
+          </a:solidFill>
+          <a:ln/>
+        </p:spPr>
+      </p:sp>
+      <p:sp>
+        <p:nvSpPr>
+          <p:cNvPr id="18" name="Text 16"/>
+          <p:cNvSpPr/>
+          <p:nvPr/>
+        </p:nvSpPr>
+        <p:spPr>
+          <a:xfrm>
+            <a:off x="685800" y="3108960"/>
+            <a:ext cx="7818120" cy="521208"/>
+          </a:xfrm>
+          <a:prstGeom prst="rect">
+            <a:avLst/>
+          </a:prstGeom>
+          <a:noFill/>
+          <a:ln/>
+        </p:spPr>
+        <p:txBody>
+          <a:bodyPr wrap="square" lIns="0" tIns="0" rIns="0" bIns="0" rtlCol="0" anchor="ctr"/>
+          <a:lstStyle/>
+          <a:p>
+            <a:pPr indent="0" marL="0">
+              <a:buNone/>
+            </a:pPr>
+            <a:r>
+              <a:rPr lang="en-US" sz="1200" dirty="0">
+                <a:solidFill>
+                  <a:srgbClr val="1A1A2E"/>
+                </a:solidFill>
+                <a:latin typeface="Calibri" pitchFamily="34" charset="0"/>
+                <a:ea typeface="Calibri" pitchFamily="34" charset="-122"/>
+                <a:cs typeface="Calibri" pitchFamily="34" charset="-120"/>
+              </a:rPr>
+              <a:t>Calculer le taux de couverture visé</a:t>
+            </a:r>
+            <a:endParaRPr lang="en-US" sz="1200" dirty="0"/>
+          </a:p>
+        </p:txBody>
+      </p:sp>
+      <p:sp>
+        <p:nvSpPr>
+          <p:cNvPr id="19" name="Shape 17"/>
+          <p:cNvSpPr/>
+          <p:nvPr/>
+        </p:nvSpPr>
+        <p:spPr>
+          <a:xfrm>
+            <a:off x="457200" y="3657600"/>
+            <a:ext cx="8229600" cy="521208"/>
+          </a:xfrm>
+          <a:prstGeom prst="rect">
+            <a:avLst/>
+          </a:prstGeom>
+          <a:solidFill>
+            <a:srgbClr val="FFF3E0"/>
+          </a:solidFill>
+          <a:ln/>
+          <a:effectLst>
+            <a:outerShdw sx="100000" sy="100000" kx="0" ky="0" algn="bl" rotWithShape="0" blurRad="50800" dist="25400" dir="8100000">
+              <a:srgbClr val="000000">
+                <a:alpha val="12000"/>
+              </a:srgbClr>
+            </a:outerShdw>
+          </a:effectLst>
+        </p:spPr>
+      </p:sp>
+      <p:sp>
+        <p:nvSpPr>
+          <p:cNvPr id="20" name="Shape 18"/>
+          <p:cNvSpPr/>
+          <p:nvPr/>
+        </p:nvSpPr>
+        <p:spPr>
+          <a:xfrm>
+            <a:off x="457200" y="3657600"/>
+            <a:ext cx="45720" cy="521208"/>
+          </a:xfrm>
+          <a:prstGeom prst="rect">
+            <a:avLst/>
+          </a:prstGeom>
+          <a:solidFill>
+            <a:srgbClr val="E65100"/>
+          </a:solidFill>
+          <a:ln/>
+        </p:spPr>
+      </p:sp>
+      <p:sp>
+        <p:nvSpPr>
+          <p:cNvPr id="21" name="Text 19"/>
+          <p:cNvSpPr/>
+          <p:nvPr/>
+        </p:nvSpPr>
+        <p:spPr>
+          <a:xfrm>
+            <a:off x="685800" y="3657600"/>
+            <a:ext cx="7818120" cy="521208"/>
+          </a:xfrm>
+          <a:prstGeom prst="rect">
+            <a:avLst/>
+          </a:prstGeom>
+          <a:noFill/>
+          <a:ln/>
+        </p:spPr>
+        <p:txBody>
+          <a:bodyPr wrap="square" lIns="0" tIns="0" rIns="0" bIns="0" rtlCol="0" anchor="ctr"/>
+          <a:lstStyle/>
+          <a:p>
+            <a:pPr indent="0" marL="0">
+              <a:buNone/>
+            </a:pPr>
+            <a:r>
+              <a:rPr lang="en-US" sz="1200" dirty="0">
+                <a:solidFill>
+                  <a:srgbClr val="1A1A2E"/>
+                </a:solidFill>
+                <a:latin typeface="Calibri" pitchFamily="34" charset="0"/>
+                <a:ea typeface="Calibri" pitchFamily="34" charset="-122"/>
+                <a:cs typeface="Calibri" pitchFamily="34" charset="-120"/>
+              </a:rPr>
+              <a:t>DÉFI : ajouter 5 cas de test pour les cas limites extrêmes (NULL, 0, overflow)</a:t>
+            </a:r>
+            <a:endParaRPr lang="en-US" sz="1200" dirty="0"/>
+          </a:p>
+        </p:txBody>
+      </p:sp>
+    </p:spTree>
+  </p:cSld>
+  <p:clrMapOvr>
+    <a:masterClrMapping/>
+  </p:clrMapOvr>
+</p:sld>
+</file>
+
+<file path=ppt/slides/slide7.xml><?xml version="1.0" encoding="utf-8"?>
+<p:sld xmlns:a="http://schemas.openxmlformats.org/drawingml/2006/main" xmlns:r="http://schemas.openxmlformats.org/officeDocument/2006/relationships" xmlns:p="http://schemas.openxmlformats.org/presentationml/2006/main">
+  <p:cSld name="Slide 7">
+    <p:bg>
+      <p:bgPr>
+        <a:solidFill>
+          <a:srgbClr val="BF360C"/>
+        </a:solidFill>
+      </p:bgPr>
+    </p:bg>
+    <p:spTree>
+      <p:nvGrpSpPr>
+        <p:cNvPr id="1" name=""/>
+        <p:cNvGrpSpPr/>
+        <p:nvPr/>
+      </p:nvGrpSpPr>
+      <p:grpSpPr>
+        <a:xfrm>
+          <a:off x="0" y="0"/>
+          <a:ext cx="0" cy="0"/>
+          <a:chOff x="0" y="0"/>
+          <a:chExt cx="0" cy="0"/>
+        </a:xfrm>
+      </p:grpSpPr>
+      <p:sp>
+        <p:nvSpPr>
+          <p:cNvPr id="2" name="Text 0"/>
+          <p:cNvSpPr/>
+          <p:nvPr/>
+        </p:nvSpPr>
+        <p:spPr>
+          <a:xfrm>
+            <a:off x="3840480" y="457200"/>
+            <a:ext cx="1463040" cy="1097280"/>
+          </a:xfrm>
+          <a:prstGeom prst="rect">
+            <a:avLst/>
+          </a:prstGeom>
+          <a:noFill/>
+          <a:ln/>
+        </p:spPr>
+        <p:txBody>
+          <a:bodyPr wrap="square" lIns="0" tIns="0" rIns="0" bIns="0" rtlCol="0" anchor="ctr"/>
+          <a:lstStyle/>
+          <a:p>
+            <a:pPr algn="ctr" indent="0" marL="0">
+              <a:buNone/>
+            </a:pPr>
+            <a:r>
+              <a:rPr lang="en-US" sz="6000" dirty="0">
+                <a:solidFill>
+                  <a:srgbClr val="000000"/>
+                </a:solidFill>
+              </a:rPr>
+              <a:t>🎮</a:t>
+            </a:r>
+            <a:endParaRPr lang="en-US" sz="6000" dirty="0"/>
+          </a:p>
+        </p:txBody>
+      </p:sp>
+      <p:sp>
+        <p:nvSpPr>
+          <p:cNvPr id="3" name="Text 1"/>
+          <p:cNvSpPr/>
+          <p:nvPr/>
+        </p:nvSpPr>
+        <p:spPr>
+          <a:xfrm>
+            <a:off x="457200" y="1645920"/>
+            <a:ext cx="8229600" cy="548640"/>
+          </a:xfrm>
+          <a:prstGeom prst="rect">
+            <a:avLst/>
+          </a:prstGeom>
+          <a:noFill/>
+          <a:ln/>
+        </p:spPr>
+        <p:txBody>
+          <a:bodyPr wrap="square" lIns="0" tIns="0" rIns="0" bIns="0" rtlCol="0" anchor="ctr"/>
+          <a:lstStyle/>
+          <a:p>
+            <a:pPr algn="ctr" indent="0" marL="0">
+              <a:buNone/>
+            </a:pPr>
+            <a:r>
+              <a:rPr lang="en-US" sz="2600" b="1" dirty="0">
+                <a:solidFill>
+                  <a:srgbClr val="FFFFFF"/>
+                </a:solidFill>
+                <a:latin typeface="Trebuchet MS" pitchFamily="34" charset="0"/>
+                <a:ea typeface="Trebuchet MS" pitchFamily="34" charset="-122"/>
+                <a:cs typeface="Trebuchet MS" pitchFamily="34" charset="-120"/>
+              </a:rPr>
+              <a:t>Mini-jeu : Le Testeur Fou</a:t>
+            </a:r>
+            <a:endParaRPr lang="en-US" sz="2600" dirty="0"/>
+          </a:p>
+        </p:txBody>
+      </p:sp>
+      <p:sp>
+        <p:nvSpPr>
+          <p:cNvPr id="4" name="Text 2"/>
+          <p:cNvSpPr/>
+          <p:nvPr/>
+        </p:nvSpPr>
+        <p:spPr>
+          <a:xfrm>
+            <a:off x="1371600" y="2286000"/>
+            <a:ext cx="6400800" cy="731520"/>
+          </a:xfrm>
+          <a:prstGeom prst="rect">
+            <a:avLst/>
+          </a:prstGeom>
+          <a:noFill/>
+          <a:ln/>
+        </p:spPr>
+        <p:txBody>
+          <a:bodyPr wrap="square" lIns="0" tIns="0" rIns="0" bIns="0" rtlCol="0" anchor="ctr"/>
+          <a:lstStyle/>
+          <a:p>
+            <a:pPr algn="ctr" indent="0" marL="0">
+              <a:buNone/>
+            </a:pPr>
+            <a:r>
+              <a:rPr lang="en-US" sz="1400" dirty="0">
+                <a:solidFill>
+                  <a:srgbClr val="CCCCCC"/>
+                </a:solidFill>
+                <a:latin typeface="Calibri" pitchFamily="34" charset="0"/>
+                <a:ea typeface="Calibri" pitchFamily="34" charset="-122"/>
+                <a:cs typeface="Calibri" pitchFamily="34" charset="-120"/>
+              </a:rPr>
+              <a:t>Prédisez les résultats avant d'exécuter !</a:t>
+            </a:r>
+            <a:endParaRPr lang="en-US" sz="1400" dirty="0"/>
+          </a:p>
+        </p:txBody>
+      </p:sp>
+      <p:sp>
+        <p:nvSpPr>
+          <p:cNvPr id="5" name="Shape 3"/>
+          <p:cNvSpPr/>
+          <p:nvPr/>
+        </p:nvSpPr>
+        <p:spPr>
+          <a:xfrm>
+            <a:off x="2286000" y="3291840"/>
+            <a:ext cx="4572000" cy="548640"/>
+          </a:xfrm>
+          <a:prstGeom prst="rect">
+            <a:avLst/>
+          </a:prstGeom>
+          <a:solidFill>
+            <a:srgbClr val="1565C0"/>
+          </a:solidFill>
+          <a:ln/>
+        </p:spPr>
+      </p:sp>
+      <p:sp>
+        <p:nvSpPr>
+          <p:cNvPr id="6" name="Text 4"/>
+          <p:cNvSpPr/>
+          <p:nvPr/>
+        </p:nvSpPr>
+        <p:spPr>
+          <a:xfrm>
+            <a:off x="2286000" y="3291840"/>
+            <a:ext cx="4572000" cy="548640"/>
+          </a:xfrm>
+          <a:prstGeom prst="rect">
+            <a:avLst/>
+          </a:prstGeom>
+          <a:noFill/>
+          <a:ln/>
+        </p:spPr>
+        <p:txBody>
+          <a:bodyPr wrap="square" lIns="0" tIns="0" rIns="0" bIns="0" rtlCol="0" anchor="ctr"/>
+          <a:lstStyle/>
+          <a:p>
+            <a:pPr algn="ctr" indent="0" marL="0">
+              <a:buNone/>
+            </a:pPr>
+            <a:r>
+              <a:rPr lang="en-US" sz="1800" b="1" dirty="0">
+                <a:solidFill>
+                  <a:srgbClr val="FFFFFF"/>
+                </a:solidFill>
+                <a:latin typeface="Trebuchet MS" pitchFamily="34" charset="0"/>
+                <a:ea typeface="Trebuchet MS" pitchFamily="34" charset="-122"/>
+                <a:cs typeface="Trebuchet MS" pitchFamily="34" charset="-120"/>
+              </a:rPr>
+              <a:t>▶  Lancer le jeu</a:t>
+            </a:r>
+            <a:endParaRPr lang="en-US" sz="1800" dirty="0"/>
+          </a:p>
+        </p:txBody>
+      </p:sp>
+    </p:spTree>
+  </p:cSld>
+  <p:clrMapOvr>
+    <a:masterClrMapping/>
+  </p:clrMapOvr>
+</p:sld>
+</file>
+
+<file path=ppt/slides/slide8.xml><?xml version="1.0" encoding="utf-8"?>
+<p:sld xmlns:a="http://schemas.openxmlformats.org/drawingml/2006/main" xmlns:r="http://schemas.openxmlformats.org/officeDocument/2006/relationships" xmlns:p="http://schemas.openxmlformats.org/presentationml/2006/main">
+  <p:cSld name="Slide 8">
+    <p:bg>
+      <p:bgPr>
+        <a:solidFill>
+          <a:srgbClr val="F5F7FA"/>
+        </a:solidFill>
+      </p:bgPr>
+    </p:bg>
+    <p:spTree>
+      <p:nvGrpSpPr>
+        <p:cNvPr id="1" name=""/>
+        <p:cNvGrpSpPr/>
+        <p:nvPr/>
+      </p:nvGrpSpPr>
+      <p:grpSpPr>
+        <a:xfrm>
+          <a:off x="0" y="0"/>
+          <a:ext cx="0" cy="0"/>
+          <a:chOff x="0" y="0"/>
+          <a:chExt cx="0" cy="0"/>
+        </a:xfrm>
+      </p:grpSpPr>
+      <p:sp>
+        <p:nvSpPr>
+          <p:cNvPr id="2" name="Text 0"/>
+          <p:cNvSpPr/>
+          <p:nvPr/>
+        </p:nvSpPr>
+        <p:spPr>
+          <a:xfrm>
+            <a:off x="457200" y="137160"/>
+            <a:ext cx="5486400" cy="411480"/>
+          </a:xfrm>
+          <a:prstGeom prst="rect">
+            <a:avLst/>
+          </a:prstGeom>
+          <a:noFill/>
+          <a:ln/>
+        </p:spPr>
+        <p:txBody>
+          <a:bodyPr wrap="square" lIns="0" tIns="0" rIns="0" bIns="0" rtlCol="0" anchor="ctr"/>
+          <a:lstStyle/>
+          <a:p>
+            <a:pPr indent="0" marL="0">
+              <a:buNone/>
+            </a:pPr>
+            <a:r>
+              <a:rPr lang="en-US" sz="1800" b="1" dirty="0">
+                <a:solidFill>
+                  <a:srgbClr val="BF360C"/>
+                </a:solidFill>
+                <a:latin typeface="Trebuchet MS" pitchFamily="34" charset="0"/>
+                <a:ea typeface="Trebuchet MS" pitchFamily="34" charset="-122"/>
+                <a:cs typeface="Trebuchet MS" pitchFamily="34" charset="-120"/>
+              </a:rPr>
+              <a:t>📋 Mémo Module 17</a:t>
+            </a:r>
+            <a:endParaRPr lang="en-US" sz="1800" dirty="0"/>
+          </a:p>
+        </p:txBody>
+      </p:sp>
+      <p:sp>
+        <p:nvSpPr>
+          <p:cNvPr id="3" name="Shape 1"/>
+          <p:cNvSpPr/>
+          <p:nvPr/>
+        </p:nvSpPr>
+        <p:spPr>
+          <a:xfrm>
+            <a:off x="457200" y="548640"/>
+            <a:ext cx="8229600" cy="274320"/>
+          </a:xfrm>
+          <a:prstGeom prst="rect">
+            <a:avLst/>
+          </a:prstGeom>
+          <a:solidFill>
+            <a:srgbClr val="FFF3E0"/>
+          </a:solidFill>
+          <a:ln/>
+        </p:spPr>
+      </p:sp>
+      <p:sp>
+        <p:nvSpPr>
+          <p:cNvPr id="4" name="Text 2"/>
+          <p:cNvSpPr/>
+          <p:nvPr/>
+        </p:nvSpPr>
+        <p:spPr>
+          <a:xfrm>
+            <a:off x="640080" y="548640"/>
+            <a:ext cx="7772400" cy="274320"/>
+          </a:xfrm>
+          <a:prstGeom prst="rect">
+            <a:avLst/>
+          </a:prstGeom>
+          <a:noFill/>
+          <a:ln/>
+        </p:spPr>
+        <p:txBody>
+          <a:bodyPr wrap="square" lIns="0" tIns="0" rIns="0" bIns="0" rtlCol="0" anchor="ctr"/>
+          <a:lstStyle/>
+          <a:p>
+            <a:pPr indent="0" marL="0">
+              <a:buNone/>
+            </a:pPr>
+            <a:r>
+              <a:rPr lang="en-US" sz="900" b="1" dirty="0">
                 <a:solidFill>
                   <a:srgbClr val="E65100"/>
                 </a:solidFill>
@@ -4205,9 +5578,9 @@
                 <a:ea typeface="Calibri" pitchFamily="34" charset="-122"/>
                 <a:cs typeface="Calibri" pitchFamily="34" charset="-120"/>
               </a:rPr>
-              <a:t>🔒 Ce mémo se débloque quand toutes les phases du module sont terminées !</a:t>
-            </a:r>
-            <a:endParaRPr lang="en-US" sz="1000" dirty="0"/>
+              <a:t>🔒 Déblocable après complétion</a:t>
+            </a:r>
+            <a:endParaRPr lang="en-US" sz="900" dirty="0"/>
           </a:p>
         </p:txBody>
       </p:sp>
@@ -4219,8 +5592,8 @@
         </p:nvSpPr>
         <p:spPr>
           <a:xfrm>
-            <a:off x="457200" y="1188720"/>
-            <a:ext cx="8229600" cy="713232"/>
+            <a:off x="457200" y="960120"/>
+            <a:ext cx="2286000" cy="475488"/>
           </a:xfrm>
           <a:prstGeom prst="rect">
             <a:avLst/>
@@ -4239,8 +5612,8 @@
         </p:nvSpPr>
         <p:spPr>
           <a:xfrm>
-            <a:off x="640080" y="1188720"/>
-            <a:ext cx="2560320" cy="713232"/>
+            <a:off x="548640" y="960120"/>
+            <a:ext cx="2103120" cy="475488"/>
           </a:xfrm>
           <a:prstGeom prst="rect">
             <a:avLst/>
@@ -4256,30 +5629,50 @@
               <a:buNone/>
             </a:pPr>
             <a:r>
-              <a:rPr lang="en-US" sz="1000" b="1" dirty="0">
+              <a:rPr lang="en-US" sz="900" b="1" dirty="0">
                 <a:solidFill>
-                  <a:srgbClr val="E65100"/>
+                  <a:srgbClr val="BF360C"/>
                 </a:solidFill>
                 <a:latin typeface="Trebuchet MS" pitchFamily="34" charset="0"/>
                 <a:ea typeface="Trebuchet MS" pitchFamily="34" charset="-122"/>
                 <a:cs typeface="Trebuchet MS" pitchFamily="34" charset="-120"/>
               </a:rPr>
-              <a:t>Pourquoi tester une BDD ?</a:t>
-            </a:r>
-            <a:endParaRPr lang="en-US" sz="1000" dirty="0"/>
-          </a:p>
-        </p:txBody>
-      </p:sp>
-      <p:sp>
-        <p:nvSpPr>
-          <p:cNvPr id="7" name="Text 5"/>
-          <p:cNvSpPr/>
-          <p:nvPr/>
-        </p:nvSpPr>
-        <p:spPr>
-          <a:xfrm>
-            <a:off x="3291840" y="1188720"/>
-            <a:ext cx="5212080" cy="713232"/>
+              <a:t>White box</a:t>
+            </a:r>
+            <a:endParaRPr lang="en-US" sz="900" dirty="0"/>
+          </a:p>
+        </p:txBody>
+      </p:sp>
+      <p:sp>
+        <p:nvSpPr>
+          <p:cNvPr id="7" name="Shape 5"/>
+          <p:cNvSpPr/>
+          <p:nvPr/>
+        </p:nvSpPr>
+        <p:spPr>
+          <a:xfrm>
+            <a:off x="2743200" y="960120"/>
+            <a:ext cx="5943600" cy="475488"/>
+          </a:xfrm>
+          <a:prstGeom prst="rect">
+            <a:avLst/>
+          </a:prstGeom>
+          <a:solidFill>
+            <a:srgbClr val="FFF3E0"/>
+          </a:solidFill>
+          <a:ln/>
+        </p:spPr>
+      </p:sp>
+      <p:sp>
+        <p:nvSpPr>
+          <p:cNvPr id="8" name="Text 6"/>
+          <p:cNvSpPr/>
+          <p:nvPr/>
+        </p:nvSpPr>
+        <p:spPr>
+          <a:xfrm>
+            <a:off x="2834640" y="960120"/>
+            <a:ext cx="5760720" cy="475488"/>
           </a:xfrm>
           <a:prstGeom prst="rect">
             <a:avLst/>
@@ -4303,7 +5696,7 @@
                 <a:ea typeface="Calibri" pitchFamily="34" charset="-122"/>
                 <a:cs typeface="Calibri" pitchFamily="34" charset="-120"/>
               </a:rPr>
-              <a:t>Vérifier que les contraintes fonctionnent | Vérifier que les requêtes retournent les bons résultats | Vérifier que la sé...</a:t>
+              <a:t>On connaît le code : tester chaque contrainte, requête, procédure</a:t>
             </a:r>
             <a:endParaRPr lang="en-US" sz="900" dirty="0"/>
           </a:p>
@@ -4311,34 +5704,34 @@
       </p:sp>
       <p:sp>
         <p:nvSpPr>
-          <p:cNvPr id="8" name="Shape 6"/>
-          <p:cNvSpPr/>
-          <p:nvPr/>
-        </p:nvSpPr>
-        <p:spPr>
-          <a:xfrm>
-            <a:off x="457200" y="1965960"/>
-            <a:ext cx="8229600" cy="713232"/>
-          </a:xfrm>
-          <a:prstGeom prst="rect">
-            <a:avLst/>
-          </a:prstGeom>
-          <a:solidFill>
-            <a:srgbClr val="FFFFFF"/>
-          </a:solidFill>
-          <a:ln/>
-        </p:spPr>
-      </p:sp>
-      <p:sp>
-        <p:nvSpPr>
-          <p:cNvPr id="9" name="Text 7"/>
-          <p:cNvSpPr/>
-          <p:nvPr/>
-        </p:nvSpPr>
-        <p:spPr>
-          <a:xfrm>
-            <a:off x="640080" y="1965960"/>
-            <a:ext cx="2560320" cy="713232"/>
+          <p:cNvPr id="9" name="Shape 7"/>
+          <p:cNvSpPr/>
+          <p:nvPr/>
+        </p:nvSpPr>
+        <p:spPr>
+          <a:xfrm>
+            <a:off x="457200" y="1463040"/>
+            <a:ext cx="2286000" cy="475488"/>
+          </a:xfrm>
+          <a:prstGeom prst="rect">
+            <a:avLst/>
+          </a:prstGeom>
+          <a:solidFill>
+            <a:srgbClr val="F0F0F0"/>
+          </a:solidFill>
+          <a:ln/>
+        </p:spPr>
+      </p:sp>
+      <p:sp>
+        <p:nvSpPr>
+          <p:cNvPr id="10" name="Text 8"/>
+          <p:cNvSpPr/>
+          <p:nvPr/>
+        </p:nvSpPr>
+        <p:spPr>
+          <a:xfrm>
+            <a:off x="548640" y="1463040"/>
+            <a:ext cx="2103120" cy="475488"/>
           </a:xfrm>
           <a:prstGeom prst="rect">
             <a:avLst/>
@@ -4354,30 +5747,50 @@
               <a:buNone/>
             </a:pPr>
             <a:r>
-              <a:rPr lang="en-US" sz="1000" b="1" dirty="0">
+              <a:rPr lang="en-US" sz="900" b="1" dirty="0">
                 <a:solidFill>
-                  <a:srgbClr val="E65100"/>
+                  <a:srgbClr val="BF360C"/>
                 </a:solidFill>
                 <a:latin typeface="Trebuchet MS" pitchFamily="34" charset="0"/>
                 <a:ea typeface="Trebuchet MS" pitchFamily="34" charset="-122"/>
                 <a:cs typeface="Trebuchet MS" pitchFamily="34" charset="-120"/>
               </a:rPr>
-              <a:t>White box vs Black box</a:t>
-            </a:r>
-            <a:endParaRPr lang="en-US" sz="1000" dirty="0"/>
-          </a:p>
-        </p:txBody>
-      </p:sp>
-      <p:sp>
-        <p:nvSpPr>
-          <p:cNvPr id="10" name="Text 8"/>
-          <p:cNvSpPr/>
-          <p:nvPr/>
-        </p:nvSpPr>
-        <p:spPr>
-          <a:xfrm>
-            <a:off x="3291840" y="1965960"/>
-            <a:ext cx="5212080" cy="713232"/>
+              <a:t>Black box</a:t>
+            </a:r>
+            <a:endParaRPr lang="en-US" sz="900" dirty="0"/>
+          </a:p>
+        </p:txBody>
+      </p:sp>
+      <p:sp>
+        <p:nvSpPr>
+          <p:cNvPr id="11" name="Shape 9"/>
+          <p:cNvSpPr/>
+          <p:nvPr/>
+        </p:nvSpPr>
+        <p:spPr>
+          <a:xfrm>
+            <a:off x="2743200" y="1463040"/>
+            <a:ext cx="5943600" cy="475488"/>
+          </a:xfrm>
+          <a:prstGeom prst="rect">
+            <a:avLst/>
+          </a:prstGeom>
+          <a:solidFill>
+            <a:srgbClr val="F0F0F0"/>
+          </a:solidFill>
+          <a:ln/>
+        </p:spPr>
+      </p:sp>
+      <p:sp>
+        <p:nvSpPr>
+          <p:cNvPr id="12" name="Text 10"/>
+          <p:cNvSpPr/>
+          <p:nvPr/>
+        </p:nvSpPr>
+        <p:spPr>
+          <a:xfrm>
+            <a:off x="2834640" y="1463040"/>
+            <a:ext cx="5760720" cy="475488"/>
           </a:xfrm>
           <a:prstGeom prst="rect">
             <a:avLst/>
@@ -4401,7 +5814,7 @@
                 <a:ea typeface="Calibri" pitchFamily="34" charset="-122"/>
                 <a:cs typeface="Calibri" pitchFamily="34" charset="-120"/>
               </a:rPr>
-              <a:t>White box : on CONNAÎT le code/la structure | → Tester chaque contrainte, chaque requête SQL | Black box : on teste les ...</a:t>
+              <a:t>On teste entrées/sorties sans voir le code interne</a:t>
             </a:r>
             <a:endParaRPr lang="en-US" sz="900" dirty="0"/>
           </a:p>
@@ -4409,14 +5822,14 @@
       </p:sp>
       <p:sp>
         <p:nvSpPr>
-          <p:cNvPr id="11" name="Shape 9"/>
-          <p:cNvSpPr/>
-          <p:nvPr/>
-        </p:nvSpPr>
-        <p:spPr>
-          <a:xfrm>
-            <a:off x="457200" y="2743200"/>
-            <a:ext cx="8229600" cy="713232"/>
+          <p:cNvPr id="13" name="Shape 11"/>
+          <p:cNvSpPr/>
+          <p:nvPr/>
+        </p:nvSpPr>
+        <p:spPr>
+          <a:xfrm>
+            <a:off x="457200" y="1965960"/>
+            <a:ext cx="2286000" cy="475488"/>
           </a:xfrm>
           <a:prstGeom prst="rect">
             <a:avLst/>
@@ -4429,14 +5842,14 @@
       </p:sp>
       <p:sp>
         <p:nvSpPr>
-          <p:cNvPr id="12" name="Text 10"/>
-          <p:cNvSpPr/>
-          <p:nvPr/>
-        </p:nvSpPr>
-        <p:spPr>
-          <a:xfrm>
-            <a:off x="640080" y="2743200"/>
-            <a:ext cx="2560320" cy="713232"/>
+          <p:cNvPr id="14" name="Text 12"/>
+          <p:cNvSpPr/>
+          <p:nvPr/>
+        </p:nvSpPr>
+        <p:spPr>
+          <a:xfrm>
+            <a:off x="548640" y="1965960"/>
+            <a:ext cx="2103120" cy="475488"/>
           </a:xfrm>
           <a:prstGeom prst="rect">
             <a:avLst/>
@@ -4452,30 +5865,50 @@
               <a:buNone/>
             </a:pPr>
             <a:r>
-              <a:rPr lang="en-US" sz="1000" b="1" dirty="0">
+              <a:rPr lang="en-US" sz="900" b="1" dirty="0">
                 <a:solidFill>
-                  <a:srgbClr val="E65100"/>
+                  <a:srgbClr val="BF360C"/>
                 </a:solidFill>
                 <a:latin typeface="Trebuchet MS" pitchFamily="34" charset="0"/>
                 <a:ea typeface="Trebuchet MS" pitchFamily="34" charset="-122"/>
                 <a:cs typeface="Trebuchet MS" pitchFamily="34" charset="-120"/>
               </a:rPr>
-              <a:t>Données de test</a:t>
-            </a:r>
-            <a:endParaRPr lang="en-US" sz="1000" dirty="0"/>
-          </a:p>
-        </p:txBody>
-      </p:sp>
-      <p:sp>
-        <p:nvSpPr>
-          <p:cNvPr id="13" name="Text 11"/>
-          <p:cNvSpPr/>
-          <p:nvPr/>
-        </p:nvSpPr>
-        <p:spPr>
-          <a:xfrm>
-            <a:off x="3291840" y="2743200"/>
-            <a:ext cx="5212080" cy="713232"/>
+              <a:t>Données normales</a:t>
+            </a:r>
+            <a:endParaRPr lang="en-US" sz="900" dirty="0"/>
+          </a:p>
+        </p:txBody>
+      </p:sp>
+      <p:sp>
+        <p:nvSpPr>
+          <p:cNvPr id="15" name="Shape 13"/>
+          <p:cNvSpPr/>
+          <p:nvPr/>
+        </p:nvSpPr>
+        <p:spPr>
+          <a:xfrm>
+            <a:off x="2743200" y="1965960"/>
+            <a:ext cx="5943600" cy="475488"/>
+          </a:xfrm>
+          <a:prstGeom prst="rect">
+            <a:avLst/>
+          </a:prstGeom>
+          <a:solidFill>
+            <a:srgbClr val="FFF3E0"/>
+          </a:solidFill>
+          <a:ln/>
+        </p:spPr>
+      </p:sp>
+      <p:sp>
+        <p:nvSpPr>
+          <p:cNvPr id="16" name="Text 14"/>
+          <p:cNvSpPr/>
+          <p:nvPr/>
+        </p:nvSpPr>
+        <p:spPr>
+          <a:xfrm>
+            <a:off x="2834640" y="1965960"/>
+            <a:ext cx="5760720" cy="475488"/>
           </a:xfrm>
           <a:prstGeom prst="rect">
             <a:avLst/>
@@ -4499,7 +5932,7 @@
                 <a:ea typeface="Calibri" pitchFamily="34" charset="-122"/>
                 <a:cs typeface="Calibri" pitchFamily="34" charset="-120"/>
               </a:rPr>
-              <a:t>Normales : données valides typiques (nom = 'Léman') | Limites : valeurs aux bornes (VARCHAR(100) → exactement 100 caract...</a:t>
+              <a:t>Valeurs valides typiques</a:t>
             </a:r>
             <a:endParaRPr lang="en-US" sz="900" dirty="0"/>
           </a:p>
@@ -4507,34 +5940,34 @@
       </p:sp>
       <p:sp>
         <p:nvSpPr>
-          <p:cNvPr id="14" name="Shape 12"/>
-          <p:cNvSpPr/>
-          <p:nvPr/>
-        </p:nvSpPr>
-        <p:spPr>
-          <a:xfrm>
-            <a:off x="457200" y="3520440"/>
-            <a:ext cx="8229600" cy="713232"/>
-          </a:xfrm>
-          <a:prstGeom prst="rect">
-            <a:avLst/>
-          </a:prstGeom>
-          <a:solidFill>
-            <a:srgbClr val="FFFFFF"/>
-          </a:solidFill>
-          <a:ln/>
-        </p:spPr>
-      </p:sp>
-      <p:sp>
-        <p:nvSpPr>
-          <p:cNvPr id="15" name="Text 13"/>
-          <p:cNvSpPr/>
-          <p:nvPr/>
-        </p:nvSpPr>
-        <p:spPr>
-          <a:xfrm>
-            <a:off x="640080" y="3520440"/>
-            <a:ext cx="2560320" cy="713232"/>
+          <p:cNvPr id="17" name="Shape 15"/>
+          <p:cNvSpPr/>
+          <p:nvPr/>
+        </p:nvSpPr>
+        <p:spPr>
+          <a:xfrm>
+            <a:off x="457200" y="2468880"/>
+            <a:ext cx="2286000" cy="475488"/>
+          </a:xfrm>
+          <a:prstGeom prst="rect">
+            <a:avLst/>
+          </a:prstGeom>
+          <a:solidFill>
+            <a:srgbClr val="F0F0F0"/>
+          </a:solidFill>
+          <a:ln/>
+        </p:spPr>
+      </p:sp>
+      <p:sp>
+        <p:nvSpPr>
+          <p:cNvPr id="18" name="Text 16"/>
+          <p:cNvSpPr/>
+          <p:nvPr/>
+        </p:nvSpPr>
+        <p:spPr>
+          <a:xfrm>
+            <a:off x="548640" y="2468880"/>
+            <a:ext cx="2103120" cy="475488"/>
           </a:xfrm>
           <a:prstGeom prst="rect">
             <a:avLst/>
@@ -4550,30 +5983,50 @@
               <a:buNone/>
             </a:pPr>
             <a:r>
-              <a:rPr lang="en-US" sz="1000" b="1" dirty="0">
+              <a:rPr lang="en-US" sz="900" b="1" dirty="0">
                 <a:solidFill>
-                  <a:srgbClr val="E65100"/>
+                  <a:srgbClr val="BF360C"/>
                 </a:solidFill>
                 <a:latin typeface="Trebuchet MS" pitchFamily="34" charset="0"/>
                 <a:ea typeface="Trebuchet MS" pitchFamily="34" charset="-122"/>
                 <a:cs typeface="Trebuchet MS" pitchFamily="34" charset="-120"/>
               </a:rPr>
-              <a:t>Matrice de traçabilité</a:t>
-            </a:r>
-            <a:endParaRPr lang="en-US" sz="1000" dirty="0"/>
-          </a:p>
-        </p:txBody>
-      </p:sp>
-      <p:sp>
-        <p:nvSpPr>
-          <p:cNvPr id="16" name="Text 14"/>
-          <p:cNvSpPr/>
-          <p:nvPr/>
-        </p:nvSpPr>
-        <p:spPr>
-          <a:xfrm>
-            <a:off x="3291840" y="3520440"/>
-            <a:ext cx="5212080" cy="713232"/>
+              <a:t>Données limites</a:t>
+            </a:r>
+            <a:endParaRPr lang="en-US" sz="900" dirty="0"/>
+          </a:p>
+        </p:txBody>
+      </p:sp>
+      <p:sp>
+        <p:nvSpPr>
+          <p:cNvPr id="19" name="Shape 17"/>
+          <p:cNvSpPr/>
+          <p:nvPr/>
+        </p:nvSpPr>
+        <p:spPr>
+          <a:xfrm>
+            <a:off x="2743200" y="2468880"/>
+            <a:ext cx="5943600" cy="475488"/>
+          </a:xfrm>
+          <a:prstGeom prst="rect">
+            <a:avLst/>
+          </a:prstGeom>
+          <a:solidFill>
+            <a:srgbClr val="F0F0F0"/>
+          </a:solidFill>
+          <a:ln/>
+        </p:spPr>
+      </p:sp>
+      <p:sp>
+        <p:nvSpPr>
+          <p:cNvPr id="20" name="Text 18"/>
+          <p:cNvSpPr/>
+          <p:nvPr/>
+        </p:nvSpPr>
+        <p:spPr>
+          <a:xfrm>
+            <a:off x="2834640" y="2468880"/>
+            <a:ext cx="5760720" cy="475488"/>
           </a:xfrm>
           <a:prstGeom prst="rect">
             <a:avLst/>
@@ -4597,7 +6050,361 @@
                 <a:ea typeface="Calibri" pitchFamily="34" charset="-122"/>
                 <a:cs typeface="Calibri" pitchFamily="34" charset="-120"/>
               </a:rPr>
-              <a:t>Chaque besoin du cahier des charges → au moins 1 test | | Besoin | Test | Données | Résultat attendu | Statut | | Couver...</a:t>
+              <a:t>Valeurs aux bornes (max VARCHAR, CHECK = 0)</a:t>
+            </a:r>
+            <a:endParaRPr lang="en-US" sz="900" dirty="0"/>
+          </a:p>
+        </p:txBody>
+      </p:sp>
+      <p:sp>
+        <p:nvSpPr>
+          <p:cNvPr id="21" name="Shape 19"/>
+          <p:cNvSpPr/>
+          <p:nvPr/>
+        </p:nvSpPr>
+        <p:spPr>
+          <a:xfrm>
+            <a:off x="457200" y="2971800"/>
+            <a:ext cx="2286000" cy="475488"/>
+          </a:xfrm>
+          <a:prstGeom prst="rect">
+            <a:avLst/>
+          </a:prstGeom>
+          <a:solidFill>
+            <a:srgbClr val="FFF3E0"/>
+          </a:solidFill>
+          <a:ln/>
+        </p:spPr>
+      </p:sp>
+      <p:sp>
+        <p:nvSpPr>
+          <p:cNvPr id="22" name="Text 20"/>
+          <p:cNvSpPr/>
+          <p:nvPr/>
+        </p:nvSpPr>
+        <p:spPr>
+          <a:xfrm>
+            <a:off x="548640" y="2971800"/>
+            <a:ext cx="2103120" cy="475488"/>
+          </a:xfrm>
+          <a:prstGeom prst="rect">
+            <a:avLst/>
+          </a:prstGeom>
+          <a:noFill/>
+          <a:ln/>
+        </p:spPr>
+        <p:txBody>
+          <a:bodyPr wrap="square" lIns="0" tIns="0" rIns="0" bIns="0" rtlCol="0" anchor="ctr"/>
+          <a:lstStyle/>
+          <a:p>
+            <a:pPr indent="0" marL="0">
+              <a:buNone/>
+            </a:pPr>
+            <a:r>
+              <a:rPr lang="en-US" sz="900" b="1" dirty="0">
+                <a:solidFill>
+                  <a:srgbClr val="BF360C"/>
+                </a:solidFill>
+                <a:latin typeface="Trebuchet MS" pitchFamily="34" charset="0"/>
+                <a:ea typeface="Trebuchet MS" pitchFamily="34" charset="-122"/>
+                <a:cs typeface="Trebuchet MS" pitchFamily="34" charset="-120"/>
+              </a:rPr>
+              <a:t>Données erronées</a:t>
+            </a:r>
+            <a:endParaRPr lang="en-US" sz="900" dirty="0"/>
+          </a:p>
+        </p:txBody>
+      </p:sp>
+      <p:sp>
+        <p:nvSpPr>
+          <p:cNvPr id="23" name="Shape 21"/>
+          <p:cNvSpPr/>
+          <p:nvPr/>
+        </p:nvSpPr>
+        <p:spPr>
+          <a:xfrm>
+            <a:off x="2743200" y="2971800"/>
+            <a:ext cx="5943600" cy="475488"/>
+          </a:xfrm>
+          <a:prstGeom prst="rect">
+            <a:avLst/>
+          </a:prstGeom>
+          <a:solidFill>
+            <a:srgbClr val="FFF3E0"/>
+          </a:solidFill>
+          <a:ln/>
+        </p:spPr>
+      </p:sp>
+      <p:sp>
+        <p:nvSpPr>
+          <p:cNvPr id="24" name="Text 22"/>
+          <p:cNvSpPr/>
+          <p:nvPr/>
+        </p:nvSpPr>
+        <p:spPr>
+          <a:xfrm>
+            <a:off x="2834640" y="2971800"/>
+            <a:ext cx="5760720" cy="475488"/>
+          </a:xfrm>
+          <a:prstGeom prst="rect">
+            <a:avLst/>
+          </a:prstGeom>
+          <a:noFill/>
+          <a:ln/>
+        </p:spPr>
+        <p:txBody>
+          <a:bodyPr wrap="square" lIns="0" tIns="0" rIns="0" bIns="0" rtlCol="0" anchor="ctr"/>
+          <a:lstStyle/>
+          <a:p>
+            <a:pPr indent="0" marL="0">
+              <a:buNone/>
+            </a:pPr>
+            <a:r>
+              <a:rPr lang="en-US" sz="900" dirty="0">
+                <a:solidFill>
+                  <a:srgbClr val="333333"/>
+                </a:solidFill>
+                <a:latin typeface="Calibri" pitchFamily="34" charset="0"/>
+                <a:ea typeface="Calibri" pitchFamily="34" charset="-122"/>
+                <a:cs typeface="Calibri" pitchFamily="34" charset="-120"/>
+              </a:rPr>
+              <a:t>Volontairement invalides — le système doit REJETER</a:t>
+            </a:r>
+            <a:endParaRPr lang="en-US" sz="900" dirty="0"/>
+          </a:p>
+        </p:txBody>
+      </p:sp>
+      <p:sp>
+        <p:nvSpPr>
+          <p:cNvPr id="25" name="Shape 23"/>
+          <p:cNvSpPr/>
+          <p:nvPr/>
+        </p:nvSpPr>
+        <p:spPr>
+          <a:xfrm>
+            <a:off x="457200" y="3474720"/>
+            <a:ext cx="2286000" cy="475488"/>
+          </a:xfrm>
+          <a:prstGeom prst="rect">
+            <a:avLst/>
+          </a:prstGeom>
+          <a:solidFill>
+            <a:srgbClr val="F0F0F0"/>
+          </a:solidFill>
+          <a:ln/>
+        </p:spPr>
+      </p:sp>
+      <p:sp>
+        <p:nvSpPr>
+          <p:cNvPr id="26" name="Text 24"/>
+          <p:cNvSpPr/>
+          <p:nvPr/>
+        </p:nvSpPr>
+        <p:spPr>
+          <a:xfrm>
+            <a:off x="548640" y="3474720"/>
+            <a:ext cx="2103120" cy="475488"/>
+          </a:xfrm>
+          <a:prstGeom prst="rect">
+            <a:avLst/>
+          </a:prstGeom>
+          <a:noFill/>
+          <a:ln/>
+        </p:spPr>
+        <p:txBody>
+          <a:bodyPr wrap="square" lIns="0" tIns="0" rIns="0" bIns="0" rtlCol="0" anchor="ctr"/>
+          <a:lstStyle/>
+          <a:p>
+            <a:pPr indent="0" marL="0">
+              <a:buNone/>
+            </a:pPr>
+            <a:r>
+              <a:rPr lang="en-US" sz="900" b="1" dirty="0">
+                <a:solidFill>
+                  <a:srgbClr val="BF360C"/>
+                </a:solidFill>
+                <a:latin typeface="Trebuchet MS" pitchFamily="34" charset="0"/>
+                <a:ea typeface="Trebuchet MS" pitchFamily="34" charset="-122"/>
+                <a:cs typeface="Trebuchet MS" pitchFamily="34" charset="-120"/>
+              </a:rPr>
+              <a:t>Matrice traçabilité</a:t>
+            </a:r>
+            <a:endParaRPr lang="en-US" sz="900" dirty="0"/>
+          </a:p>
+        </p:txBody>
+      </p:sp>
+      <p:sp>
+        <p:nvSpPr>
+          <p:cNvPr id="27" name="Shape 25"/>
+          <p:cNvSpPr/>
+          <p:nvPr/>
+        </p:nvSpPr>
+        <p:spPr>
+          <a:xfrm>
+            <a:off x="2743200" y="3474720"/>
+            <a:ext cx="5943600" cy="475488"/>
+          </a:xfrm>
+          <a:prstGeom prst="rect">
+            <a:avLst/>
+          </a:prstGeom>
+          <a:solidFill>
+            <a:srgbClr val="F0F0F0"/>
+          </a:solidFill>
+          <a:ln/>
+        </p:spPr>
+      </p:sp>
+      <p:sp>
+        <p:nvSpPr>
+          <p:cNvPr id="28" name="Text 26"/>
+          <p:cNvSpPr/>
+          <p:nvPr/>
+        </p:nvSpPr>
+        <p:spPr>
+          <a:xfrm>
+            <a:off x="2834640" y="3474720"/>
+            <a:ext cx="5760720" cy="475488"/>
+          </a:xfrm>
+          <a:prstGeom prst="rect">
+            <a:avLst/>
+          </a:prstGeom>
+          <a:noFill/>
+          <a:ln/>
+        </p:spPr>
+        <p:txBody>
+          <a:bodyPr wrap="square" lIns="0" tIns="0" rIns="0" bIns="0" rtlCol="0" anchor="ctr"/>
+          <a:lstStyle/>
+          <a:p>
+            <a:pPr indent="0" marL="0">
+              <a:buNone/>
+            </a:pPr>
+            <a:r>
+              <a:rPr lang="en-US" sz="900" dirty="0">
+                <a:solidFill>
+                  <a:srgbClr val="333333"/>
+                </a:solidFill>
+                <a:latin typeface="Calibri" pitchFamily="34" charset="0"/>
+                <a:ea typeface="Calibri" pitchFamily="34" charset="-122"/>
+                <a:cs typeface="Calibri" pitchFamily="34" charset="-120"/>
+              </a:rPr>
+              <a:t>Chaque besoin couvert par au moins 1 test</a:t>
+            </a:r>
+            <a:endParaRPr lang="en-US" sz="900" dirty="0"/>
+          </a:p>
+        </p:txBody>
+      </p:sp>
+      <p:sp>
+        <p:nvSpPr>
+          <p:cNvPr id="29" name="Shape 27"/>
+          <p:cNvSpPr/>
+          <p:nvPr/>
+        </p:nvSpPr>
+        <p:spPr>
+          <a:xfrm>
+            <a:off x="457200" y="3977640"/>
+            <a:ext cx="2286000" cy="475488"/>
+          </a:xfrm>
+          <a:prstGeom prst="rect">
+            <a:avLst/>
+          </a:prstGeom>
+          <a:solidFill>
+            <a:srgbClr val="FFF3E0"/>
+          </a:solidFill>
+          <a:ln/>
+        </p:spPr>
+      </p:sp>
+      <p:sp>
+        <p:nvSpPr>
+          <p:cNvPr id="30" name="Text 28"/>
+          <p:cNvSpPr/>
+          <p:nvPr/>
+        </p:nvSpPr>
+        <p:spPr>
+          <a:xfrm>
+            <a:off x="548640" y="3977640"/>
+            <a:ext cx="2103120" cy="475488"/>
+          </a:xfrm>
+          <a:prstGeom prst="rect">
+            <a:avLst/>
+          </a:prstGeom>
+          <a:noFill/>
+          <a:ln/>
+        </p:spPr>
+        <p:txBody>
+          <a:bodyPr wrap="square" lIns="0" tIns="0" rIns="0" bIns="0" rtlCol="0" anchor="ctr"/>
+          <a:lstStyle/>
+          <a:p>
+            <a:pPr indent="0" marL="0">
+              <a:buNone/>
+            </a:pPr>
+            <a:r>
+              <a:rPr lang="en-US" sz="900" b="1" dirty="0">
+                <a:solidFill>
+                  <a:srgbClr val="BF360C"/>
+                </a:solidFill>
+                <a:latin typeface="Trebuchet MS" pitchFamily="34" charset="0"/>
+                <a:ea typeface="Trebuchet MS" pitchFamily="34" charset="-122"/>
+                <a:cs typeface="Trebuchet MS" pitchFamily="34" charset="-120"/>
+              </a:rPr>
+              <a:t>Template</a:t>
+            </a:r>
+            <a:endParaRPr lang="en-US" sz="900" dirty="0"/>
+          </a:p>
+        </p:txBody>
+      </p:sp>
+      <p:sp>
+        <p:nvSpPr>
+          <p:cNvPr id="31" name="Shape 29"/>
+          <p:cNvSpPr/>
+          <p:nvPr/>
+        </p:nvSpPr>
+        <p:spPr>
+          <a:xfrm>
+            <a:off x="2743200" y="3977640"/>
+            <a:ext cx="5943600" cy="475488"/>
+          </a:xfrm>
+          <a:prstGeom prst="rect">
+            <a:avLst/>
+          </a:prstGeom>
+          <a:solidFill>
+            <a:srgbClr val="FFF3E0"/>
+          </a:solidFill>
+          <a:ln/>
+        </p:spPr>
+      </p:sp>
+      <p:sp>
+        <p:nvSpPr>
+          <p:cNvPr id="32" name="Text 30"/>
+          <p:cNvSpPr/>
+          <p:nvPr/>
+        </p:nvSpPr>
+        <p:spPr>
+          <a:xfrm>
+            <a:off x="2834640" y="3977640"/>
+            <a:ext cx="5760720" cy="475488"/>
+          </a:xfrm>
+          <a:prstGeom prst="rect">
+            <a:avLst/>
+          </a:prstGeom>
+          <a:noFill/>
+          <a:ln/>
+        </p:spPr>
+        <p:txBody>
+          <a:bodyPr wrap="square" lIns="0" tIns="0" rIns="0" bIns="0" rtlCol="0" anchor="ctr"/>
+          <a:lstStyle/>
+          <a:p>
+            <a:pPr indent="0" marL="0">
+              <a:buNone/>
+            </a:pPr>
+            <a:r>
+              <a:rPr lang="en-US" sz="900" dirty="0">
+                <a:solidFill>
+                  <a:srgbClr val="333333"/>
+                </a:solidFill>
+                <a:latin typeface="Calibri" pitchFamily="34" charset="0"/>
+                <a:ea typeface="Calibri" pitchFamily="34" charset="-122"/>
+                <a:cs typeface="Calibri" pitchFamily="34" charset="-120"/>
+              </a:rPr>
+              <a:t>ID, description, type, entrée, attendu, obtenu, statut</a:t>
             </a:r>
             <a:endParaRPr lang="en-US" sz="900" dirty="0"/>
           </a:p>

--- a/pptx/Module17_Plan_de_tests.pptx
+++ b/pptx/Module17_Plan_de_tests.pptx
@@ -13,9 +13,10 @@
     <p:sldId id="261" r:id="rId7"/>
     <p:sldId id="262" r:id="rId8"/>
     <p:sldId id="263" r:id="rId9"/>
+    <p:sldId id="264" r:id="rId10"/>
   </p:sldIdLst>
   <p:notesMasterIdLst>
-    <p:notesMasterId r:id="rId10"/>
+    <p:notesMasterId r:id="rId11"/>
   </p:notesMasterIdLst>
   <p:sldSz cx="9144000" cy="5143500"/>
   <p:notesSz cx="5143500" cy="9144000"/>
@@ -597,7 +598,7 @@
           <a:p>
             <a:r>
               <a:rPr lang="en-US" dirty="0"/>
-              <a:t>Sans tests, on ne peut pas prouver que le système fonctionne. C'est une exigence professionnelle.</a:t>
+              <a:t>Les tests sont une EXIGENCE professionnelle, pas une option.</a:t>
             </a:r>
             <a:endParaRPr lang="en-US" dirty="0"/>
           </a:p>
@@ -685,7 +686,7 @@
           <a:p>
             <a:r>
               <a:rPr lang="en-US" dirty="0"/>
-              <a:t>En pratique, les étudiants feront surtout du white box (ils connaissent le SQL).</a:t>
+              <a:t>En pratique, les étudiants font surtout du white box.</a:t>
             </a:r>
             <a:endParaRPr lang="en-US" dirty="0"/>
           </a:p>
@@ -773,7 +774,7 @@
           <a:p>
             <a:r>
               <a:rPr lang="en-US" dirty="0"/>
-              <a:t>Les 3 types sont OBLIGATOIRES pour un plan de test complet. M4 demande de JUSTIFIER le choix.</a:t>
+              <a:t>Les 3 types sont OBLIGATOIRES. M4 demande de JUSTIFIER le choix.</a:t>
             </a:r>
             <a:endParaRPr lang="en-US" dirty="0"/>
           </a:p>
@@ -861,7 +862,7 @@
           <a:p>
             <a:r>
               <a:rPr lang="en-US" dirty="0"/>
-              <a:t>Template Excel fourni. Les colonnes 'Résultat obtenu' et 'Statut' seront remplies au Module 18.</a:t>
+              <a:t>Template fourni. Colonnes 'Obtenu' et 'Statut' remplies au Module 18.</a:t>
             </a:r>
             <a:endParaRPr lang="en-US" dirty="0"/>
           </a:p>
@@ -949,7 +950,7 @@
           <a:p>
             <a:r>
               <a:rPr lang="en-US" dirty="0"/>
-              <a:t>Le plan de test sera exécuté au Module 18. Bien le préparer maintenant.</a:t>
+              <a:t>La matrice de traçabilité relie les tests aux besoins. C'est la preuve que tout est couvert.</a:t>
             </a:r>
             <a:endParaRPr lang="en-US" dirty="0"/>
           </a:p>
@@ -1037,7 +1038,7 @@
           <a:p>
             <a:r>
               <a:rPr lang="en-US" dirty="0"/>
-              <a:t/>
+              <a:t>Le plan sera execute au Module 18.</a:t>
             </a:r>
             <a:endParaRPr lang="en-US" dirty="0"/>
           </a:p>
@@ -1149,6 +1150,94 @@
             <a:fld id="{F7021451-1387-4CA6-816F-3879F97B5CBC}" type="slidenum">
               <a:rPr lang="en-US"/>
               <a:t>8</a:t>
+            </a:fld>
+            <a:endParaRPr lang="en-US"/>
+          </a:p>
+        </p:txBody>
+      </p:sp>
+    </p:spTree>
+    <p:extLst>
+      <p:ext uri="{BB962C8B-B14F-4D97-AF65-F5344CB8AC3E}">
+        <p14:creationId xmlns:p14="http://schemas.microsoft.com/office/powerpoint/2010/main" val="1024086991"/>
+      </p:ext>
+    </p:extLst>
+  </p:cSld>
+  <p:clrMapOvr>
+    <a:masterClrMapping/>
+  </p:clrMapOvr>
+</p:notes>
+</file>
+
+<file path=ppt/notesSlides/notesSlide9.xml><?xml version="1.0" encoding="utf-8"?>
+<p:notes xmlns:a="http://schemas.openxmlformats.org/drawingml/2006/main" xmlns:r="http://schemas.openxmlformats.org/officeDocument/2006/relationships" xmlns:p="http://schemas.openxmlformats.org/presentationml/2006/main">
+  <p:cSld>
+    <p:spTree>
+      <p:nvGrpSpPr>
+        <p:cNvPr id="1" name=""/>
+        <p:cNvGrpSpPr/>
+        <p:nvPr/>
+      </p:nvGrpSpPr>
+      <p:grpSpPr>
+        <a:xfrm>
+          <a:off x="0" y="0"/>
+          <a:ext cx="0" cy="0"/>
+          <a:chOff x="0" y="0"/>
+          <a:chExt cx="0" cy="0"/>
+        </a:xfrm>
+      </p:grpSpPr>
+      <p:sp>
+        <p:nvSpPr>
+          <p:cNvPr id="2" name="Slide Image Placeholder 1"/>
+          <p:cNvSpPr>
+            <a:spLocks noGrp="1" noRot="1" noChangeAspect="1"/>
+          </p:cNvSpPr>
+          <p:nvPr>
+            <p:ph type="sldImg"/>
+          </p:nvPr>
+        </p:nvSpPr>
+        <p:spPr/>
+      </p:sp>
+      <p:sp>
+        <p:nvSpPr>
+          <p:cNvPr id="3" name="Notes Placeholder 2"/>
+          <p:cNvSpPr>
+            <a:spLocks noGrp="1"/>
+          </p:cNvSpPr>
+          <p:nvPr>
+            <p:ph type="body" idx="1"/>
+          </p:nvPr>
+        </p:nvSpPr>
+        <p:spPr/>
+        <p:txBody>
+          <a:bodyPr/>
+          <a:lstStyle/>
+          <a:p>
+            <a:r>
+              <a:rPr lang="en-US" dirty="0"/>
+              <a:t/>
+            </a:r>
+            <a:endParaRPr lang="en-US" dirty="0"/>
+          </a:p>
+        </p:txBody>
+      </p:sp>
+      <p:sp>
+        <p:nvSpPr>
+          <p:cNvPr id="4" name="Slide Number Placeholder 3"/>
+          <p:cNvSpPr>
+            <a:spLocks noGrp="1"/>
+          </p:cNvSpPr>
+          <p:nvPr>
+            <p:ph type="sldNum" sz="quarter" idx="10"/>
+          </p:nvPr>
+        </p:nvSpPr>
+        <p:spPr/>
+        <p:txBody>
+          <a:bodyPr/>
+          <a:lstStyle/>
+          <a:p>
+            <a:fld id="{F7021451-1387-4CA6-816F-3879F97B5CBC}" type="slidenum">
+              <a:rPr lang="en-US"/>
+              <a:t>9</a:t>
             </a:fld>
             <a:endParaRPr lang="en-US"/>
           </a:p>
@@ -1606,7 +1695,7 @@
               <a:buNone/>
             </a:pPr>
             <a:r>
-              <a:rPr lang="en-US" sz="3200" b="1" dirty="0">
+              <a:rPr lang="en-US" sz="3000" b="1" dirty="0">
                 <a:solidFill>
                   <a:srgbClr val="FFFFFF"/>
                 </a:solidFill>
@@ -1616,7 +1705,7 @@
               </a:rPr>
               <a:t>Plan de tests</a:t>
             </a:r>
-            <a:endParaRPr lang="en-US" sz="3200" dirty="0"/>
+            <a:endParaRPr lang="en-US" sz="3000" dirty="0"/>
           </a:p>
         </p:txBody>
       </p:sp>
@@ -1645,7 +1734,7 @@
               <a:buNone/>
             </a:pPr>
             <a:r>
-              <a:rPr lang="en-US" sz="1500" dirty="0">
+              <a:rPr lang="en-US" sz="1400" dirty="0">
                 <a:solidFill>
                   <a:srgbClr val="CCCCCC"/>
                 </a:solidFill>
@@ -1653,9 +1742,9 @@
                 <a:ea typeface="Calibri" pitchFamily="34" charset="-122"/>
                 <a:cs typeface="Calibri" pitchFamily="34" charset="-120"/>
               </a:rPr>
-              <a:t>White/black box · Données de test · Traçabilité</a:t>
-            </a:r>
-            <a:endParaRPr lang="en-US" sz="1500" dirty="0"/>
+              <a:t>White/black box, donnees normales/limites/erronees, tracabilite</a:t>
+            </a:r>
+            <a:endParaRPr lang="en-US" sz="1400" dirty="0"/>
           </a:p>
         </p:txBody>
       </p:sp>
@@ -1759,7 +1848,7 @@
         <p:spPr>
           <a:xfrm>
             <a:off x="457200" y="182880"/>
-            <a:ext cx="8229600" cy="594360"/>
+            <a:ext cx="8229600" cy="548640"/>
           </a:xfrm>
           <a:prstGeom prst="rect">
             <a:avLst/>
@@ -1775,7 +1864,7 @@
               <a:buNone/>
             </a:pPr>
             <a:r>
-              <a:rPr lang="en-US" sz="2400" b="1" dirty="0">
+              <a:rPr lang="en-US" sz="2200" b="1" dirty="0">
                 <a:solidFill>
                   <a:srgbClr val="BF360C"/>
                 </a:solidFill>
@@ -1785,7 +1874,7 @@
               </a:rPr>
               <a:t>Pourquoi tester une BDD ?</a:t>
             </a:r>
-            <a:endParaRPr lang="en-US" sz="2400" dirty="0"/>
+            <a:endParaRPr lang="en-US" sz="2200" dirty="0"/>
           </a:p>
         </p:txBody>
       </p:sp>
@@ -1797,8 +1886,8 @@
         </p:nvSpPr>
         <p:spPr>
           <a:xfrm>
-            <a:off x="457200" y="914400"/>
-            <a:ext cx="8229600" cy="521208"/>
+            <a:off x="457200" y="868680"/>
+            <a:ext cx="8229600" cy="475488"/>
           </a:xfrm>
           <a:prstGeom prst="rect">
             <a:avLst/>
@@ -1807,13 +1896,6 @@
             <a:srgbClr val="FFFFFF"/>
           </a:solidFill>
           <a:ln/>
-          <a:effectLst>
-            <a:outerShdw sx="100000" sy="100000" kx="0" ky="0" algn="bl" rotWithShape="0" blurRad="50800" dist="25400" dir="8100000">
-              <a:srgbClr val="000000">
-                <a:alpha val="12000"/>
-              </a:srgbClr>
-            </a:outerShdw>
-          </a:effectLst>
         </p:spPr>
       </p:sp>
       <p:sp>
@@ -1824,8 +1906,8 @@
         </p:nvSpPr>
         <p:spPr>
           <a:xfrm>
-            <a:off x="457200" y="914400"/>
-            <a:ext cx="45720" cy="521208"/>
+            <a:off x="457200" y="868680"/>
+            <a:ext cx="45720" cy="475488"/>
           </a:xfrm>
           <a:prstGeom prst="rect">
             <a:avLst/>
@@ -1844,8 +1926,8 @@
         </p:nvSpPr>
         <p:spPr>
           <a:xfrm>
-            <a:off x="685800" y="914400"/>
-            <a:ext cx="7818120" cy="521208"/>
+            <a:off x="640080" y="868680"/>
+            <a:ext cx="7863840" cy="475488"/>
           </a:xfrm>
           <a:prstGeom prst="rect">
             <a:avLst/>
@@ -1861,7 +1943,7 @@
               <a:buNone/>
             </a:pPr>
             <a:r>
-              <a:rPr lang="en-US" sz="1200" dirty="0">
+              <a:rPr lang="en-US" sz="1100" dirty="0">
                 <a:solidFill>
                   <a:srgbClr val="1A1A2E"/>
                 </a:solidFill>
@@ -1869,9 +1951,9 @@
                 <a:ea typeface="Calibri" pitchFamily="34" charset="-122"/>
                 <a:cs typeface="Calibri" pitchFamily="34" charset="-120"/>
               </a:rPr>
-              <a:t>Vérifier que les contraintes FONCTIONNENT (NOT NULL, FK, CHECK...)</a:t>
-            </a:r>
-            <a:endParaRPr lang="en-US" sz="1200" dirty="0"/>
+              <a:t>Verifier que les contraintes FONCTIONNENT</a:t>
+            </a:r>
+            <a:endParaRPr lang="en-US" sz="1100" dirty="0"/>
           </a:p>
         </p:txBody>
       </p:sp>
@@ -1883,8 +1965,8 @@
         </p:nvSpPr>
         <p:spPr>
           <a:xfrm>
-            <a:off x="457200" y="1463040"/>
-            <a:ext cx="8229600" cy="521208"/>
+            <a:off x="457200" y="1371600"/>
+            <a:ext cx="8229600" cy="475488"/>
           </a:xfrm>
           <a:prstGeom prst="rect">
             <a:avLst/>
@@ -1893,13 +1975,6 @@
             <a:srgbClr val="FFF3E0"/>
           </a:solidFill>
           <a:ln/>
-          <a:effectLst>
-            <a:outerShdw sx="100000" sy="100000" kx="0" ky="0" algn="bl" rotWithShape="0" blurRad="50800" dist="25400" dir="8100000">
-              <a:srgbClr val="000000">
-                <a:alpha val="12000"/>
-              </a:srgbClr>
-            </a:outerShdw>
-          </a:effectLst>
         </p:spPr>
       </p:sp>
       <p:sp>
@@ -1910,8 +1985,8 @@
         </p:nvSpPr>
         <p:spPr>
           <a:xfrm>
-            <a:off x="457200" y="1463040"/>
-            <a:ext cx="45720" cy="521208"/>
+            <a:off x="457200" y="1371600"/>
+            <a:ext cx="45720" cy="475488"/>
           </a:xfrm>
           <a:prstGeom prst="rect">
             <a:avLst/>
@@ -1930,8 +2005,8 @@
         </p:nvSpPr>
         <p:spPr>
           <a:xfrm>
-            <a:off x="685800" y="1463040"/>
-            <a:ext cx="7818120" cy="521208"/>
+            <a:off x="640080" y="1371600"/>
+            <a:ext cx="7863840" cy="475488"/>
           </a:xfrm>
           <a:prstGeom prst="rect">
             <a:avLst/>
@@ -1947,7 +2022,7 @@
               <a:buNone/>
             </a:pPr>
             <a:r>
-              <a:rPr lang="en-US" sz="1200" dirty="0">
+              <a:rPr lang="en-US" sz="1100" dirty="0">
                 <a:solidFill>
                   <a:srgbClr val="1A1A2E"/>
                 </a:solidFill>
@@ -1955,9 +2030,9 @@
                 <a:ea typeface="Calibri" pitchFamily="34" charset="-122"/>
                 <a:cs typeface="Calibri" pitchFamily="34" charset="-120"/>
               </a:rPr>
-              <a:t>Vérifier que les requêtes retournent les BONS résultats</a:t>
-            </a:r>
-            <a:endParaRPr lang="en-US" sz="1200" dirty="0"/>
+              <a:t>Verifier que les requetes retournent les BONS resultats</a:t>
+            </a:r>
+            <a:endParaRPr lang="en-US" sz="1100" dirty="0"/>
           </a:p>
         </p:txBody>
       </p:sp>
@@ -1969,8 +2044,8 @@
         </p:nvSpPr>
         <p:spPr>
           <a:xfrm>
-            <a:off x="457200" y="2011680"/>
-            <a:ext cx="8229600" cy="521208"/>
+            <a:off x="457200" y="1874520"/>
+            <a:ext cx="8229600" cy="475488"/>
           </a:xfrm>
           <a:prstGeom prst="rect">
             <a:avLst/>
@@ -1979,13 +2054,6 @@
             <a:srgbClr val="FFFFFF"/>
           </a:solidFill>
           <a:ln/>
-          <a:effectLst>
-            <a:outerShdw sx="100000" sy="100000" kx="0" ky="0" algn="bl" rotWithShape="0" blurRad="50800" dist="25400" dir="8100000">
-              <a:srgbClr val="000000">
-                <a:alpha val="12000"/>
-              </a:srgbClr>
-            </a:outerShdw>
-          </a:effectLst>
         </p:spPr>
       </p:sp>
       <p:sp>
@@ -1996,8 +2064,8 @@
         </p:nvSpPr>
         <p:spPr>
           <a:xfrm>
-            <a:off x="457200" y="2011680"/>
-            <a:ext cx="45720" cy="521208"/>
+            <a:off x="457200" y="1874520"/>
+            <a:ext cx="45720" cy="475488"/>
           </a:xfrm>
           <a:prstGeom prst="rect">
             <a:avLst/>
@@ -2016,8 +2084,8 @@
         </p:nvSpPr>
         <p:spPr>
           <a:xfrm>
-            <a:off x="685800" y="2011680"/>
-            <a:ext cx="7818120" cy="521208"/>
+            <a:off x="640080" y="1874520"/>
+            <a:ext cx="7863840" cy="475488"/>
           </a:xfrm>
           <a:prstGeom prst="rect">
             <a:avLst/>
@@ -2033,7 +2101,7 @@
               <a:buNone/>
             </a:pPr>
             <a:r>
-              <a:rPr lang="en-US" sz="1200" dirty="0">
+              <a:rPr lang="en-US" sz="1100" dirty="0">
                 <a:solidFill>
                   <a:srgbClr val="1A1A2E"/>
                 </a:solidFill>
@@ -2041,9 +2109,9 @@
                 <a:ea typeface="Calibri" pitchFamily="34" charset="-122"/>
                 <a:cs typeface="Calibri" pitchFamily="34" charset="-120"/>
               </a:rPr>
-              <a:t>Vérifier que la sécurité BLOQUE les accès non autorisés</a:t>
-            </a:r>
-            <a:endParaRPr lang="en-US" sz="1200" dirty="0"/>
+              <a:t>Verifier que la securite BLOQUE les acces non autorises</a:t>
+            </a:r>
+            <a:endParaRPr lang="en-US" sz="1100" dirty="0"/>
           </a:p>
         </p:txBody>
       </p:sp>
@@ -2055,8 +2123,8 @@
         </p:nvSpPr>
         <p:spPr>
           <a:xfrm>
-            <a:off x="457200" y="2560320"/>
-            <a:ext cx="8229600" cy="521208"/>
+            <a:off x="457200" y="2377440"/>
+            <a:ext cx="8229600" cy="475488"/>
           </a:xfrm>
           <a:prstGeom prst="rect">
             <a:avLst/>
@@ -2065,13 +2133,6 @@
             <a:srgbClr val="FFF3E0"/>
           </a:solidFill>
           <a:ln/>
-          <a:effectLst>
-            <a:outerShdw sx="100000" sy="100000" kx="0" ky="0" algn="bl" rotWithShape="0" blurRad="50800" dist="25400" dir="8100000">
-              <a:srgbClr val="000000">
-                <a:alpha val="12000"/>
-              </a:srgbClr>
-            </a:outerShdw>
-          </a:effectLst>
         </p:spPr>
       </p:sp>
       <p:sp>
@@ -2082,8 +2143,8 @@
         </p:nvSpPr>
         <p:spPr>
           <a:xfrm>
-            <a:off x="457200" y="2560320"/>
-            <a:ext cx="45720" cy="521208"/>
+            <a:off x="457200" y="2377440"/>
+            <a:ext cx="45720" cy="475488"/>
           </a:xfrm>
           <a:prstGeom prst="rect">
             <a:avLst/>
@@ -2102,8 +2163,8 @@
         </p:nvSpPr>
         <p:spPr>
           <a:xfrm>
-            <a:off x="685800" y="2560320"/>
-            <a:ext cx="7818120" cy="521208"/>
+            <a:off x="640080" y="2377440"/>
+            <a:ext cx="7863840" cy="475488"/>
           </a:xfrm>
           <a:prstGeom prst="rect">
             <a:avLst/>
@@ -2119,7 +2180,7 @@
               <a:buNone/>
             </a:pPr>
             <a:r>
-              <a:rPr lang="en-US" sz="1200" dirty="0">
+              <a:rPr lang="en-US" sz="1100" dirty="0">
                 <a:solidFill>
                   <a:srgbClr val="1A1A2E"/>
                 </a:solidFill>
@@ -2127,9 +2188,9 @@
                 <a:ea typeface="Calibri" pitchFamily="34" charset="-122"/>
                 <a:cs typeface="Calibri" pitchFamily="34" charset="-120"/>
               </a:rPr>
-              <a:t>Vérifier la robustesse face aux données invalides</a:t>
-            </a:r>
-            <a:endParaRPr lang="en-US" sz="1200" dirty="0"/>
+              <a:t>Prouver la robustesse face aux donnees invalides</a:t>
+            </a:r>
+            <a:endParaRPr lang="en-US" sz="1100" dirty="0"/>
           </a:p>
         </p:txBody>
       </p:sp>
@@ -2141,8 +2202,8 @@
         </p:nvSpPr>
         <p:spPr>
           <a:xfrm>
-            <a:off x="457200" y="3108960"/>
-            <a:ext cx="8229600" cy="521208"/>
+            <a:off x="457200" y="2880360"/>
+            <a:ext cx="8229600" cy="475488"/>
           </a:xfrm>
           <a:prstGeom prst="rect">
             <a:avLst/>
@@ -2151,13 +2212,6 @@
             <a:srgbClr val="FFFFFF"/>
           </a:solidFill>
           <a:ln/>
-          <a:effectLst>
-            <a:outerShdw sx="100000" sy="100000" kx="0" ky="0" algn="bl" rotWithShape="0" blurRad="50800" dist="25400" dir="8100000">
-              <a:srgbClr val="000000">
-                <a:alpha val="12000"/>
-              </a:srgbClr>
-            </a:outerShdw>
-          </a:effectLst>
         </p:spPr>
       </p:sp>
       <p:sp>
@@ -2168,8 +2222,8 @@
         </p:nvSpPr>
         <p:spPr>
           <a:xfrm>
-            <a:off x="457200" y="3108960"/>
-            <a:ext cx="45720" cy="521208"/>
+            <a:off x="457200" y="2880360"/>
+            <a:ext cx="45720" cy="475488"/>
           </a:xfrm>
           <a:prstGeom prst="rect">
             <a:avLst/>
@@ -2188,8 +2242,8 @@
         </p:nvSpPr>
         <p:spPr>
           <a:xfrm>
-            <a:off x="685800" y="3108960"/>
-            <a:ext cx="7818120" cy="521208"/>
+            <a:off x="640080" y="2880360"/>
+            <a:ext cx="7863840" cy="475488"/>
           </a:xfrm>
           <a:prstGeom prst="rect">
             <a:avLst/>
@@ -2205,7 +2259,7 @@
               <a:buNone/>
             </a:pPr>
             <a:r>
-              <a:rPr lang="en-US" sz="1200" dirty="0">
+              <a:rPr lang="en-US" sz="1100" dirty="0">
                 <a:solidFill>
                   <a:srgbClr val="1A1A2E"/>
                 </a:solidFill>
@@ -2213,9 +2267,9 @@
                 <a:ea typeface="Calibri" pitchFamily="34" charset="-122"/>
                 <a:cs typeface="Calibri" pitchFamily="34" charset="-120"/>
               </a:rPr>
-              <a:t>Documenter les résultats pour le rapport BTEC (P4)</a:t>
-            </a:r>
-            <a:endParaRPr lang="en-US" sz="1200" dirty="0"/>
+              <a:t>Documenter les resultats pour le rapport BTEC (P4)</a:t>
+            </a:r>
+            <a:endParaRPr lang="en-US" sz="1100" dirty="0"/>
           </a:p>
         </p:txBody>
       </p:sp>
@@ -2227,8 +2281,8 @@
         </p:nvSpPr>
         <p:spPr>
           <a:xfrm>
-            <a:off x="457200" y="3657600"/>
-            <a:ext cx="8229600" cy="521208"/>
+            <a:off x="457200" y="3383280"/>
+            <a:ext cx="8229600" cy="475488"/>
           </a:xfrm>
           <a:prstGeom prst="rect">
             <a:avLst/>
@@ -2237,13 +2291,6 @@
             <a:srgbClr val="FFF3E0"/>
           </a:solidFill>
           <a:ln/>
-          <a:effectLst>
-            <a:outerShdw sx="100000" sy="100000" kx="0" ky="0" algn="bl" rotWithShape="0" blurRad="50800" dist="25400" dir="8100000">
-              <a:srgbClr val="000000">
-                <a:alpha val="12000"/>
-              </a:srgbClr>
-            </a:outerShdw>
-          </a:effectLst>
         </p:spPr>
       </p:sp>
       <p:sp>
@@ -2254,8 +2301,8 @@
         </p:nvSpPr>
         <p:spPr>
           <a:xfrm>
-            <a:off x="457200" y="3657600"/>
-            <a:ext cx="45720" cy="521208"/>
+            <a:off x="457200" y="3383280"/>
+            <a:ext cx="45720" cy="475488"/>
           </a:xfrm>
           <a:prstGeom prst="rect">
             <a:avLst/>
@@ -2274,8 +2321,8 @@
         </p:nvSpPr>
         <p:spPr>
           <a:xfrm>
-            <a:off x="685800" y="3657600"/>
-            <a:ext cx="7818120" cy="521208"/>
+            <a:off x="640080" y="3383280"/>
+            <a:ext cx="7863840" cy="475488"/>
           </a:xfrm>
           <a:prstGeom prst="rect">
             <a:avLst/>
@@ -2291,7 +2338,7 @@
               <a:buNone/>
             </a:pPr>
             <a:r>
-              <a:rPr lang="en-US" sz="1200" dirty="0">
+              <a:rPr lang="en-US" sz="1100" dirty="0">
                 <a:solidFill>
                   <a:srgbClr val="1A1A2E"/>
                 </a:solidFill>
@@ -2299,9 +2346,9 @@
                 <a:ea typeface="Calibri" pitchFamily="34" charset="-122"/>
                 <a:cs typeface="Calibri" pitchFamily="34" charset="-120"/>
               </a:rPr>
-              <a:t>Les tests prouvent que le système MARCHE comme prévu</a:t>
-            </a:r>
-            <a:endParaRPr lang="en-US" sz="1200" dirty="0"/>
+              <a:t>Sans tests, on ne peut PAS prouver que le systeme marche</a:t>
+            </a:r>
+            <a:endParaRPr lang="en-US" sz="1100" dirty="0"/>
           </a:p>
         </p:txBody>
       </p:sp>
@@ -2366,7 +2413,7 @@
         <p:spPr>
           <a:xfrm>
             <a:off x="457200" y="182880"/>
-            <a:ext cx="8229600" cy="594360"/>
+            <a:ext cx="8229600" cy="548640"/>
           </a:xfrm>
           <a:prstGeom prst="rect">
             <a:avLst/>
@@ -2382,7 +2429,7 @@
               <a:buNone/>
             </a:pPr>
             <a:r>
-              <a:rPr lang="en-US" sz="2400" b="1" dirty="0">
+              <a:rPr lang="en-US" sz="2200" b="1" dirty="0">
                 <a:solidFill>
                   <a:srgbClr val="BF360C"/>
                 </a:solidFill>
@@ -2392,7 +2439,7 @@
               </a:rPr>
               <a:t>White box vs Black box</a:t>
             </a:r>
-            <a:endParaRPr lang="en-US" sz="2400" dirty="0"/>
+            <a:endParaRPr lang="en-US" sz="2200" dirty="0"/>
           </a:p>
         </p:txBody>
       </p:sp>
@@ -2404,7 +2451,7 @@
         </p:nvSpPr>
         <p:spPr>
           <a:xfrm>
-            <a:off x="457200" y="914400"/>
+            <a:off x="457200" y="868680"/>
             <a:ext cx="8229600" cy="464058"/>
           </a:xfrm>
           <a:prstGeom prst="rect">
@@ -2414,13 +2461,6 @@
             <a:srgbClr val="FFFFFF"/>
           </a:solidFill>
           <a:ln/>
-          <a:effectLst>
-            <a:outerShdw sx="100000" sy="100000" kx="0" ky="0" algn="bl" rotWithShape="0" blurRad="50800" dist="25400" dir="8100000">
-              <a:srgbClr val="000000">
-                <a:alpha val="12000"/>
-              </a:srgbClr>
-            </a:outerShdw>
-          </a:effectLst>
         </p:spPr>
       </p:sp>
       <p:sp>
@@ -2431,7 +2471,7 @@
         </p:nvSpPr>
         <p:spPr>
           <a:xfrm>
-            <a:off x="457200" y="914400"/>
+            <a:off x="457200" y="868680"/>
             <a:ext cx="45720" cy="464058"/>
           </a:xfrm>
           <a:prstGeom prst="rect">
@@ -2451,8 +2491,8 @@
         </p:nvSpPr>
         <p:spPr>
           <a:xfrm>
-            <a:off x="685800" y="914400"/>
-            <a:ext cx="7818120" cy="464058"/>
+            <a:off x="640080" y="868680"/>
+            <a:ext cx="7863840" cy="464058"/>
           </a:xfrm>
           <a:prstGeom prst="rect">
             <a:avLst/>
@@ -2468,7 +2508,7 @@
               <a:buNone/>
             </a:pPr>
             <a:r>
-              <a:rPr lang="en-US" sz="1200" dirty="0">
+              <a:rPr lang="en-US" sz="1100" dirty="0">
                 <a:solidFill>
                   <a:srgbClr val="1A1A2E"/>
                 </a:solidFill>
@@ -2476,9 +2516,9 @@
                 <a:ea typeface="Calibri" pitchFamily="34" charset="-122"/>
                 <a:cs typeface="Calibri" pitchFamily="34" charset="-120"/>
               </a:rPr>
-              <a:t>WHITE BOX : le testeur CONNAÎT le code/la structure</a:t>
-            </a:r>
-            <a:endParaRPr lang="en-US" sz="1200" dirty="0"/>
+              <a:t>WHITE BOX : le testeur CONNAIT le code/la structure</a:t>
+            </a:r>
+            <a:endParaRPr lang="en-US" sz="1100" dirty="0"/>
           </a:p>
         </p:txBody>
       </p:sp>
@@ -2490,7 +2530,7 @@
         </p:nvSpPr>
         <p:spPr>
           <a:xfrm>
-            <a:off x="457200" y="1405890"/>
+            <a:off x="457200" y="1360170"/>
             <a:ext cx="8229600" cy="464058"/>
           </a:xfrm>
           <a:prstGeom prst="rect">
@@ -2500,13 +2540,6 @@
             <a:srgbClr val="FFF3E0"/>
           </a:solidFill>
           <a:ln/>
-          <a:effectLst>
-            <a:outerShdw sx="100000" sy="100000" kx="0" ky="0" algn="bl" rotWithShape="0" blurRad="50800" dist="25400" dir="8100000">
-              <a:srgbClr val="000000">
-                <a:alpha val="12000"/>
-              </a:srgbClr>
-            </a:outerShdw>
-          </a:effectLst>
         </p:spPr>
       </p:sp>
       <p:sp>
@@ -2517,7 +2550,7 @@
         </p:nvSpPr>
         <p:spPr>
           <a:xfrm>
-            <a:off x="457200" y="1405890"/>
+            <a:off x="457200" y="1360170"/>
             <a:ext cx="45720" cy="464058"/>
           </a:xfrm>
           <a:prstGeom prst="rect">
@@ -2537,8 +2570,8 @@
         </p:nvSpPr>
         <p:spPr>
           <a:xfrm>
-            <a:off x="685800" y="1405890"/>
-            <a:ext cx="7818120" cy="464058"/>
+            <a:off x="640080" y="1360170"/>
+            <a:ext cx="7863840" cy="464058"/>
           </a:xfrm>
           <a:prstGeom prst="rect">
             <a:avLst/>
@@ -2554,7 +2587,7 @@
               <a:buNone/>
             </a:pPr>
             <a:r>
-              <a:rPr lang="en-US" sz="1200" dirty="0">
+              <a:rPr lang="en-US" sz="1100" dirty="0">
                 <a:solidFill>
                   <a:srgbClr val="1A1A2E"/>
                 </a:solidFill>
@@ -2564,7 +2597,7 @@
               </a:rPr>
               <a:t>→ Tester chaque contrainte SQL individuellement</a:t>
             </a:r>
-            <a:endParaRPr lang="en-US" sz="1200" dirty="0"/>
+            <a:endParaRPr lang="en-US" sz="1100" dirty="0"/>
           </a:p>
         </p:txBody>
       </p:sp>
@@ -2576,7 +2609,7 @@
         </p:nvSpPr>
         <p:spPr>
           <a:xfrm>
-            <a:off x="457200" y="1897380"/>
+            <a:off x="457200" y="1851660"/>
             <a:ext cx="8229600" cy="464058"/>
           </a:xfrm>
           <a:prstGeom prst="rect">
@@ -2586,13 +2619,6 @@
             <a:srgbClr val="FFFFFF"/>
           </a:solidFill>
           <a:ln/>
-          <a:effectLst>
-            <a:outerShdw sx="100000" sy="100000" kx="0" ky="0" algn="bl" rotWithShape="0" blurRad="50800" dist="25400" dir="8100000">
-              <a:srgbClr val="000000">
-                <a:alpha val="12000"/>
-              </a:srgbClr>
-            </a:outerShdw>
-          </a:effectLst>
         </p:spPr>
       </p:sp>
       <p:sp>
@@ -2603,7 +2629,7 @@
         </p:nvSpPr>
         <p:spPr>
           <a:xfrm>
-            <a:off x="457200" y="1897380"/>
+            <a:off x="457200" y="1851660"/>
             <a:ext cx="45720" cy="464058"/>
           </a:xfrm>
           <a:prstGeom prst="rect">
@@ -2623,8 +2649,8 @@
         </p:nvSpPr>
         <p:spPr>
           <a:xfrm>
-            <a:off x="685800" y="1897380"/>
-            <a:ext cx="7818120" cy="464058"/>
+            <a:off x="640080" y="1851660"/>
+            <a:ext cx="7863840" cy="464058"/>
           </a:xfrm>
           <a:prstGeom prst="rect">
             <a:avLst/>
@@ -2640,7 +2666,7 @@
               <a:buNone/>
             </a:pPr>
             <a:r>
-              <a:rPr lang="en-US" sz="1200" dirty="0">
+              <a:rPr lang="en-US" sz="1100" dirty="0">
                 <a:solidFill>
                   <a:srgbClr val="1A1A2E"/>
                 </a:solidFill>
@@ -2648,9 +2674,9 @@
                 <a:ea typeface="Calibri" pitchFamily="34" charset="-122"/>
                 <a:cs typeface="Calibri" pitchFamily="34" charset="-120"/>
               </a:rPr>
-              <a:t>→ Vérifier chaque requête SELECT retourne le bon résultat</a:t>
-            </a:r>
-            <a:endParaRPr lang="en-US" sz="1200" dirty="0"/>
+              <a:t>→ Verifier chaque requete SELECT</a:t>
+            </a:r>
+            <a:endParaRPr lang="en-US" sz="1100" dirty="0"/>
           </a:p>
         </p:txBody>
       </p:sp>
@@ -2662,7 +2688,7 @@
         </p:nvSpPr>
         <p:spPr>
           <a:xfrm>
-            <a:off x="457200" y="2388870"/>
+            <a:off x="457200" y="2343150"/>
             <a:ext cx="8229600" cy="464058"/>
           </a:xfrm>
           <a:prstGeom prst="rect">
@@ -2672,13 +2698,6 @@
             <a:srgbClr val="FFF3E0"/>
           </a:solidFill>
           <a:ln/>
-          <a:effectLst>
-            <a:outerShdw sx="100000" sy="100000" kx="0" ky="0" algn="bl" rotWithShape="0" blurRad="50800" dist="25400" dir="8100000">
-              <a:srgbClr val="000000">
-                <a:alpha val="12000"/>
-              </a:srgbClr>
-            </a:outerShdw>
-          </a:effectLst>
         </p:spPr>
       </p:sp>
       <p:sp>
@@ -2689,7 +2708,7 @@
         </p:nvSpPr>
         <p:spPr>
           <a:xfrm>
-            <a:off x="457200" y="2388870"/>
+            <a:off x="457200" y="2343150"/>
             <a:ext cx="45720" cy="464058"/>
           </a:xfrm>
           <a:prstGeom prst="rect">
@@ -2709,8 +2728,8 @@
         </p:nvSpPr>
         <p:spPr>
           <a:xfrm>
-            <a:off x="685800" y="2388870"/>
-            <a:ext cx="7818120" cy="464058"/>
+            <a:off x="640080" y="2343150"/>
+            <a:ext cx="7863840" cy="464058"/>
           </a:xfrm>
           <a:prstGeom prst="rect">
             <a:avLst/>
@@ -2726,7 +2745,7 @@
               <a:buNone/>
             </a:pPr>
             <a:r>
-              <a:rPr lang="en-US" sz="1200" dirty="0">
+              <a:rPr lang="en-US" sz="1100" dirty="0">
                 <a:solidFill>
                   <a:srgbClr val="1A1A2E"/>
                 </a:solidFill>
@@ -2734,9 +2753,9 @@
                 <a:ea typeface="Calibri" pitchFamily="34" charset="-122"/>
                 <a:cs typeface="Calibri" pitchFamily="34" charset="-120"/>
               </a:rPr>
-              <a:t>→ Tester chaque procédure stockée avec différents paramètres</a:t>
-            </a:r>
-            <a:endParaRPr lang="en-US" sz="1200" dirty="0"/>
+              <a:t>→ Tester chaque procedure stockee</a:t>
+            </a:r>
+            <a:endParaRPr lang="en-US" sz="1100" dirty="0"/>
           </a:p>
         </p:txBody>
       </p:sp>
@@ -2748,7 +2767,7 @@
         </p:nvSpPr>
         <p:spPr>
           <a:xfrm>
-            <a:off x="457200" y="2880360"/>
+            <a:off x="457200" y="2834640"/>
             <a:ext cx="8229600" cy="464058"/>
           </a:xfrm>
           <a:prstGeom prst="rect">
@@ -2758,13 +2777,6 @@
             <a:srgbClr val="FFFFFF"/>
           </a:solidFill>
           <a:ln/>
-          <a:effectLst>
-            <a:outerShdw sx="100000" sy="100000" kx="0" ky="0" algn="bl" rotWithShape="0" blurRad="50800" dist="25400" dir="8100000">
-              <a:srgbClr val="000000">
-                <a:alpha val="12000"/>
-              </a:srgbClr>
-            </a:outerShdw>
-          </a:effectLst>
         </p:spPr>
       </p:sp>
       <p:sp>
@@ -2775,7 +2787,7 @@
         </p:nvSpPr>
         <p:spPr>
           <a:xfrm>
-            <a:off x="457200" y="2880360"/>
+            <a:off x="457200" y="2834640"/>
             <a:ext cx="45720" cy="464058"/>
           </a:xfrm>
           <a:prstGeom prst="rect">
@@ -2795,8 +2807,8 @@
         </p:nvSpPr>
         <p:spPr>
           <a:xfrm>
-            <a:off x="685800" y="2880360"/>
-            <a:ext cx="7818120" cy="464058"/>
+            <a:off x="640080" y="2834640"/>
+            <a:ext cx="7863840" cy="464058"/>
           </a:xfrm>
           <a:prstGeom prst="rect">
             <a:avLst/>
@@ -2812,7 +2824,7 @@
               <a:buNone/>
             </a:pPr>
             <a:r>
-              <a:rPr lang="en-US" sz="1200" dirty="0">
+              <a:rPr lang="en-US" sz="1100" dirty="0">
                 <a:solidFill>
                   <a:srgbClr val="1A1A2E"/>
                 </a:solidFill>
@@ -2820,9 +2832,9 @@
                 <a:ea typeface="Calibri" pitchFamily="34" charset="-122"/>
                 <a:cs typeface="Calibri" pitchFamily="34" charset="-120"/>
               </a:rPr>
-              <a:t>BLACK BOX : le testeur ne voit que les entrées/sorties</a:t>
-            </a:r>
-            <a:endParaRPr lang="en-US" sz="1200" dirty="0"/>
+              <a:t>BLACK BOX : le testeur ne voit que entrees/sorties</a:t>
+            </a:r>
+            <a:endParaRPr lang="en-US" sz="1100" dirty="0"/>
           </a:p>
         </p:txBody>
       </p:sp>
@@ -2834,7 +2846,7 @@
         </p:nvSpPr>
         <p:spPr>
           <a:xfrm>
-            <a:off x="457200" y="3371850"/>
+            <a:off x="457200" y="3326130"/>
             <a:ext cx="8229600" cy="464058"/>
           </a:xfrm>
           <a:prstGeom prst="rect">
@@ -2844,13 +2856,6 @@
             <a:srgbClr val="FFF3E0"/>
           </a:solidFill>
           <a:ln/>
-          <a:effectLst>
-            <a:outerShdw sx="100000" sy="100000" kx="0" ky="0" algn="bl" rotWithShape="0" blurRad="50800" dist="25400" dir="8100000">
-              <a:srgbClr val="000000">
-                <a:alpha val="12000"/>
-              </a:srgbClr>
-            </a:outerShdw>
-          </a:effectLst>
         </p:spPr>
       </p:sp>
       <p:sp>
@@ -2861,7 +2866,7 @@
         </p:nvSpPr>
         <p:spPr>
           <a:xfrm>
-            <a:off x="457200" y="3371850"/>
+            <a:off x="457200" y="3326130"/>
             <a:ext cx="45720" cy="464058"/>
           </a:xfrm>
           <a:prstGeom prst="rect">
@@ -2881,8 +2886,8 @@
         </p:nvSpPr>
         <p:spPr>
           <a:xfrm>
-            <a:off x="685800" y="3371850"/>
-            <a:ext cx="7818120" cy="464058"/>
+            <a:off x="640080" y="3326130"/>
+            <a:ext cx="7863840" cy="464058"/>
           </a:xfrm>
           <a:prstGeom prst="rect">
             <a:avLst/>
@@ -2898,7 +2903,7 @@
               <a:buNone/>
             </a:pPr>
             <a:r>
-              <a:rPr lang="en-US" sz="1200" dirty="0">
+              <a:rPr lang="en-US" sz="1100" dirty="0">
                 <a:solidFill>
                   <a:srgbClr val="1A1A2E"/>
                 </a:solidFill>
@@ -2906,9 +2911,9 @@
                 <a:ea typeface="Calibri" pitchFamily="34" charset="-122"/>
                 <a:cs typeface="Calibri" pitchFamily="34" charset="-120"/>
               </a:rPr>
-              <a:t>→ Tester les formulaires : saisir un email invalide → rejet ?</a:t>
-            </a:r>
-            <a:endParaRPr lang="en-US" sz="1200" dirty="0"/>
+              <a:t>→ Tester les formulaires : email invalide → rejet ?</a:t>
+            </a:r>
+            <a:endParaRPr lang="en-US" sz="1100" dirty="0"/>
           </a:p>
         </p:txBody>
       </p:sp>
@@ -2920,7 +2925,7 @@
         </p:nvSpPr>
         <p:spPr>
           <a:xfrm>
-            <a:off x="457200" y="3863340"/>
+            <a:off x="457200" y="3817620"/>
             <a:ext cx="8229600" cy="464058"/>
           </a:xfrm>
           <a:prstGeom prst="rect">
@@ -2930,13 +2935,6 @@
             <a:srgbClr val="FFFFFF"/>
           </a:solidFill>
           <a:ln/>
-          <a:effectLst>
-            <a:outerShdw sx="100000" sy="100000" kx="0" ky="0" algn="bl" rotWithShape="0" blurRad="50800" dist="25400" dir="8100000">
-              <a:srgbClr val="000000">
-                <a:alpha val="12000"/>
-              </a:srgbClr>
-            </a:outerShdw>
-          </a:effectLst>
         </p:spPr>
       </p:sp>
       <p:sp>
@@ -2947,7 +2945,7 @@
         </p:nvSpPr>
         <p:spPr>
           <a:xfrm>
-            <a:off x="457200" y="3863340"/>
+            <a:off x="457200" y="3817620"/>
             <a:ext cx="45720" cy="464058"/>
           </a:xfrm>
           <a:prstGeom prst="rect">
@@ -2967,8 +2965,8 @@
         </p:nvSpPr>
         <p:spPr>
           <a:xfrm>
-            <a:off x="685800" y="3863340"/>
-            <a:ext cx="7818120" cy="464058"/>
+            <a:off x="640080" y="3817620"/>
+            <a:ext cx="7863840" cy="464058"/>
           </a:xfrm>
           <a:prstGeom prst="rect">
             <a:avLst/>
@@ -2984,7 +2982,7 @@
               <a:buNone/>
             </a:pPr>
             <a:r>
-              <a:rPr lang="en-US" sz="1200" dirty="0">
+              <a:rPr lang="en-US" sz="1100" dirty="0">
                 <a:solidFill>
                   <a:srgbClr val="1A1A2E"/>
                 </a:solidFill>
@@ -2992,9 +2990,9 @@
                 <a:ea typeface="Calibri" pitchFamily="34" charset="-122"/>
                 <a:cs typeface="Calibri" pitchFamily="34" charset="-120"/>
               </a:rPr>
-              <a:t>→ Tester les fonctionnalités : ajouter un artiste → il apparaît ?</a:t>
-            </a:r>
-            <a:endParaRPr lang="en-US" sz="1200" dirty="0"/>
+              <a:t>→ Tester les fonctionnalites : ajout artiste → il apparait ?</a:t>
+            </a:r>
+            <a:endParaRPr lang="en-US" sz="1100" dirty="0"/>
           </a:p>
         </p:txBody>
       </p:sp>
@@ -3006,7 +3004,7 @@
         </p:nvSpPr>
         <p:spPr>
           <a:xfrm>
-            <a:off x="457200" y="4354830"/>
+            <a:off x="457200" y="4309110"/>
             <a:ext cx="8229600" cy="464058"/>
           </a:xfrm>
           <a:prstGeom prst="rect">
@@ -3016,13 +3014,6 @@
             <a:srgbClr val="FFF3E0"/>
           </a:solidFill>
           <a:ln/>
-          <a:effectLst>
-            <a:outerShdw sx="100000" sy="100000" kx="0" ky="0" algn="bl" rotWithShape="0" blurRad="50800" dist="25400" dir="8100000">
-              <a:srgbClr val="000000">
-                <a:alpha val="12000"/>
-              </a:srgbClr>
-            </a:outerShdw>
-          </a:effectLst>
         </p:spPr>
       </p:sp>
       <p:sp>
@@ -3033,7 +3024,7 @@
         </p:nvSpPr>
         <p:spPr>
           <a:xfrm>
-            <a:off x="457200" y="4354830"/>
+            <a:off x="457200" y="4309110"/>
             <a:ext cx="45720" cy="464058"/>
           </a:xfrm>
           <a:prstGeom prst="rect">
@@ -3053,8 +3044,8 @@
         </p:nvSpPr>
         <p:spPr>
           <a:xfrm>
-            <a:off x="685800" y="4354830"/>
-            <a:ext cx="7818120" cy="464058"/>
+            <a:off x="640080" y="4309110"/>
+            <a:ext cx="7863840" cy="464058"/>
           </a:xfrm>
           <a:prstGeom prst="rect">
             <a:avLst/>
@@ -3070,7 +3061,7 @@
               <a:buNone/>
             </a:pPr>
             <a:r>
-              <a:rPr lang="en-US" sz="1200" dirty="0">
+              <a:rPr lang="en-US" sz="1100" dirty="0">
                 <a:solidFill>
                   <a:srgbClr val="1A1A2E"/>
                 </a:solidFill>
@@ -3078,9 +3069,9 @@
                 <a:ea typeface="Calibri" pitchFamily="34" charset="-122"/>
                 <a:cs typeface="Calibri" pitchFamily="34" charset="-120"/>
               </a:rPr>
-              <a:t>SwissSound : on fait les DEUX types de tests</a:t>
-            </a:r>
-            <a:endParaRPr lang="en-US" sz="1200" dirty="0"/>
+              <a:t>SwissSound : on fait les DEUX types</a:t>
+            </a:r>
+            <a:endParaRPr lang="en-US" sz="1100" dirty="0"/>
           </a:p>
         </p:txBody>
       </p:sp>
@@ -3145,7 +3136,7 @@
         <p:spPr>
           <a:xfrm>
             <a:off x="457200" y="182880"/>
-            <a:ext cx="8229600" cy="594360"/>
+            <a:ext cx="8229600" cy="548640"/>
           </a:xfrm>
           <a:prstGeom prst="rect">
             <a:avLst/>
@@ -3161,7 +3152,7 @@
               <a:buNone/>
             </a:pPr>
             <a:r>
-              <a:rPr lang="en-US" sz="2400" b="1" dirty="0">
+              <a:rPr lang="en-US" sz="2200" b="1" dirty="0">
                 <a:solidFill>
                   <a:srgbClr val="BF360C"/>
                 </a:solidFill>
@@ -3169,9 +3160,9 @@
                 <a:ea typeface="Trebuchet MS" pitchFamily="34" charset="-122"/>
                 <a:cs typeface="Trebuchet MS" pitchFamily="34" charset="-120"/>
               </a:rPr>
-              <a:t>Données de test : 3 types obligatoires</a:t>
-            </a:r>
-            <a:endParaRPr lang="en-US" sz="2400" dirty="0"/>
+              <a:t>3 types de donnees de test (OBLIGATOIRE)</a:t>
+            </a:r>
+            <a:endParaRPr lang="en-US" sz="2200" dirty="0"/>
           </a:p>
         </p:txBody>
       </p:sp>
@@ -3183,7 +3174,7 @@
         </p:nvSpPr>
         <p:spPr>
           <a:xfrm>
-            <a:off x="457200" y="914400"/>
+            <a:off x="457200" y="868680"/>
             <a:ext cx="8229600" cy="409448"/>
           </a:xfrm>
           <a:prstGeom prst="rect">
@@ -3193,13 +3184,6 @@
             <a:srgbClr val="FFFFFF"/>
           </a:solidFill>
           <a:ln/>
-          <a:effectLst>
-            <a:outerShdw sx="100000" sy="100000" kx="0" ky="0" algn="bl" rotWithShape="0" blurRad="50800" dist="25400" dir="8100000">
-              <a:srgbClr val="000000">
-                <a:alpha val="12000"/>
-              </a:srgbClr>
-            </a:outerShdw>
-          </a:effectLst>
         </p:spPr>
       </p:sp>
       <p:sp>
@@ -3210,7 +3194,7 @@
         </p:nvSpPr>
         <p:spPr>
           <a:xfrm>
-            <a:off x="457200" y="914400"/>
+            <a:off x="457200" y="868680"/>
             <a:ext cx="45720" cy="409448"/>
           </a:xfrm>
           <a:prstGeom prst="rect">
@@ -3230,8 +3214,8 @@
         </p:nvSpPr>
         <p:spPr>
           <a:xfrm>
-            <a:off x="685800" y="914400"/>
-            <a:ext cx="7818120" cy="409448"/>
+            <a:off x="640080" y="868680"/>
+            <a:ext cx="7863840" cy="409448"/>
           </a:xfrm>
           <a:prstGeom prst="rect">
             <a:avLst/>
@@ -3247,7 +3231,7 @@
               <a:buNone/>
             </a:pPr>
             <a:r>
-              <a:rPr lang="en-US" sz="1200" dirty="0">
+              <a:rPr lang="en-US" sz="1100" dirty="0">
                 <a:solidFill>
                   <a:srgbClr val="1A1A2E"/>
                 </a:solidFill>
@@ -3255,9 +3239,9 @@
                 <a:ea typeface="Calibri" pitchFamily="34" charset="-122"/>
                 <a:cs typeface="Calibri" pitchFamily="34" charset="-120"/>
               </a:rPr>
-              <a:t>NORMALES : données valides typiques</a:t>
-            </a:r>
-            <a:endParaRPr lang="en-US" sz="1200" dirty="0"/>
+              <a:t>NORMALES : valides, typiques</a:t>
+            </a:r>
+            <a:endParaRPr lang="en-US" sz="1100" dirty="0"/>
           </a:p>
         </p:txBody>
       </p:sp>
@@ -3269,7 +3253,7 @@
         </p:nvSpPr>
         <p:spPr>
           <a:xfrm>
-            <a:off x="457200" y="1351280"/>
+            <a:off x="457200" y="1305560"/>
             <a:ext cx="8229600" cy="409448"/>
           </a:xfrm>
           <a:prstGeom prst="rect">
@@ -3279,13 +3263,6 @@
             <a:srgbClr val="FFF3E0"/>
           </a:solidFill>
           <a:ln/>
-          <a:effectLst>
-            <a:outerShdw sx="100000" sy="100000" kx="0" ky="0" algn="bl" rotWithShape="0" blurRad="50800" dist="25400" dir="8100000">
-              <a:srgbClr val="000000">
-                <a:alpha val="12000"/>
-              </a:srgbClr>
-            </a:outerShdw>
-          </a:effectLst>
         </p:spPr>
       </p:sp>
       <p:sp>
@@ -3296,7 +3273,7 @@
         </p:nvSpPr>
         <p:spPr>
           <a:xfrm>
-            <a:off x="457200" y="1351280"/>
+            <a:off x="457200" y="1305560"/>
             <a:ext cx="45720" cy="409448"/>
           </a:xfrm>
           <a:prstGeom prst="rect">
@@ -3316,8 +3293,8 @@
         </p:nvSpPr>
         <p:spPr>
           <a:xfrm>
-            <a:off x="685800" y="1351280"/>
-            <a:ext cx="7818120" cy="409448"/>
+            <a:off x="640080" y="1305560"/>
+            <a:ext cx="7863840" cy="409448"/>
           </a:xfrm>
           <a:prstGeom prst="rect">
             <a:avLst/>
@@ -3333,7 +3310,7 @@
               <a:buNone/>
             </a:pPr>
             <a:r>
-              <a:rPr lang="en-US" sz="1200" dirty="0">
+              <a:rPr lang="en-US" sz="1100" dirty="0">
                 <a:solidFill>
                   <a:srgbClr val="1A1A2E"/>
                 </a:solidFill>
@@ -3341,9 +3318,9 @@
                 <a:ea typeface="Calibri" pitchFamily="34" charset="-122"/>
                 <a:cs typeface="Calibri" pitchFamily="34" charset="-120"/>
               </a:rPr>
-              <a:t>→ nom = 'Léman', prix = 24.90, email = 'test@mail.ch'</a:t>
-            </a:r>
-            <a:endParaRPr lang="en-US" sz="1200" dirty="0"/>
+              <a:t>→ nom = 'Leman', prix = 24.90, email = 'test@mail.ch'</a:t>
+            </a:r>
+            <a:endParaRPr lang="en-US" sz="1100" dirty="0"/>
           </a:p>
         </p:txBody>
       </p:sp>
@@ -3355,7 +3332,7 @@
         </p:nvSpPr>
         <p:spPr>
           <a:xfrm>
-            <a:off x="457200" y="1788160"/>
+            <a:off x="457200" y="1742440"/>
             <a:ext cx="8229600" cy="409448"/>
           </a:xfrm>
           <a:prstGeom prst="rect">
@@ -3365,13 +3342,6 @@
             <a:srgbClr val="FFFFFF"/>
           </a:solidFill>
           <a:ln/>
-          <a:effectLst>
-            <a:outerShdw sx="100000" sy="100000" kx="0" ky="0" algn="bl" rotWithShape="0" blurRad="50800" dist="25400" dir="8100000">
-              <a:srgbClr val="000000">
-                <a:alpha val="12000"/>
-              </a:srgbClr>
-            </a:outerShdw>
-          </a:effectLst>
         </p:spPr>
       </p:sp>
       <p:sp>
@@ -3382,7 +3352,7 @@
         </p:nvSpPr>
         <p:spPr>
           <a:xfrm>
-            <a:off x="457200" y="1788160"/>
+            <a:off x="457200" y="1742440"/>
             <a:ext cx="45720" cy="409448"/>
           </a:xfrm>
           <a:prstGeom prst="rect">
@@ -3402,8 +3372,8 @@
         </p:nvSpPr>
         <p:spPr>
           <a:xfrm>
-            <a:off x="685800" y="1788160"/>
-            <a:ext cx="7818120" cy="409448"/>
+            <a:off x="640080" y="1742440"/>
+            <a:ext cx="7863840" cy="409448"/>
           </a:xfrm>
           <a:prstGeom prst="rect">
             <a:avLst/>
@@ -3427,7 +3397,7 @@
                 <a:ea typeface="JetBrains Mono" pitchFamily="34" charset="-122"/>
                 <a:cs typeface="JetBrains Mono" pitchFamily="34" charset="-120"/>
               </a:rPr>
-              <a:t>LIMITES : valeurs aux bornes</a:t>
+              <a:t>LIMITES : aux bornes exactes</a:t>
             </a:r>
             <a:endParaRPr lang="en-US" sz="1000" dirty="0"/>
           </a:p>
@@ -3441,7 +3411,7 @@
         </p:nvSpPr>
         <p:spPr>
           <a:xfrm>
-            <a:off x="457200" y="2225040"/>
+            <a:off x="457200" y="2179320"/>
             <a:ext cx="8229600" cy="409448"/>
           </a:xfrm>
           <a:prstGeom prst="rect">
@@ -3451,13 +3421,6 @@
             <a:srgbClr val="FFF3E0"/>
           </a:solidFill>
           <a:ln/>
-          <a:effectLst>
-            <a:outerShdw sx="100000" sy="100000" kx="0" ky="0" algn="bl" rotWithShape="0" blurRad="50800" dist="25400" dir="8100000">
-              <a:srgbClr val="000000">
-                <a:alpha val="12000"/>
-              </a:srgbClr>
-            </a:outerShdw>
-          </a:effectLst>
         </p:spPr>
       </p:sp>
       <p:sp>
@@ -3468,7 +3431,7 @@
         </p:nvSpPr>
         <p:spPr>
           <a:xfrm>
-            <a:off x="457200" y="2225040"/>
+            <a:off x="457200" y="2179320"/>
             <a:ext cx="45720" cy="409448"/>
           </a:xfrm>
           <a:prstGeom prst="rect">
@@ -3488,8 +3451,8 @@
         </p:nvSpPr>
         <p:spPr>
           <a:xfrm>
-            <a:off x="685800" y="2225040"/>
-            <a:ext cx="7818120" cy="409448"/>
+            <a:off x="640080" y="2179320"/>
+            <a:ext cx="7863840" cy="409448"/>
           </a:xfrm>
           <a:prstGeom prst="rect">
             <a:avLst/>
@@ -3505,7 +3468,7 @@
               <a:buNone/>
             </a:pPr>
             <a:r>
-              <a:rPr lang="en-US" sz="1200" dirty="0">
+              <a:rPr lang="en-US" sz="1100" dirty="0">
                 <a:solidFill>
                   <a:srgbClr val="1A1A2E"/>
                 </a:solidFill>
@@ -3513,9 +3476,9 @@
                 <a:ea typeface="Calibri" pitchFamily="34" charset="-122"/>
                 <a:cs typeface="Calibri" pitchFamily="34" charset="-120"/>
               </a:rPr>
-              <a:t>→ VARCHAR(100) → chaîne de 100 caractères exactement</a:t>
-            </a:r>
-            <a:endParaRPr lang="en-US" sz="1200" dirty="0"/>
+              <a:t>→ VARCHAR(100) → chaine de 100 car exactement</a:t>
+            </a:r>
+            <a:endParaRPr lang="en-US" sz="1100" dirty="0"/>
           </a:p>
         </p:txBody>
       </p:sp>
@@ -3527,7 +3490,7 @@
         </p:nvSpPr>
         <p:spPr>
           <a:xfrm>
-            <a:off x="457200" y="2661920"/>
+            <a:off x="457200" y="2616200"/>
             <a:ext cx="8229600" cy="409448"/>
           </a:xfrm>
           <a:prstGeom prst="rect">
@@ -3537,13 +3500,6 @@
             <a:srgbClr val="FFFFFF"/>
           </a:solidFill>
           <a:ln/>
-          <a:effectLst>
-            <a:outerShdw sx="100000" sy="100000" kx="0" ky="0" algn="bl" rotWithShape="0" blurRad="50800" dist="25400" dir="8100000">
-              <a:srgbClr val="000000">
-                <a:alpha val="12000"/>
-              </a:srgbClr>
-            </a:outerShdw>
-          </a:effectLst>
         </p:spPr>
       </p:sp>
       <p:sp>
@@ -3554,7 +3510,7 @@
         </p:nvSpPr>
         <p:spPr>
           <a:xfrm>
-            <a:off x="457200" y="2661920"/>
+            <a:off x="457200" y="2616200"/>
             <a:ext cx="45720" cy="409448"/>
           </a:xfrm>
           <a:prstGeom prst="rect">
@@ -3574,8 +3530,8 @@
         </p:nvSpPr>
         <p:spPr>
           <a:xfrm>
-            <a:off x="685800" y="2661920"/>
-            <a:ext cx="7818120" cy="409448"/>
+            <a:off x="640080" y="2616200"/>
+            <a:ext cx="7863840" cy="409448"/>
           </a:xfrm>
           <a:prstGeom prst="rect">
             <a:avLst/>
@@ -3591,7 +3547,7 @@
               <a:buNone/>
             </a:pPr>
             <a:r>
-              <a:rPr lang="en-US" sz="1200" dirty="0">
+              <a:rPr lang="en-US" sz="1100" dirty="0">
                 <a:solidFill>
                   <a:srgbClr val="1A1A2E"/>
                 </a:solidFill>
@@ -3601,7 +3557,7 @@
               </a:rPr>
               <a:t>→ CHECK prix &gt;= 0 → prix = 0 (limite basse)</a:t>
             </a:r>
-            <a:endParaRPr lang="en-US" sz="1200" dirty="0"/>
+            <a:endParaRPr lang="en-US" sz="1100" dirty="0"/>
           </a:p>
         </p:txBody>
       </p:sp>
@@ -3613,7 +3569,7 @@
         </p:nvSpPr>
         <p:spPr>
           <a:xfrm>
-            <a:off x="457200" y="3098800"/>
+            <a:off x="457200" y="3053080"/>
             <a:ext cx="8229600" cy="409448"/>
           </a:xfrm>
           <a:prstGeom prst="rect">
@@ -3623,13 +3579,6 @@
             <a:srgbClr val="FFF3E0"/>
           </a:solidFill>
           <a:ln/>
-          <a:effectLst>
-            <a:outerShdw sx="100000" sy="100000" kx="0" ky="0" algn="bl" rotWithShape="0" blurRad="50800" dist="25400" dir="8100000">
-              <a:srgbClr val="000000">
-                <a:alpha val="12000"/>
-              </a:srgbClr>
-            </a:outerShdw>
-          </a:effectLst>
         </p:spPr>
       </p:sp>
       <p:sp>
@@ -3640,7 +3589,7 @@
         </p:nvSpPr>
         <p:spPr>
           <a:xfrm>
-            <a:off x="457200" y="3098800"/>
+            <a:off x="457200" y="3053080"/>
             <a:ext cx="45720" cy="409448"/>
           </a:xfrm>
           <a:prstGeom prst="rect">
@@ -3660,8 +3609,8 @@
         </p:nvSpPr>
         <p:spPr>
           <a:xfrm>
-            <a:off x="685800" y="3098800"/>
-            <a:ext cx="7818120" cy="409448"/>
+            <a:off x="640080" y="3053080"/>
+            <a:ext cx="7863840" cy="409448"/>
           </a:xfrm>
           <a:prstGeom prst="rect">
             <a:avLst/>
@@ -3677,7 +3626,7 @@
               <a:buNone/>
             </a:pPr>
             <a:r>
-              <a:rPr lang="en-US" sz="1200" dirty="0">
+              <a:rPr lang="en-US" sz="1100" dirty="0">
                 <a:solidFill>
                   <a:srgbClr val="1A1A2E"/>
                 </a:solidFill>
@@ -3685,9 +3634,9 @@
                 <a:ea typeface="Calibri" pitchFamily="34" charset="-122"/>
                 <a:cs typeface="Calibri" pitchFamily="34" charset="-120"/>
               </a:rPr>
-              <a:t>ERRONÉES : données volontairement invalides</a:t>
-            </a:r>
-            <a:endParaRPr lang="en-US" sz="1200" dirty="0"/>
+              <a:t>ERRONEES : volontairement invalides</a:t>
+            </a:r>
+            <a:endParaRPr lang="en-US" sz="1100" dirty="0"/>
           </a:p>
         </p:txBody>
       </p:sp>
@@ -3699,7 +3648,7 @@
         </p:nvSpPr>
         <p:spPr>
           <a:xfrm>
-            <a:off x="457200" y="3535680"/>
+            <a:off x="457200" y="3489960"/>
             <a:ext cx="8229600" cy="409448"/>
           </a:xfrm>
           <a:prstGeom prst="rect">
@@ -3709,13 +3658,6 @@
             <a:srgbClr val="FFFFFF"/>
           </a:solidFill>
           <a:ln/>
-          <a:effectLst>
-            <a:outerShdw sx="100000" sy="100000" kx="0" ky="0" algn="bl" rotWithShape="0" blurRad="50800" dist="25400" dir="8100000">
-              <a:srgbClr val="000000">
-                <a:alpha val="12000"/>
-              </a:srgbClr>
-            </a:outerShdw>
-          </a:effectLst>
         </p:spPr>
       </p:sp>
       <p:sp>
@@ -3726,7 +3668,7 @@
         </p:nvSpPr>
         <p:spPr>
           <a:xfrm>
-            <a:off x="457200" y="3535680"/>
+            <a:off x="457200" y="3489960"/>
             <a:ext cx="45720" cy="409448"/>
           </a:xfrm>
           <a:prstGeom prst="rect">
@@ -3746,8 +3688,8 @@
         </p:nvSpPr>
         <p:spPr>
           <a:xfrm>
-            <a:off x="685800" y="3535680"/>
-            <a:ext cx="7818120" cy="409448"/>
+            <a:off x="640080" y="3489960"/>
+            <a:ext cx="7863840" cy="409448"/>
           </a:xfrm>
           <a:prstGeom prst="rect">
             <a:avLst/>
@@ -3763,7 +3705,7 @@
               <a:buNone/>
             </a:pPr>
             <a:r>
-              <a:rPr lang="en-US" sz="1200" dirty="0">
+              <a:rPr lang="en-US" sz="1100" dirty="0">
                 <a:solidFill>
                   <a:srgbClr val="1A1A2E"/>
                 </a:solidFill>
@@ -3771,9 +3713,9 @@
                 <a:ea typeface="Calibri" pitchFamily="34" charset="-122"/>
                 <a:cs typeface="Calibri" pitchFamily="34" charset="-120"/>
               </a:rPr>
-              <a:t>→ email = 'pasunemail', prix = -5, FK id_artiste = 99999</a:t>
-            </a:r>
-            <a:endParaRPr lang="en-US" sz="1200" dirty="0"/>
+              <a:t>→ email = 'pasunemail', prix = -5, FK id = 99999</a:t>
+            </a:r>
+            <a:endParaRPr lang="en-US" sz="1100" dirty="0"/>
           </a:p>
         </p:txBody>
       </p:sp>
@@ -3785,7 +3727,7 @@
         </p:nvSpPr>
         <p:spPr>
           <a:xfrm>
-            <a:off x="457200" y="3972560"/>
+            <a:off x="457200" y="3926840"/>
             <a:ext cx="8229600" cy="409448"/>
           </a:xfrm>
           <a:prstGeom prst="rect">
@@ -3795,13 +3737,6 @@
             <a:srgbClr val="FFF3E0"/>
           </a:solidFill>
           <a:ln/>
-          <a:effectLst>
-            <a:outerShdw sx="100000" sy="100000" kx="0" ky="0" algn="bl" rotWithShape="0" blurRad="50800" dist="25400" dir="8100000">
-              <a:srgbClr val="000000">
-                <a:alpha val="12000"/>
-              </a:srgbClr>
-            </a:outerShdw>
-          </a:effectLst>
         </p:spPr>
       </p:sp>
       <p:sp>
@@ -3812,7 +3747,7 @@
         </p:nvSpPr>
         <p:spPr>
           <a:xfrm>
-            <a:off x="457200" y="3972560"/>
+            <a:off x="457200" y="3926840"/>
             <a:ext cx="45720" cy="409448"/>
           </a:xfrm>
           <a:prstGeom prst="rect">
@@ -3832,8 +3767,8 @@
         </p:nvSpPr>
         <p:spPr>
           <a:xfrm>
-            <a:off x="685800" y="3972560"/>
-            <a:ext cx="7818120" cy="409448"/>
+            <a:off x="640080" y="3926840"/>
+            <a:ext cx="7863840" cy="409448"/>
           </a:xfrm>
           <a:prstGeom prst="rect">
             <a:avLst/>
@@ -3849,7 +3784,7 @@
               <a:buNone/>
             </a:pPr>
             <a:r>
-              <a:rPr lang="en-US" sz="1200" dirty="0">
+              <a:rPr lang="en-US" sz="1100" dirty="0">
                 <a:solidFill>
                   <a:srgbClr val="1A1A2E"/>
                 </a:solidFill>
@@ -3857,9 +3792,9 @@
                 <a:ea typeface="Calibri" pitchFamily="34" charset="-122"/>
                 <a:cs typeface="Calibri" pitchFamily="34" charset="-120"/>
               </a:rPr>
-              <a:t>→ Le système DOIT les rejeter</a:t>
-            </a:r>
-            <a:endParaRPr lang="en-US" sz="1200" dirty="0"/>
+              <a:t>→ Le systeme DOIT les rejeter</a:t>
+            </a:r>
+            <a:endParaRPr lang="en-US" sz="1100" dirty="0"/>
           </a:p>
         </p:txBody>
       </p:sp>
@@ -3871,7 +3806,7 @@
         </p:nvSpPr>
         <p:spPr>
           <a:xfrm>
-            <a:off x="457200" y="4409440"/>
+            <a:off x="457200" y="4363720"/>
             <a:ext cx="8229600" cy="409448"/>
           </a:xfrm>
           <a:prstGeom prst="rect">
@@ -3881,13 +3816,6 @@
             <a:srgbClr val="FFFFFF"/>
           </a:solidFill>
           <a:ln/>
-          <a:effectLst>
-            <a:outerShdw sx="100000" sy="100000" kx="0" ky="0" algn="bl" rotWithShape="0" blurRad="50800" dist="25400" dir="8100000">
-              <a:srgbClr val="000000">
-                <a:alpha val="12000"/>
-              </a:srgbClr>
-            </a:outerShdw>
-          </a:effectLst>
         </p:spPr>
       </p:sp>
       <p:sp>
@@ -3898,7 +3826,7 @@
         </p:nvSpPr>
         <p:spPr>
           <a:xfrm>
-            <a:off x="457200" y="4409440"/>
+            <a:off x="457200" y="4363720"/>
             <a:ext cx="45720" cy="409448"/>
           </a:xfrm>
           <a:prstGeom prst="rect">
@@ -3918,8 +3846,8 @@
         </p:nvSpPr>
         <p:spPr>
           <a:xfrm>
-            <a:off x="685800" y="4409440"/>
-            <a:ext cx="7818120" cy="409448"/>
+            <a:off x="640080" y="4363720"/>
+            <a:ext cx="7863840" cy="409448"/>
           </a:xfrm>
           <a:prstGeom prst="rect">
             <a:avLst/>
@@ -3935,7 +3863,7 @@
               <a:buNone/>
             </a:pPr>
             <a:r>
-              <a:rPr lang="en-US" sz="1200" dirty="0">
+              <a:rPr lang="en-US" sz="1100" dirty="0">
                 <a:solidFill>
                   <a:srgbClr val="1A1A2E"/>
                 </a:solidFill>
@@ -3943,9 +3871,9 @@
                 <a:ea typeface="Calibri" pitchFamily="34" charset="-122"/>
                 <a:cs typeface="Calibri" pitchFamily="34" charset="-120"/>
               </a:rPr>
-              <a:t>Pour CHAQUE test : 1 donnée normale + 1 limite + 1 erronée</a:t>
-            </a:r>
-            <a:endParaRPr lang="en-US" sz="1200" dirty="0"/>
+              <a:t>Pour CHAQUE test : 1 normale + 1 limite + 1 erronee</a:t>
+            </a:r>
+            <a:endParaRPr lang="en-US" sz="1100" dirty="0"/>
           </a:p>
         </p:txBody>
       </p:sp>
@@ -4010,7 +3938,7 @@
         <p:spPr>
           <a:xfrm>
             <a:off x="457200" y="182880"/>
-            <a:ext cx="8229600" cy="594360"/>
+            <a:ext cx="8229600" cy="548640"/>
           </a:xfrm>
           <a:prstGeom prst="rect">
             <a:avLst/>
@@ -4026,7 +3954,7 @@
               <a:buNone/>
             </a:pPr>
             <a:r>
-              <a:rPr lang="en-US" sz="2400" b="1" dirty="0">
+              <a:rPr lang="en-US" sz="2200" b="1" dirty="0">
                 <a:solidFill>
                   <a:srgbClr val="BF360C"/>
                 </a:solidFill>
@@ -4036,7 +3964,7 @@
               </a:rPr>
               <a:t>Plan de test — template SwissSound</a:t>
             </a:r>
-            <a:endParaRPr lang="en-US" sz="2400" dirty="0"/>
+            <a:endParaRPr lang="en-US" sz="2200" dirty="0"/>
           </a:p>
         </p:txBody>
       </p:sp>
@@ -4048,8 +3976,8 @@
         </p:nvSpPr>
         <p:spPr>
           <a:xfrm>
-            <a:off x="457200" y="914400"/>
-            <a:ext cx="8229600" cy="521208"/>
+            <a:off x="457200" y="868680"/>
+            <a:ext cx="8229600" cy="475488"/>
           </a:xfrm>
           <a:prstGeom prst="rect">
             <a:avLst/>
@@ -4058,13 +3986,6 @@
             <a:srgbClr val="FFFFFF"/>
           </a:solidFill>
           <a:ln/>
-          <a:effectLst>
-            <a:outerShdw sx="100000" sy="100000" kx="0" ky="0" algn="bl" rotWithShape="0" blurRad="50800" dist="25400" dir="8100000">
-              <a:srgbClr val="000000">
-                <a:alpha val="12000"/>
-              </a:srgbClr>
-            </a:outerShdw>
-          </a:effectLst>
         </p:spPr>
       </p:sp>
       <p:sp>
@@ -4075,8 +3996,8 @@
         </p:nvSpPr>
         <p:spPr>
           <a:xfrm>
-            <a:off x="457200" y="914400"/>
-            <a:ext cx="45720" cy="521208"/>
+            <a:off x="457200" y="868680"/>
+            <a:ext cx="45720" cy="475488"/>
           </a:xfrm>
           <a:prstGeom prst="rect">
             <a:avLst/>
@@ -4095,8 +4016,8 @@
         </p:nvSpPr>
         <p:spPr>
           <a:xfrm>
-            <a:off x="685800" y="914400"/>
-            <a:ext cx="7818120" cy="521208"/>
+            <a:off x="640080" y="868680"/>
+            <a:ext cx="7863840" cy="475488"/>
           </a:xfrm>
           <a:prstGeom prst="rect">
             <a:avLst/>
@@ -4112,7 +4033,7 @@
               <a:buNone/>
             </a:pPr>
             <a:r>
-              <a:rPr lang="en-US" sz="1200" dirty="0">
+              <a:rPr lang="en-US" sz="1100" dirty="0">
                 <a:solidFill>
                   <a:srgbClr val="1A1A2E"/>
                 </a:solidFill>
@@ -4120,9 +4041,9 @@
                 <a:ea typeface="Calibri" pitchFamily="34" charset="-122"/>
                 <a:cs typeface="Calibri" pitchFamily="34" charset="-120"/>
               </a:rPr>
-              <a:t>| ID | Description | Type | Entrée | Résultat attendu | Résultat obtenu | Statut |</a:t>
-            </a:r>
-            <a:endParaRPr lang="en-US" sz="1200" dirty="0"/>
+              <a:t>| ID | Description | Type | Entree | Attendu | Obtenu | Statut |</a:t>
+            </a:r>
+            <a:endParaRPr lang="en-US" sz="1100" dirty="0"/>
           </a:p>
         </p:txBody>
       </p:sp>
@@ -4134,8 +4055,8 @@
         </p:nvSpPr>
         <p:spPr>
           <a:xfrm>
-            <a:off x="457200" y="1463040"/>
-            <a:ext cx="8229600" cy="521208"/>
+            <a:off x="457200" y="1371600"/>
+            <a:ext cx="8229600" cy="475488"/>
           </a:xfrm>
           <a:prstGeom prst="rect">
             <a:avLst/>
@@ -4144,13 +4065,6 @@
             <a:srgbClr val="FFF3E0"/>
           </a:solidFill>
           <a:ln/>
-          <a:effectLst>
-            <a:outerShdw sx="100000" sy="100000" kx="0" ky="0" algn="bl" rotWithShape="0" blurRad="50800" dist="25400" dir="8100000">
-              <a:srgbClr val="000000">
-                <a:alpha val="12000"/>
-              </a:srgbClr>
-            </a:outerShdw>
-          </a:effectLst>
         </p:spPr>
       </p:sp>
       <p:sp>
@@ -4161,8 +4075,8 @@
         </p:nvSpPr>
         <p:spPr>
           <a:xfrm>
-            <a:off x="457200" y="1463040"/>
-            <a:ext cx="45720" cy="521208"/>
+            <a:off x="457200" y="1371600"/>
+            <a:ext cx="45720" cy="475488"/>
           </a:xfrm>
           <a:prstGeom prst="rect">
             <a:avLst/>
@@ -4181,8 +4095,8 @@
         </p:nvSpPr>
         <p:spPr>
           <a:xfrm>
-            <a:off x="685800" y="1463040"/>
-            <a:ext cx="7818120" cy="521208"/>
+            <a:off x="640080" y="1371600"/>
+            <a:ext cx="7863840" cy="475488"/>
           </a:xfrm>
           <a:prstGeom prst="rect">
             <a:avLst/>
@@ -4198,7 +4112,7 @@
               <a:buNone/>
             </a:pPr>
             <a:r>
-              <a:rPr lang="en-US" sz="1200" dirty="0">
+              <a:rPr lang="en-US" sz="1100" dirty="0">
                 <a:solidFill>
                   <a:srgbClr val="1A1A2E"/>
                 </a:solidFill>
@@ -4206,9 +4120,9 @@
                 <a:ea typeface="Calibri" pitchFamily="34" charset="-122"/>
                 <a:cs typeface="Calibri" pitchFamily="34" charset="-120"/>
               </a:rPr>
-              <a:t>| T01 | INSERT artiste valide | Normal | nom='Test' | Succès, 1 ligne insérée | — | — |</a:t>
-            </a:r>
-            <a:endParaRPr lang="en-US" sz="1200" dirty="0"/>
+              <a:t>| T01 | INSERT artiste valide | Normal | nom='Test' | Succes | — | — |</a:t>
+            </a:r>
+            <a:endParaRPr lang="en-US" sz="1100" dirty="0"/>
           </a:p>
         </p:txBody>
       </p:sp>
@@ -4220,8 +4134,8 @@
         </p:nvSpPr>
         <p:spPr>
           <a:xfrm>
-            <a:off x="457200" y="2011680"/>
-            <a:ext cx="8229600" cy="521208"/>
+            <a:off x="457200" y="1874520"/>
+            <a:ext cx="8229600" cy="475488"/>
           </a:xfrm>
           <a:prstGeom prst="rect">
             <a:avLst/>
@@ -4230,13 +4144,6 @@
             <a:srgbClr val="FFFFFF"/>
           </a:solidFill>
           <a:ln/>
-          <a:effectLst>
-            <a:outerShdw sx="100000" sy="100000" kx="0" ky="0" algn="bl" rotWithShape="0" blurRad="50800" dist="25400" dir="8100000">
-              <a:srgbClr val="000000">
-                <a:alpha val="12000"/>
-              </a:srgbClr>
-            </a:outerShdw>
-          </a:effectLst>
         </p:spPr>
       </p:sp>
       <p:sp>
@@ -4247,8 +4154,8 @@
         </p:nvSpPr>
         <p:spPr>
           <a:xfrm>
-            <a:off x="457200" y="2011680"/>
-            <a:ext cx="45720" cy="521208"/>
+            <a:off x="457200" y="1874520"/>
+            <a:ext cx="45720" cy="475488"/>
           </a:xfrm>
           <a:prstGeom prst="rect">
             <a:avLst/>
@@ -4267,8 +4174,8 @@
         </p:nvSpPr>
         <p:spPr>
           <a:xfrm>
-            <a:off x="685800" y="2011680"/>
-            <a:ext cx="7818120" cy="521208"/>
+            <a:off x="640080" y="1874520"/>
+            <a:ext cx="7863840" cy="475488"/>
           </a:xfrm>
           <a:prstGeom prst="rect">
             <a:avLst/>
@@ -4284,7 +4191,7 @@
               <a:buNone/>
             </a:pPr>
             <a:r>
-              <a:rPr lang="en-US" sz="1200" dirty="0">
+              <a:rPr lang="en-US" sz="1100" dirty="0">
                 <a:solidFill>
                   <a:srgbClr val="1A1A2E"/>
                 </a:solidFill>
@@ -4292,9 +4199,9 @@
                 <a:ea typeface="Calibri" pitchFamily="34" charset="-122"/>
                 <a:cs typeface="Calibri" pitchFamily="34" charset="-120"/>
               </a:rPr>
-              <a:t>| T02 | INSERT email doublon | Erroné | email existant | Erreur 1062 | — | — |</a:t>
-            </a:r>
-            <a:endParaRPr lang="en-US" sz="1200" dirty="0"/>
+              <a:t>| T02 | INSERT email doublon | Errone | email existant | Err 1062 | — | — |</a:t>
+            </a:r>
+            <a:endParaRPr lang="en-US" sz="1100" dirty="0"/>
           </a:p>
         </p:txBody>
       </p:sp>
@@ -4306,8 +4213,8 @@
         </p:nvSpPr>
         <p:spPr>
           <a:xfrm>
-            <a:off x="457200" y="2560320"/>
-            <a:ext cx="8229600" cy="521208"/>
+            <a:off x="457200" y="2377440"/>
+            <a:ext cx="8229600" cy="475488"/>
           </a:xfrm>
           <a:prstGeom prst="rect">
             <a:avLst/>
@@ -4316,13 +4223,6 @@
             <a:srgbClr val="FFF3E0"/>
           </a:solidFill>
           <a:ln/>
-          <a:effectLst>
-            <a:outerShdw sx="100000" sy="100000" kx="0" ky="0" algn="bl" rotWithShape="0" blurRad="50800" dist="25400" dir="8100000">
-              <a:srgbClr val="000000">
-                <a:alpha val="12000"/>
-              </a:srgbClr>
-            </a:outerShdw>
-          </a:effectLst>
         </p:spPr>
       </p:sp>
       <p:sp>
@@ -4333,8 +4233,8 @@
         </p:nvSpPr>
         <p:spPr>
           <a:xfrm>
-            <a:off x="457200" y="2560320"/>
-            <a:ext cx="45720" cy="521208"/>
+            <a:off x="457200" y="2377440"/>
+            <a:ext cx="45720" cy="475488"/>
           </a:xfrm>
           <a:prstGeom prst="rect">
             <a:avLst/>
@@ -4353,8 +4253,8 @@
         </p:nvSpPr>
         <p:spPr>
           <a:xfrm>
-            <a:off x="685800" y="2560320"/>
-            <a:ext cx="7818120" cy="521208"/>
+            <a:off x="640080" y="2377440"/>
+            <a:ext cx="7863840" cy="475488"/>
           </a:xfrm>
           <a:prstGeom prst="rect">
             <a:avLst/>
@@ -4370,7 +4270,7 @@
               <a:buNone/>
             </a:pPr>
             <a:r>
-              <a:rPr lang="en-US" sz="1200" dirty="0">
+              <a:rPr lang="en-US" sz="1100" dirty="0">
                 <a:solidFill>
                   <a:srgbClr val="1A1A2E"/>
                 </a:solidFill>
@@ -4378,9 +4278,9 @@
                 <a:ea typeface="Calibri" pitchFamily="34" charset="-122"/>
                 <a:cs typeface="Calibri" pitchFamily="34" charset="-120"/>
               </a:rPr>
-              <a:t>| T03 | INSERT FK invalide | Erroné | id_artiste=999 | Erreur 1452 | — | — |</a:t>
-            </a:r>
-            <a:endParaRPr lang="en-US" sz="1200" dirty="0"/>
+              <a:t>| T03 | INSERT FK invalide | Errone | id_artiste=999 | Err 1452 | — | — |</a:t>
+            </a:r>
+            <a:endParaRPr lang="en-US" sz="1100" dirty="0"/>
           </a:p>
         </p:txBody>
       </p:sp>
@@ -4392,8 +4292,8 @@
         </p:nvSpPr>
         <p:spPr>
           <a:xfrm>
-            <a:off x="457200" y="3108960"/>
-            <a:ext cx="8229600" cy="521208"/>
+            <a:off x="457200" y="2880360"/>
+            <a:ext cx="8229600" cy="475488"/>
           </a:xfrm>
           <a:prstGeom prst="rect">
             <a:avLst/>
@@ -4402,13 +4302,6 @@
             <a:srgbClr val="FFFFFF"/>
           </a:solidFill>
           <a:ln/>
-          <a:effectLst>
-            <a:outerShdw sx="100000" sy="100000" kx="0" ky="0" algn="bl" rotWithShape="0" blurRad="50800" dist="25400" dir="8100000">
-              <a:srgbClr val="000000">
-                <a:alpha val="12000"/>
-              </a:srgbClr>
-            </a:outerShdw>
-          </a:effectLst>
         </p:spPr>
       </p:sp>
       <p:sp>
@@ -4419,8 +4312,8 @@
         </p:nvSpPr>
         <p:spPr>
           <a:xfrm>
-            <a:off x="457200" y="3108960"/>
-            <a:ext cx="45720" cy="521208"/>
+            <a:off x="457200" y="2880360"/>
+            <a:ext cx="45720" cy="475488"/>
           </a:xfrm>
           <a:prstGeom prst="rect">
             <a:avLst/>
@@ -4439,8 +4332,8 @@
         </p:nvSpPr>
         <p:spPr>
           <a:xfrm>
-            <a:off x="685800" y="3108960"/>
-            <a:ext cx="7818120" cy="521208"/>
+            <a:off x="640080" y="2880360"/>
+            <a:ext cx="7863840" cy="475488"/>
           </a:xfrm>
           <a:prstGeom prst="rect">
             <a:avLst/>
@@ -4456,7 +4349,7 @@
               <a:buNone/>
             </a:pPr>
             <a:r>
-              <a:rPr lang="en-US" sz="1200" dirty="0">
+              <a:rPr lang="en-US" sz="1100" dirty="0">
                 <a:solidFill>
                   <a:srgbClr val="1A1A2E"/>
                 </a:solidFill>
@@ -4464,9 +4357,9 @@
                 <a:ea typeface="Calibri" pitchFamily="34" charset="-122"/>
                 <a:cs typeface="Calibri" pitchFamily="34" charset="-120"/>
               </a:rPr>
-              <a:t>| T04 | DELETE artiste avec albums | Erroné | RESTRICT | Erreur 1451 | — | — |</a:t>
-            </a:r>
-            <a:endParaRPr lang="en-US" sz="1200" dirty="0"/>
+              <a:t>| T04 | DELETE artiste+albums | Errone | RESTRICT | Err 1451 | — | — |</a:t>
+            </a:r>
+            <a:endParaRPr lang="en-US" sz="1100" dirty="0"/>
           </a:p>
         </p:txBody>
       </p:sp>
@@ -4478,8 +4371,8 @@
         </p:nvSpPr>
         <p:spPr>
           <a:xfrm>
-            <a:off x="457200" y="3657600"/>
-            <a:ext cx="8229600" cy="521208"/>
+            <a:off x="457200" y="3383280"/>
+            <a:ext cx="8229600" cy="475488"/>
           </a:xfrm>
           <a:prstGeom prst="rect">
             <a:avLst/>
@@ -4488,13 +4381,6 @@
             <a:srgbClr val="FFF3E0"/>
           </a:solidFill>
           <a:ln/>
-          <a:effectLst>
-            <a:outerShdw sx="100000" sy="100000" kx="0" ky="0" algn="bl" rotWithShape="0" blurRad="50800" dist="25400" dir="8100000">
-              <a:srgbClr val="000000">
-                <a:alpha val="12000"/>
-              </a:srgbClr>
-            </a:outerShdw>
-          </a:effectLst>
         </p:spPr>
       </p:sp>
       <p:sp>
@@ -4505,8 +4391,8 @@
         </p:nvSpPr>
         <p:spPr>
           <a:xfrm>
-            <a:off x="457200" y="3657600"/>
-            <a:ext cx="45720" cy="521208"/>
+            <a:off x="457200" y="3383280"/>
+            <a:ext cx="45720" cy="475488"/>
           </a:xfrm>
           <a:prstGeom prst="rect">
             <a:avLst/>
@@ -4525,8 +4411,8 @@
         </p:nvSpPr>
         <p:spPr>
           <a:xfrm>
-            <a:off x="685800" y="3657600"/>
-            <a:ext cx="7818120" cy="521208"/>
+            <a:off x="640080" y="3383280"/>
+            <a:ext cx="7863840" cy="475488"/>
           </a:xfrm>
           <a:prstGeom prst="rect">
             <a:avLst/>
@@ -4542,7 +4428,7 @@
               <a:buNone/>
             </a:pPr>
             <a:r>
-              <a:rPr lang="en-US" sz="1200" dirty="0">
+              <a:rPr lang="en-US" sz="1100" dirty="0">
                 <a:solidFill>
                   <a:srgbClr val="1A1A2E"/>
                 </a:solidFill>
@@ -4550,9 +4436,9 @@
                 <a:ea typeface="Calibri" pitchFamily="34" charset="-122"/>
                 <a:cs typeface="Calibri" pitchFamily="34" charset="-120"/>
               </a:rPr>
-              <a:t>| T05 | SELECT artistes actifs | Normal | WHERE actif=1 | 19 lignes | — | — |</a:t>
-            </a:r>
-            <a:endParaRPr lang="en-US" sz="1200" dirty="0"/>
+              <a:t>| T05 | SELECT actifs | Normal | actif=1 | 19 lignes | — | — |</a:t>
+            </a:r>
+            <a:endParaRPr lang="en-US" sz="1100" dirty="0"/>
           </a:p>
         </p:txBody>
       </p:sp>
@@ -4564,8 +4450,8 @@
         </p:nvSpPr>
         <p:spPr>
           <a:xfrm>
-            <a:off x="457200" y="4206240"/>
-            <a:ext cx="8229600" cy="521208"/>
+            <a:off x="457200" y="3886200"/>
+            <a:ext cx="8229600" cy="475488"/>
           </a:xfrm>
           <a:prstGeom prst="rect">
             <a:avLst/>
@@ -4574,13 +4460,6 @@
             <a:srgbClr val="FFFFFF"/>
           </a:solidFill>
           <a:ln/>
-          <a:effectLst>
-            <a:outerShdw sx="100000" sy="100000" kx="0" ky="0" algn="bl" rotWithShape="0" blurRad="50800" dist="25400" dir="8100000">
-              <a:srgbClr val="000000">
-                <a:alpha val="12000"/>
-              </a:srgbClr>
-            </a:outerShdw>
-          </a:effectLst>
         </p:spPr>
       </p:sp>
       <p:sp>
@@ -4591,8 +4470,8 @@
         </p:nvSpPr>
         <p:spPr>
           <a:xfrm>
-            <a:off x="457200" y="4206240"/>
-            <a:ext cx="45720" cy="521208"/>
+            <a:off x="457200" y="3886200"/>
+            <a:ext cx="45720" cy="475488"/>
           </a:xfrm>
           <a:prstGeom prst="rect">
             <a:avLst/>
@@ -4611,8 +4490,8 @@
         </p:nvSpPr>
         <p:spPr>
           <a:xfrm>
-            <a:off x="685800" y="4206240"/>
-            <a:ext cx="7818120" cy="521208"/>
+            <a:off x="640080" y="3886200"/>
+            <a:ext cx="7863840" cy="475488"/>
           </a:xfrm>
           <a:prstGeom prst="rect">
             <a:avLst/>
@@ -4628,7 +4507,7 @@
               <a:buNone/>
             </a:pPr>
             <a:r>
-              <a:rPr lang="en-US" sz="1200" dirty="0">
+              <a:rPr lang="en-US" sz="1100" dirty="0">
                 <a:solidFill>
                   <a:srgbClr val="1A1A2E"/>
                 </a:solidFill>
@@ -4636,9 +4515,9 @@
                 <a:ea typeface="Calibri" pitchFamily="34" charset="-122"/>
                 <a:cs typeface="Calibri" pitchFamily="34" charset="-120"/>
               </a:rPr>
-              <a:t>20 cas minimum couvrant : contraintes, requêtes, sécurité</a:t>
-            </a:r>
-            <a:endParaRPr lang="en-US" sz="1200" dirty="0"/>
+              <a:t>20 cas minimum : contraintes, requetes, securite, procedures</a:t>
+            </a:r>
+            <a:endParaRPr lang="en-US" sz="1100" dirty="0"/>
           </a:p>
         </p:txBody>
       </p:sp>
@@ -4703,7 +4582,7 @@
         <p:spPr>
           <a:xfrm>
             <a:off x="457200" y="182880"/>
-            <a:ext cx="8229600" cy="594360"/>
+            <a:ext cx="8229600" cy="548640"/>
           </a:xfrm>
           <a:prstGeom prst="rect">
             <a:avLst/>
@@ -4719,7 +4598,7 @@
               <a:buNone/>
             </a:pPr>
             <a:r>
-              <a:rPr lang="en-US" sz="2400" b="1" dirty="0">
+              <a:rPr lang="en-US" sz="2200" b="1" dirty="0">
                 <a:solidFill>
                   <a:srgbClr val="BF360C"/>
                 </a:solidFill>
@@ -4727,9 +4606,9 @@
                 <a:ea typeface="Trebuchet MS" pitchFamily="34" charset="-122"/>
                 <a:cs typeface="Trebuchet MS" pitchFamily="34" charset="-120"/>
               </a:rPr>
-              <a:t>Exercice Module 17</a:t>
-            </a:r>
-            <a:endParaRPr lang="en-US" sz="2400" dirty="0"/>
+              <a:t>Matrice de tracabilite</a:t>
+            </a:r>
+            <a:endParaRPr lang="en-US" sz="2200" dirty="0"/>
           </a:p>
         </p:txBody>
       </p:sp>
@@ -4741,8 +4620,8 @@
         </p:nvSpPr>
         <p:spPr>
           <a:xfrm>
-            <a:off x="457200" y="914400"/>
-            <a:ext cx="8229600" cy="521208"/>
+            <a:off x="457200" y="868680"/>
+            <a:ext cx="8229600" cy="475488"/>
           </a:xfrm>
           <a:prstGeom prst="rect">
             <a:avLst/>
@@ -4751,13 +4630,6 @@
             <a:srgbClr val="FFFFFF"/>
           </a:solidFill>
           <a:ln/>
-          <a:effectLst>
-            <a:outerShdw sx="100000" sy="100000" kx="0" ky="0" algn="bl" rotWithShape="0" blurRad="50800" dist="25400" dir="8100000">
-              <a:srgbClr val="000000">
-                <a:alpha val="12000"/>
-              </a:srgbClr>
-            </a:outerShdw>
-          </a:effectLst>
         </p:spPr>
       </p:sp>
       <p:sp>
@@ -4768,8 +4640,8 @@
         </p:nvSpPr>
         <p:spPr>
           <a:xfrm>
-            <a:off x="457200" y="914400"/>
-            <a:ext cx="45720" cy="521208"/>
+            <a:off x="457200" y="868680"/>
+            <a:ext cx="45720" cy="475488"/>
           </a:xfrm>
           <a:prstGeom prst="rect">
             <a:avLst/>
@@ -4788,8 +4660,8 @@
         </p:nvSpPr>
         <p:spPr>
           <a:xfrm>
-            <a:off x="685800" y="914400"/>
-            <a:ext cx="7818120" cy="521208"/>
+            <a:off x="640080" y="868680"/>
+            <a:ext cx="7863840" cy="475488"/>
           </a:xfrm>
           <a:prstGeom prst="rect">
             <a:avLst/>
@@ -4805,7 +4677,7 @@
               <a:buNone/>
             </a:pPr>
             <a:r>
-              <a:rPr lang="en-US" sz="1200" dirty="0">
+              <a:rPr lang="en-US" sz="1100" dirty="0">
                 <a:solidFill>
                   <a:srgbClr val="1A1A2E"/>
                 </a:solidFill>
@@ -4813,9 +4685,9 @@
                 <a:ea typeface="Calibri" pitchFamily="34" charset="-122"/>
                 <a:cs typeface="Calibri" pitchFamily="34" charset="-120"/>
               </a:rPr>
-              <a:t>Rédiger 20 cas de test pour SwissSound (template Excel fourni)</a:t>
-            </a:r>
-            <a:endParaRPr lang="en-US" sz="1200" dirty="0"/>
+              <a:t>Chaque BESOIN du cahier des charges → au moins 1 test</a:t>
+            </a:r>
+            <a:endParaRPr lang="en-US" sz="1100" dirty="0"/>
           </a:p>
         </p:txBody>
       </p:sp>
@@ -4827,8 +4699,8 @@
         </p:nvSpPr>
         <p:spPr>
           <a:xfrm>
-            <a:off x="457200" y="1463040"/>
-            <a:ext cx="8229600" cy="521208"/>
+            <a:off x="457200" y="1371600"/>
+            <a:ext cx="8229600" cy="475488"/>
           </a:xfrm>
           <a:prstGeom prst="rect">
             <a:avLst/>
@@ -4837,13 +4709,6 @@
             <a:srgbClr val="FFF3E0"/>
           </a:solidFill>
           <a:ln/>
-          <a:effectLst>
-            <a:outerShdw sx="100000" sy="100000" kx="0" ky="0" algn="bl" rotWithShape="0" blurRad="50800" dist="25400" dir="8100000">
-              <a:srgbClr val="000000">
-                <a:alpha val="12000"/>
-              </a:srgbClr>
-            </a:outerShdw>
-          </a:effectLst>
         </p:spPr>
       </p:sp>
       <p:sp>
@@ -4854,8 +4719,8 @@
         </p:nvSpPr>
         <p:spPr>
           <a:xfrm>
-            <a:off x="457200" y="1463040"/>
-            <a:ext cx="45720" cy="521208"/>
+            <a:off x="457200" y="1371600"/>
+            <a:ext cx="45720" cy="475488"/>
           </a:xfrm>
           <a:prstGeom prst="rect">
             <a:avLst/>
@@ -4874,8 +4739,8 @@
         </p:nvSpPr>
         <p:spPr>
           <a:xfrm>
-            <a:off x="685800" y="1463040"/>
-            <a:ext cx="7818120" cy="521208"/>
+            <a:off x="640080" y="1371600"/>
+            <a:ext cx="7863840" cy="475488"/>
           </a:xfrm>
           <a:prstGeom prst="rect">
             <a:avLst/>
@@ -4891,7 +4756,7 @@
               <a:buNone/>
             </a:pPr>
             <a:r>
-              <a:rPr lang="en-US" sz="1200" dirty="0">
+              <a:rPr lang="en-US" sz="1100" dirty="0">
                 <a:solidFill>
                   <a:srgbClr val="1A1A2E"/>
                 </a:solidFill>
@@ -4899,9 +4764,9 @@
                 <a:ea typeface="Calibri" pitchFamily="34" charset="-122"/>
                 <a:cs typeface="Calibri" pitchFamily="34" charset="-120"/>
               </a:rPr>
-              <a:t>Couvrir : 5 contraintes, 5 requêtes SELECT, 5 JOIN, 3 sécurité, 2 procédures</a:t>
-            </a:r>
-            <a:endParaRPr lang="en-US" sz="1200" dirty="0"/>
+              <a:t>Ajouter artiste → T01, T02, T03</a:t>
+            </a:r>
+            <a:endParaRPr lang="en-US" sz="1100" dirty="0"/>
           </a:p>
         </p:txBody>
       </p:sp>
@@ -4913,8 +4778,8 @@
         </p:nvSpPr>
         <p:spPr>
           <a:xfrm>
-            <a:off x="457200" y="2011680"/>
-            <a:ext cx="8229600" cy="521208"/>
+            <a:off x="457200" y="1874520"/>
+            <a:ext cx="8229600" cy="475488"/>
           </a:xfrm>
           <a:prstGeom prst="rect">
             <a:avLst/>
@@ -4923,13 +4788,6 @@
             <a:srgbClr val="FFFFFF"/>
           </a:solidFill>
           <a:ln/>
-          <a:effectLst>
-            <a:outerShdw sx="100000" sy="100000" kx="0" ky="0" algn="bl" rotWithShape="0" blurRad="50800" dist="25400" dir="8100000">
-              <a:srgbClr val="000000">
-                <a:alpha val="12000"/>
-              </a:srgbClr>
-            </a:outerShdw>
-          </a:effectLst>
         </p:spPr>
       </p:sp>
       <p:sp>
@@ -4940,8 +4798,8 @@
         </p:nvSpPr>
         <p:spPr>
           <a:xfrm>
-            <a:off x="457200" y="2011680"/>
-            <a:ext cx="45720" cy="521208"/>
+            <a:off x="457200" y="1874520"/>
+            <a:ext cx="45720" cy="475488"/>
           </a:xfrm>
           <a:prstGeom prst="rect">
             <a:avLst/>
@@ -4960,8 +4818,8 @@
         </p:nvSpPr>
         <p:spPr>
           <a:xfrm>
-            <a:off x="685800" y="2011680"/>
-            <a:ext cx="7818120" cy="521208"/>
+            <a:off x="640080" y="1874520"/>
+            <a:ext cx="7863840" cy="475488"/>
           </a:xfrm>
           <a:prstGeom prst="rect">
             <a:avLst/>
@@ -4977,7 +4835,7 @@
               <a:buNone/>
             </a:pPr>
             <a:r>
-              <a:rPr lang="en-US" sz="1200" dirty="0">
+              <a:rPr lang="en-US" sz="1100" dirty="0">
                 <a:solidFill>
                   <a:srgbClr val="1A1A2E"/>
                 </a:solidFill>
@@ -4985,9 +4843,9 @@
                 <a:ea typeface="Calibri" pitchFamily="34" charset="-122"/>
                 <a:cs typeface="Calibri" pitchFamily="34" charset="-120"/>
               </a:rPr>
-              <a:t>Pour chaque test : données normales + limites + erronées</a:t>
-            </a:r>
-            <a:endParaRPr lang="en-US" sz="1200" dirty="0"/>
+              <a:t>Reserver session → T06, T07, T08</a:t>
+            </a:r>
+            <a:endParaRPr lang="en-US" sz="1100" dirty="0"/>
           </a:p>
         </p:txBody>
       </p:sp>
@@ -4999,8 +4857,8 @@
         </p:nvSpPr>
         <p:spPr>
           <a:xfrm>
-            <a:off x="457200" y="2560320"/>
-            <a:ext cx="8229600" cy="521208"/>
+            <a:off x="457200" y="2377440"/>
+            <a:ext cx="8229600" cy="475488"/>
           </a:xfrm>
           <a:prstGeom prst="rect">
             <a:avLst/>
@@ -5009,13 +4867,6 @@
             <a:srgbClr val="FFF3E0"/>
           </a:solidFill>
           <a:ln/>
-          <a:effectLst>
-            <a:outerShdw sx="100000" sy="100000" kx="0" ky="0" algn="bl" rotWithShape="0" blurRad="50800" dist="25400" dir="8100000">
-              <a:srgbClr val="000000">
-                <a:alpha val="12000"/>
-              </a:srgbClr>
-            </a:outerShdw>
-          </a:effectLst>
         </p:spPr>
       </p:sp>
       <p:sp>
@@ -5026,8 +4877,8 @@
         </p:nvSpPr>
         <p:spPr>
           <a:xfrm>
-            <a:off x="457200" y="2560320"/>
-            <a:ext cx="45720" cy="521208"/>
+            <a:off x="457200" y="2377440"/>
+            <a:ext cx="45720" cy="475488"/>
           </a:xfrm>
           <a:prstGeom prst="rect">
             <a:avLst/>
@@ -5046,8 +4897,8 @@
         </p:nvSpPr>
         <p:spPr>
           <a:xfrm>
-            <a:off x="685800" y="2560320"/>
-            <a:ext cx="7818120" cy="521208"/>
+            <a:off x="640080" y="2377440"/>
+            <a:ext cx="7863840" cy="475488"/>
           </a:xfrm>
           <a:prstGeom prst="rect">
             <a:avLst/>
@@ -5063,7 +4914,7 @@
               <a:buNone/>
             </a:pPr>
             <a:r>
-              <a:rPr lang="en-US" sz="1200" dirty="0">
+              <a:rPr lang="en-US" sz="1100" dirty="0">
                 <a:solidFill>
                   <a:srgbClr val="1A1A2E"/>
                 </a:solidFill>
@@ -5071,9 +4922,9 @@
                 <a:ea typeface="Calibri" pitchFamily="34" charset="-122"/>
                 <a:cs typeface="Calibri" pitchFamily="34" charset="-120"/>
               </a:rPr>
-              <a:t>Créer la matrice de traçabilité (test ↔ besoin du cahier des charges)</a:t>
-            </a:r>
-            <a:endParaRPr lang="en-US" sz="1200" dirty="0"/>
+              <a:t>Securite comptable → T18</a:t>
+            </a:r>
+            <a:endParaRPr lang="en-US" sz="1100" dirty="0"/>
           </a:p>
         </p:txBody>
       </p:sp>
@@ -5085,8 +4936,8 @@
         </p:nvSpPr>
         <p:spPr>
           <a:xfrm>
-            <a:off x="457200" y="3108960"/>
-            <a:ext cx="8229600" cy="521208"/>
+            <a:off x="457200" y="2880360"/>
+            <a:ext cx="8229600" cy="475488"/>
           </a:xfrm>
           <a:prstGeom prst="rect">
             <a:avLst/>
@@ -5095,13 +4946,6 @@
             <a:srgbClr val="FFFFFF"/>
           </a:solidFill>
           <a:ln/>
-          <a:effectLst>
-            <a:outerShdw sx="100000" sy="100000" kx="0" ky="0" algn="bl" rotWithShape="0" blurRad="50800" dist="25400" dir="8100000">
-              <a:srgbClr val="000000">
-                <a:alpha val="12000"/>
-              </a:srgbClr>
-            </a:outerShdw>
-          </a:effectLst>
         </p:spPr>
       </p:sp>
       <p:sp>
@@ -5112,8 +4956,8 @@
         </p:nvSpPr>
         <p:spPr>
           <a:xfrm>
-            <a:off x="457200" y="3108960"/>
-            <a:ext cx="45720" cy="521208"/>
+            <a:off x="457200" y="2880360"/>
+            <a:ext cx="45720" cy="475488"/>
           </a:xfrm>
           <a:prstGeom prst="rect">
             <a:avLst/>
@@ -5132,8 +4976,8 @@
         </p:nvSpPr>
         <p:spPr>
           <a:xfrm>
-            <a:off x="685800" y="3108960"/>
-            <a:ext cx="7818120" cy="521208"/>
+            <a:off x="640080" y="2880360"/>
+            <a:ext cx="7863840" cy="475488"/>
           </a:xfrm>
           <a:prstGeom prst="rect">
             <a:avLst/>
@@ -5149,7 +4993,7 @@
               <a:buNone/>
             </a:pPr>
             <a:r>
-              <a:rPr lang="en-US" sz="1200" dirty="0">
+              <a:rPr lang="en-US" sz="1100" dirty="0">
                 <a:solidFill>
                   <a:srgbClr val="1A1A2E"/>
                 </a:solidFill>
@@ -5157,9 +5001,9 @@
                 <a:ea typeface="Calibri" pitchFamily="34" charset="-122"/>
                 <a:cs typeface="Calibri" pitchFamily="34" charset="-120"/>
               </a:rPr>
-              <a:t>Calculer le taux de couverture visé</a:t>
-            </a:r>
-            <a:endParaRPr lang="en-US" sz="1200" dirty="0"/>
+              <a:t>Integrite FK → T03, T04</a:t>
+            </a:r>
+            <a:endParaRPr lang="en-US" sz="1100" dirty="0"/>
           </a:p>
         </p:txBody>
       </p:sp>
@@ -5171,8 +5015,8 @@
         </p:nvSpPr>
         <p:spPr>
           <a:xfrm>
-            <a:off x="457200" y="3657600"/>
-            <a:ext cx="8229600" cy="521208"/>
+            <a:off x="457200" y="3383280"/>
+            <a:ext cx="8229600" cy="475488"/>
           </a:xfrm>
           <a:prstGeom prst="rect">
             <a:avLst/>
@@ -5181,13 +5025,6 @@
             <a:srgbClr val="FFF3E0"/>
           </a:solidFill>
           <a:ln/>
-          <a:effectLst>
-            <a:outerShdw sx="100000" sy="100000" kx="0" ky="0" algn="bl" rotWithShape="0" blurRad="50800" dist="25400" dir="8100000">
-              <a:srgbClr val="000000">
-                <a:alpha val="12000"/>
-              </a:srgbClr>
-            </a:outerShdw>
-          </a:effectLst>
         </p:spPr>
       </p:sp>
       <p:sp>
@@ -5198,8 +5035,8 @@
         </p:nvSpPr>
         <p:spPr>
           <a:xfrm>
-            <a:off x="457200" y="3657600"/>
-            <a:ext cx="45720" cy="521208"/>
+            <a:off x="457200" y="3383280"/>
+            <a:ext cx="45720" cy="475488"/>
           </a:xfrm>
           <a:prstGeom prst="rect">
             <a:avLst/>
@@ -5218,8 +5055,8 @@
         </p:nvSpPr>
         <p:spPr>
           <a:xfrm>
-            <a:off x="685800" y="3657600"/>
-            <a:ext cx="7818120" cy="521208"/>
+            <a:off x="640080" y="3383280"/>
+            <a:ext cx="7863840" cy="475488"/>
           </a:xfrm>
           <a:prstGeom prst="rect">
             <a:avLst/>
@@ -5235,7 +5072,7 @@
               <a:buNone/>
             </a:pPr>
             <a:r>
-              <a:rPr lang="en-US" sz="1200" dirty="0">
+              <a:rPr lang="en-US" sz="1100" dirty="0">
                 <a:solidFill>
                   <a:srgbClr val="1A1A2E"/>
                 </a:solidFill>
@@ -5243,9 +5080,88 @@
                 <a:ea typeface="Calibri" pitchFamily="34" charset="-122"/>
                 <a:cs typeface="Calibri" pitchFamily="34" charset="-120"/>
               </a:rPr>
-              <a:t>DÉFI : ajouter 5 cas de test pour les cas limites extrêmes (NULL, 0, overflow)</a:t>
-            </a:r>
-            <a:endParaRPr lang="en-US" sz="1200" dirty="0"/>
+              <a:t>Si un besoin n'a PAS de test → couverture incomplete</a:t>
+            </a:r>
+            <a:endParaRPr lang="en-US" sz="1100" dirty="0"/>
+          </a:p>
+        </p:txBody>
+      </p:sp>
+      <p:sp>
+        <p:nvSpPr>
+          <p:cNvPr id="22" name="Shape 20"/>
+          <p:cNvSpPr/>
+          <p:nvPr/>
+        </p:nvSpPr>
+        <p:spPr>
+          <a:xfrm>
+            <a:off x="457200" y="3886200"/>
+            <a:ext cx="8229600" cy="475488"/>
+          </a:xfrm>
+          <a:prstGeom prst="rect">
+            <a:avLst/>
+          </a:prstGeom>
+          <a:solidFill>
+            <a:srgbClr val="FFFFFF"/>
+          </a:solidFill>
+          <a:ln/>
+        </p:spPr>
+      </p:sp>
+      <p:sp>
+        <p:nvSpPr>
+          <p:cNvPr id="23" name="Shape 21"/>
+          <p:cNvSpPr/>
+          <p:nvPr/>
+        </p:nvSpPr>
+        <p:spPr>
+          <a:xfrm>
+            <a:off x="457200" y="3886200"/>
+            <a:ext cx="45720" cy="475488"/>
+          </a:xfrm>
+          <a:prstGeom prst="rect">
+            <a:avLst/>
+          </a:prstGeom>
+          <a:solidFill>
+            <a:srgbClr val="E65100"/>
+          </a:solidFill>
+          <a:ln/>
+        </p:spPr>
+      </p:sp>
+      <p:sp>
+        <p:nvSpPr>
+          <p:cNvPr id="24" name="Text 22"/>
+          <p:cNvSpPr/>
+          <p:nvPr/>
+        </p:nvSpPr>
+        <p:spPr>
+          <a:xfrm>
+            <a:off x="640080" y="3886200"/>
+            <a:ext cx="7863840" cy="475488"/>
+          </a:xfrm>
+          <a:prstGeom prst="rect">
+            <a:avLst/>
+          </a:prstGeom>
+          <a:noFill/>
+          <a:ln/>
+        </p:spPr>
+        <p:txBody>
+          <a:bodyPr wrap="square" lIns="0" tIns="0" rIns="0" bIns="0" rtlCol="0" anchor="ctr"/>
+          <a:lstStyle/>
+          <a:p>
+            <a:pPr indent="0" marL="0">
+              <a:buNone/>
+            </a:pPr>
+            <a:r>
+              <a:rPr lang="en-US" sz="1100" dirty="0">
+                <a:solidFill>
+                  <a:srgbClr val="1A1A2E"/>
+                </a:solidFill>
+                <a:latin typeface="Calibri" pitchFamily="34" charset="0"/>
+                <a:ea typeface="Calibri" pitchFamily="34" charset="-122"/>
+                <a:cs typeface="Calibri" pitchFamily="34" charset="-120"/>
+              </a:rPr>
+              <a:t>Objectif : couverture 100% des besoins critiques</a:t>
+            </a:r>
+            <a:endParaRPr lang="en-US" sz="1100" dirty="0"/>
           </a:p>
         </p:txBody>
       </p:sp>
@@ -5260,6 +5176,571 @@
 <file path=ppt/slides/slide7.xml><?xml version="1.0" encoding="utf-8"?>
 <p:sld xmlns:a="http://schemas.openxmlformats.org/drawingml/2006/main" xmlns:r="http://schemas.openxmlformats.org/officeDocument/2006/relationships" xmlns:p="http://schemas.openxmlformats.org/presentationml/2006/main">
   <p:cSld name="Slide 7">
+    <p:bg>
+      <p:bgPr>
+        <a:solidFill>
+          <a:srgbClr val="F5F7FA"/>
+        </a:solidFill>
+      </p:bgPr>
+    </p:bg>
+    <p:spTree>
+      <p:nvGrpSpPr>
+        <p:cNvPr id="1" name=""/>
+        <p:cNvGrpSpPr/>
+        <p:nvPr/>
+      </p:nvGrpSpPr>
+      <p:grpSpPr>
+        <a:xfrm>
+          <a:off x="0" y="0"/>
+          <a:ext cx="0" cy="0"/>
+          <a:chOff x="0" y="0"/>
+          <a:chExt cx="0" cy="0"/>
+        </a:xfrm>
+      </p:grpSpPr>
+      <p:sp>
+        <p:nvSpPr>
+          <p:cNvPr id="2" name="Shape 0"/>
+          <p:cNvSpPr/>
+          <p:nvPr/>
+        </p:nvSpPr>
+        <p:spPr>
+          <a:xfrm>
+            <a:off x="0" y="0"/>
+            <a:ext cx="9144000" cy="54864"/>
+          </a:xfrm>
+          <a:prstGeom prst="rect">
+            <a:avLst/>
+          </a:prstGeom>
+          <a:solidFill>
+            <a:srgbClr val="E65100"/>
+          </a:solidFill>
+          <a:ln/>
+        </p:spPr>
+      </p:sp>
+      <p:sp>
+        <p:nvSpPr>
+          <p:cNvPr id="3" name="Text 1"/>
+          <p:cNvSpPr/>
+          <p:nvPr/>
+        </p:nvSpPr>
+        <p:spPr>
+          <a:xfrm>
+            <a:off x="457200" y="182880"/>
+            <a:ext cx="8229600" cy="548640"/>
+          </a:xfrm>
+          <a:prstGeom prst="rect">
+            <a:avLst/>
+          </a:prstGeom>
+          <a:noFill/>
+          <a:ln/>
+        </p:spPr>
+        <p:txBody>
+          <a:bodyPr wrap="square" lIns="0" tIns="0" rIns="0" bIns="0" rtlCol="0" anchor="ctr"/>
+          <a:lstStyle/>
+          <a:p>
+            <a:pPr indent="0" marL="0">
+              <a:buNone/>
+            </a:pPr>
+            <a:r>
+              <a:rPr lang="en-US" sz="2200" b="1" dirty="0">
+                <a:solidFill>
+                  <a:srgbClr val="BF360C"/>
+                </a:solidFill>
+                <a:latin typeface="Trebuchet MS" pitchFamily="34" charset="0"/>
+                <a:ea typeface="Trebuchet MS" pitchFamily="34" charset="-122"/>
+                <a:cs typeface="Trebuchet MS" pitchFamily="34" charset="-120"/>
+              </a:rPr>
+              <a:t>Exercice Module 17</a:t>
+            </a:r>
+            <a:endParaRPr lang="en-US" sz="2200" dirty="0"/>
+          </a:p>
+        </p:txBody>
+      </p:sp>
+      <p:sp>
+        <p:nvSpPr>
+          <p:cNvPr id="4" name="Shape 2"/>
+          <p:cNvSpPr/>
+          <p:nvPr/>
+        </p:nvSpPr>
+        <p:spPr>
+          <a:xfrm>
+            <a:off x="457200" y="868680"/>
+            <a:ext cx="8229600" cy="475488"/>
+          </a:xfrm>
+          <a:prstGeom prst="rect">
+            <a:avLst/>
+          </a:prstGeom>
+          <a:solidFill>
+            <a:srgbClr val="FFFFFF"/>
+          </a:solidFill>
+          <a:ln/>
+        </p:spPr>
+      </p:sp>
+      <p:sp>
+        <p:nvSpPr>
+          <p:cNvPr id="5" name="Shape 3"/>
+          <p:cNvSpPr/>
+          <p:nvPr/>
+        </p:nvSpPr>
+        <p:spPr>
+          <a:xfrm>
+            <a:off x="457200" y="868680"/>
+            <a:ext cx="45720" cy="475488"/>
+          </a:xfrm>
+          <a:prstGeom prst="rect">
+            <a:avLst/>
+          </a:prstGeom>
+          <a:solidFill>
+            <a:srgbClr val="E65100"/>
+          </a:solidFill>
+          <a:ln/>
+        </p:spPr>
+      </p:sp>
+      <p:sp>
+        <p:nvSpPr>
+          <p:cNvPr id="6" name="Text 4"/>
+          <p:cNvSpPr/>
+          <p:nvPr/>
+        </p:nvSpPr>
+        <p:spPr>
+          <a:xfrm>
+            <a:off x="640080" y="868680"/>
+            <a:ext cx="7863840" cy="475488"/>
+          </a:xfrm>
+          <a:prstGeom prst="rect">
+            <a:avLst/>
+          </a:prstGeom>
+          <a:noFill/>
+          <a:ln/>
+        </p:spPr>
+        <p:txBody>
+          <a:bodyPr wrap="square" lIns="0" tIns="0" rIns="0" bIns="0" rtlCol="0" anchor="ctr"/>
+          <a:lstStyle/>
+          <a:p>
+            <a:pPr indent="0" marL="0">
+              <a:buNone/>
+            </a:pPr>
+            <a:r>
+              <a:rPr lang="en-US" sz="1100" dirty="0">
+                <a:solidFill>
+                  <a:srgbClr val="1A1A2E"/>
+                </a:solidFill>
+                <a:latin typeface="Calibri" pitchFamily="34" charset="0"/>
+                <a:ea typeface="Calibri" pitchFamily="34" charset="-122"/>
+                <a:cs typeface="Calibri" pitchFamily="34" charset="-120"/>
+              </a:rPr>
+              <a:t>1. Rediger 20 cas de test (template fourni)</a:t>
+            </a:r>
+            <a:endParaRPr lang="en-US" sz="1100" dirty="0"/>
+          </a:p>
+        </p:txBody>
+      </p:sp>
+      <p:sp>
+        <p:nvSpPr>
+          <p:cNvPr id="7" name="Shape 5"/>
+          <p:cNvSpPr/>
+          <p:nvPr/>
+        </p:nvSpPr>
+        <p:spPr>
+          <a:xfrm>
+            <a:off x="457200" y="1371600"/>
+            <a:ext cx="8229600" cy="475488"/>
+          </a:xfrm>
+          <a:prstGeom prst="rect">
+            <a:avLst/>
+          </a:prstGeom>
+          <a:solidFill>
+            <a:srgbClr val="FFF3E0"/>
+          </a:solidFill>
+          <a:ln/>
+        </p:spPr>
+      </p:sp>
+      <p:sp>
+        <p:nvSpPr>
+          <p:cNvPr id="8" name="Shape 6"/>
+          <p:cNvSpPr/>
+          <p:nvPr/>
+        </p:nvSpPr>
+        <p:spPr>
+          <a:xfrm>
+            <a:off x="457200" y="1371600"/>
+            <a:ext cx="45720" cy="475488"/>
+          </a:xfrm>
+          <a:prstGeom prst="rect">
+            <a:avLst/>
+          </a:prstGeom>
+          <a:solidFill>
+            <a:srgbClr val="E65100"/>
+          </a:solidFill>
+          <a:ln/>
+        </p:spPr>
+      </p:sp>
+      <p:sp>
+        <p:nvSpPr>
+          <p:cNvPr id="9" name="Text 7"/>
+          <p:cNvSpPr/>
+          <p:nvPr/>
+        </p:nvSpPr>
+        <p:spPr>
+          <a:xfrm>
+            <a:off x="640080" y="1371600"/>
+            <a:ext cx="7863840" cy="475488"/>
+          </a:xfrm>
+          <a:prstGeom prst="rect">
+            <a:avLst/>
+          </a:prstGeom>
+          <a:noFill/>
+          <a:ln/>
+        </p:spPr>
+        <p:txBody>
+          <a:bodyPr wrap="square" lIns="0" tIns="0" rIns="0" bIns="0" rtlCol="0" anchor="ctr"/>
+          <a:lstStyle/>
+          <a:p>
+            <a:pPr indent="0" marL="0">
+              <a:buNone/>
+            </a:pPr>
+            <a:r>
+              <a:rPr lang="en-US" sz="1100" dirty="0">
+                <a:solidFill>
+                  <a:srgbClr val="1A1A2E"/>
+                </a:solidFill>
+                <a:latin typeface="Calibri" pitchFamily="34" charset="0"/>
+                <a:ea typeface="Calibri" pitchFamily="34" charset="-122"/>
+                <a:cs typeface="Calibri" pitchFamily="34" charset="-120"/>
+              </a:rPr>
+              <a:t>2. Couvrir : 5 contraintes, 5 SELECT, 5 JOIN, 3 securite, 2 procedures</a:t>
+            </a:r>
+            <a:endParaRPr lang="en-US" sz="1100" dirty="0"/>
+          </a:p>
+        </p:txBody>
+      </p:sp>
+      <p:sp>
+        <p:nvSpPr>
+          <p:cNvPr id="10" name="Shape 8"/>
+          <p:cNvSpPr/>
+          <p:nvPr/>
+        </p:nvSpPr>
+        <p:spPr>
+          <a:xfrm>
+            <a:off x="457200" y="1874520"/>
+            <a:ext cx="8229600" cy="475488"/>
+          </a:xfrm>
+          <a:prstGeom prst="rect">
+            <a:avLst/>
+          </a:prstGeom>
+          <a:solidFill>
+            <a:srgbClr val="FFFFFF"/>
+          </a:solidFill>
+          <a:ln/>
+        </p:spPr>
+      </p:sp>
+      <p:sp>
+        <p:nvSpPr>
+          <p:cNvPr id="11" name="Shape 9"/>
+          <p:cNvSpPr/>
+          <p:nvPr/>
+        </p:nvSpPr>
+        <p:spPr>
+          <a:xfrm>
+            <a:off x="457200" y="1874520"/>
+            <a:ext cx="45720" cy="475488"/>
+          </a:xfrm>
+          <a:prstGeom prst="rect">
+            <a:avLst/>
+          </a:prstGeom>
+          <a:solidFill>
+            <a:srgbClr val="E65100"/>
+          </a:solidFill>
+          <a:ln/>
+        </p:spPr>
+      </p:sp>
+      <p:sp>
+        <p:nvSpPr>
+          <p:cNvPr id="12" name="Text 10"/>
+          <p:cNvSpPr/>
+          <p:nvPr/>
+        </p:nvSpPr>
+        <p:spPr>
+          <a:xfrm>
+            <a:off x="640080" y="1874520"/>
+            <a:ext cx="7863840" cy="475488"/>
+          </a:xfrm>
+          <a:prstGeom prst="rect">
+            <a:avLst/>
+          </a:prstGeom>
+          <a:noFill/>
+          <a:ln/>
+        </p:spPr>
+        <p:txBody>
+          <a:bodyPr wrap="square" lIns="0" tIns="0" rIns="0" bIns="0" rtlCol="0" anchor="ctr"/>
+          <a:lstStyle/>
+          <a:p>
+            <a:pPr indent="0" marL="0">
+              <a:buNone/>
+            </a:pPr>
+            <a:r>
+              <a:rPr lang="en-US" sz="1100" dirty="0">
+                <a:solidFill>
+                  <a:srgbClr val="1A1A2E"/>
+                </a:solidFill>
+                <a:latin typeface="Calibri" pitchFamily="34" charset="0"/>
+                <a:ea typeface="Calibri" pitchFamily="34" charset="-122"/>
+                <a:cs typeface="Calibri" pitchFamily="34" charset="-120"/>
+              </a:rPr>
+              <a:t>3. Pour chaque : donnees normales + limites + erronees</a:t>
+            </a:r>
+            <a:endParaRPr lang="en-US" sz="1100" dirty="0"/>
+          </a:p>
+        </p:txBody>
+      </p:sp>
+      <p:sp>
+        <p:nvSpPr>
+          <p:cNvPr id="13" name="Shape 11"/>
+          <p:cNvSpPr/>
+          <p:nvPr/>
+        </p:nvSpPr>
+        <p:spPr>
+          <a:xfrm>
+            <a:off x="457200" y="2377440"/>
+            <a:ext cx="8229600" cy="475488"/>
+          </a:xfrm>
+          <a:prstGeom prst="rect">
+            <a:avLst/>
+          </a:prstGeom>
+          <a:solidFill>
+            <a:srgbClr val="FFF3E0"/>
+          </a:solidFill>
+          <a:ln/>
+        </p:spPr>
+      </p:sp>
+      <p:sp>
+        <p:nvSpPr>
+          <p:cNvPr id="14" name="Shape 12"/>
+          <p:cNvSpPr/>
+          <p:nvPr/>
+        </p:nvSpPr>
+        <p:spPr>
+          <a:xfrm>
+            <a:off x="457200" y="2377440"/>
+            <a:ext cx="45720" cy="475488"/>
+          </a:xfrm>
+          <a:prstGeom prst="rect">
+            <a:avLst/>
+          </a:prstGeom>
+          <a:solidFill>
+            <a:srgbClr val="E65100"/>
+          </a:solidFill>
+          <a:ln/>
+        </p:spPr>
+      </p:sp>
+      <p:sp>
+        <p:nvSpPr>
+          <p:cNvPr id="15" name="Text 13"/>
+          <p:cNvSpPr/>
+          <p:nvPr/>
+        </p:nvSpPr>
+        <p:spPr>
+          <a:xfrm>
+            <a:off x="640080" y="2377440"/>
+            <a:ext cx="7863840" cy="475488"/>
+          </a:xfrm>
+          <a:prstGeom prst="rect">
+            <a:avLst/>
+          </a:prstGeom>
+          <a:noFill/>
+          <a:ln/>
+        </p:spPr>
+        <p:txBody>
+          <a:bodyPr wrap="square" lIns="0" tIns="0" rIns="0" bIns="0" rtlCol="0" anchor="ctr"/>
+          <a:lstStyle/>
+          <a:p>
+            <a:pPr indent="0" marL="0">
+              <a:buNone/>
+            </a:pPr>
+            <a:r>
+              <a:rPr lang="en-US" sz="1100" dirty="0">
+                <a:solidFill>
+                  <a:srgbClr val="1A1A2E"/>
+                </a:solidFill>
+                <a:latin typeface="Calibri" pitchFamily="34" charset="0"/>
+                <a:ea typeface="Calibri" pitchFamily="34" charset="-122"/>
+                <a:cs typeface="Calibri" pitchFamily="34" charset="-120"/>
+              </a:rPr>
+              <a:t>4. Creer la matrice de tracabilite (test ↔ besoin)</a:t>
+            </a:r>
+            <a:endParaRPr lang="en-US" sz="1100" dirty="0"/>
+          </a:p>
+        </p:txBody>
+      </p:sp>
+      <p:sp>
+        <p:nvSpPr>
+          <p:cNvPr id="16" name="Shape 14"/>
+          <p:cNvSpPr/>
+          <p:nvPr/>
+        </p:nvSpPr>
+        <p:spPr>
+          <a:xfrm>
+            <a:off x="457200" y="2880360"/>
+            <a:ext cx="8229600" cy="475488"/>
+          </a:xfrm>
+          <a:prstGeom prst="rect">
+            <a:avLst/>
+          </a:prstGeom>
+          <a:solidFill>
+            <a:srgbClr val="FFFFFF"/>
+          </a:solidFill>
+          <a:ln/>
+        </p:spPr>
+      </p:sp>
+      <p:sp>
+        <p:nvSpPr>
+          <p:cNvPr id="17" name="Shape 15"/>
+          <p:cNvSpPr/>
+          <p:nvPr/>
+        </p:nvSpPr>
+        <p:spPr>
+          <a:xfrm>
+            <a:off x="457200" y="2880360"/>
+            <a:ext cx="45720" cy="475488"/>
+          </a:xfrm>
+          <a:prstGeom prst="rect">
+            <a:avLst/>
+          </a:prstGeom>
+          <a:solidFill>
+            <a:srgbClr val="E65100"/>
+          </a:solidFill>
+          <a:ln/>
+        </p:spPr>
+      </p:sp>
+      <p:sp>
+        <p:nvSpPr>
+          <p:cNvPr id="18" name="Text 16"/>
+          <p:cNvSpPr/>
+          <p:nvPr/>
+        </p:nvSpPr>
+        <p:spPr>
+          <a:xfrm>
+            <a:off x="640080" y="2880360"/>
+            <a:ext cx="7863840" cy="475488"/>
+          </a:xfrm>
+          <a:prstGeom prst="rect">
+            <a:avLst/>
+          </a:prstGeom>
+          <a:noFill/>
+          <a:ln/>
+        </p:spPr>
+        <p:txBody>
+          <a:bodyPr wrap="square" lIns="0" tIns="0" rIns="0" bIns="0" rtlCol="0" anchor="ctr"/>
+          <a:lstStyle/>
+          <a:p>
+            <a:pPr indent="0" marL="0">
+              <a:buNone/>
+            </a:pPr>
+            <a:r>
+              <a:rPr lang="en-US" sz="1100" dirty="0">
+                <a:solidFill>
+                  <a:srgbClr val="1A1A2E"/>
+                </a:solidFill>
+                <a:latin typeface="Calibri" pitchFamily="34" charset="0"/>
+                <a:ea typeface="Calibri" pitchFamily="34" charset="-122"/>
+                <a:cs typeface="Calibri" pitchFamily="34" charset="-120"/>
+              </a:rPr>
+              <a:t>5. Calculer le taux de couverture vise</a:t>
+            </a:r>
+            <a:endParaRPr lang="en-US" sz="1100" dirty="0"/>
+          </a:p>
+        </p:txBody>
+      </p:sp>
+      <p:sp>
+        <p:nvSpPr>
+          <p:cNvPr id="19" name="Shape 17"/>
+          <p:cNvSpPr/>
+          <p:nvPr/>
+        </p:nvSpPr>
+        <p:spPr>
+          <a:xfrm>
+            <a:off x="457200" y="3383280"/>
+            <a:ext cx="8229600" cy="475488"/>
+          </a:xfrm>
+          <a:prstGeom prst="rect">
+            <a:avLst/>
+          </a:prstGeom>
+          <a:solidFill>
+            <a:srgbClr val="FFF3E0"/>
+          </a:solidFill>
+          <a:ln/>
+        </p:spPr>
+      </p:sp>
+      <p:sp>
+        <p:nvSpPr>
+          <p:cNvPr id="20" name="Shape 18"/>
+          <p:cNvSpPr/>
+          <p:nvPr/>
+        </p:nvSpPr>
+        <p:spPr>
+          <a:xfrm>
+            <a:off x="457200" y="3383280"/>
+            <a:ext cx="45720" cy="475488"/>
+          </a:xfrm>
+          <a:prstGeom prst="rect">
+            <a:avLst/>
+          </a:prstGeom>
+          <a:solidFill>
+            <a:srgbClr val="E65100"/>
+          </a:solidFill>
+          <a:ln/>
+        </p:spPr>
+      </p:sp>
+      <p:sp>
+        <p:nvSpPr>
+          <p:cNvPr id="21" name="Text 19"/>
+          <p:cNvSpPr/>
+          <p:nvPr/>
+        </p:nvSpPr>
+        <p:spPr>
+          <a:xfrm>
+            <a:off x="640080" y="3383280"/>
+            <a:ext cx="7863840" cy="475488"/>
+          </a:xfrm>
+          <a:prstGeom prst="rect">
+            <a:avLst/>
+          </a:prstGeom>
+          <a:noFill/>
+          <a:ln/>
+        </p:spPr>
+        <p:txBody>
+          <a:bodyPr wrap="square" lIns="0" tIns="0" rIns="0" bIns="0" rtlCol="0" anchor="ctr"/>
+          <a:lstStyle/>
+          <a:p>
+            <a:pPr indent="0" marL="0">
+              <a:buNone/>
+            </a:pPr>
+            <a:r>
+              <a:rPr lang="en-US" sz="1100" dirty="0">
+                <a:solidFill>
+                  <a:srgbClr val="1A1A2E"/>
+                </a:solidFill>
+                <a:latin typeface="Calibri" pitchFamily="34" charset="0"/>
+                <a:ea typeface="Calibri" pitchFamily="34" charset="-122"/>
+                <a:cs typeface="Calibri" pitchFamily="34" charset="-120"/>
+              </a:rPr>
+              <a:t>DEFI : 5 cas limites extremes (NULL, 0, overflow, '' vide)</a:t>
+            </a:r>
+            <a:endParaRPr lang="en-US" sz="1100" dirty="0"/>
+          </a:p>
+        </p:txBody>
+      </p:sp>
+    </p:spTree>
+  </p:cSld>
+  <p:clrMapOvr>
+    <a:masterClrMapping/>
+  </p:clrMapOvr>
+</p:sld>
+</file>
+
+<file path=ppt/slides/slide8.xml><?xml version="1.0" encoding="utf-8"?>
+<p:sld xmlns:a="http://schemas.openxmlformats.org/drawingml/2006/main" xmlns:r="http://schemas.openxmlformats.org/officeDocument/2006/relationships" xmlns:p="http://schemas.openxmlformats.org/presentationml/2006/main">
+  <p:cSld name="Slide 8">
     <p:bg>
       <p:bgPr>
         <a:solidFill>
@@ -5289,8 +5770,8 @@
         </p:nvSpPr>
         <p:spPr>
           <a:xfrm>
-            <a:off x="3840480" y="457200"/>
-            <a:ext cx="1463040" cy="1097280"/>
+            <a:off x="457200" y="1828800"/>
+            <a:ext cx="8229600" cy="548640"/>
           </a:xfrm>
           <a:prstGeom prst="rect">
             <a:avLst/>
@@ -5306,43 +5787,7 @@
               <a:buNone/>
             </a:pPr>
             <a:r>
-              <a:rPr lang="en-US" sz="6000" dirty="0">
-                <a:solidFill>
-                  <a:srgbClr val="000000"/>
-                </a:solidFill>
-              </a:rPr>
-              <a:t>🎮</a:t>
-            </a:r>
-            <a:endParaRPr lang="en-US" sz="6000" dirty="0"/>
-          </a:p>
-        </p:txBody>
-      </p:sp>
-      <p:sp>
-        <p:nvSpPr>
-          <p:cNvPr id="3" name="Text 1"/>
-          <p:cNvSpPr/>
-          <p:nvPr/>
-        </p:nvSpPr>
-        <p:spPr>
-          <a:xfrm>
-            <a:off x="457200" y="1645920"/>
-            <a:ext cx="8229600" cy="548640"/>
-          </a:xfrm>
-          <a:prstGeom prst="rect">
-            <a:avLst/>
-          </a:prstGeom>
-          <a:noFill/>
-          <a:ln/>
-        </p:spPr>
-        <p:txBody>
-          <a:bodyPr wrap="square" lIns="0" tIns="0" rIns="0" bIns="0" rtlCol="0" anchor="ctr"/>
-          <a:lstStyle/>
-          <a:p>
-            <a:pPr algn="ctr" indent="0" marL="0">
-              <a:buNone/>
-            </a:pPr>
-            <a:r>
-              <a:rPr lang="en-US" sz="2600" b="1" dirty="0">
+              <a:rPr lang="en-US" sz="2400" b="1" dirty="0">
                 <a:solidFill>
                   <a:srgbClr val="FFFFFF"/>
                 </a:solidFill>
@@ -5352,20 +5797,20 @@
               </a:rPr>
               <a:t>Mini-jeu : Le Testeur Fou</a:t>
             </a:r>
-            <a:endParaRPr lang="en-US" sz="2600" dirty="0"/>
-          </a:p>
-        </p:txBody>
-      </p:sp>
-      <p:sp>
-        <p:nvSpPr>
-          <p:cNvPr id="4" name="Text 2"/>
-          <p:cNvSpPr/>
-          <p:nvPr/>
-        </p:nvSpPr>
-        <p:spPr>
-          <a:xfrm>
-            <a:off x="1371600" y="2286000"/>
-            <a:ext cx="6400800" cy="731520"/>
+            <a:endParaRPr lang="en-US" sz="2400" dirty="0"/>
+          </a:p>
+        </p:txBody>
+      </p:sp>
+      <p:sp>
+        <p:nvSpPr>
+          <p:cNvPr id="3" name="Text 1"/>
+          <p:cNvSpPr/>
+          <p:nvPr/>
+        </p:nvSpPr>
+        <p:spPr>
+          <a:xfrm>
+            <a:off x="1371600" y="2468880"/>
+            <a:ext cx="6400800" cy="640080"/>
           </a:xfrm>
           <a:prstGeom prst="rect">
             <a:avLst/>
@@ -5381,7 +5826,7 @@
               <a:buNone/>
             </a:pPr>
             <a:r>
-              <a:rPr lang="en-US" sz="1400" dirty="0">
+              <a:rPr lang="en-US" sz="1300" dirty="0">
                 <a:solidFill>
                   <a:srgbClr val="CCCCCC"/>
                 </a:solidFill>
@@ -5389,68 +5834,9 @@
                 <a:ea typeface="Calibri" pitchFamily="34" charset="-122"/>
                 <a:cs typeface="Calibri" pitchFamily="34" charset="-120"/>
               </a:rPr>
-              <a:t>Prédisez les résultats avant d'exécuter !</a:t>
-            </a:r>
-            <a:endParaRPr lang="en-US" sz="1400" dirty="0"/>
-          </a:p>
-        </p:txBody>
-      </p:sp>
-      <p:sp>
-        <p:nvSpPr>
-          <p:cNvPr id="5" name="Shape 3"/>
-          <p:cNvSpPr/>
-          <p:nvPr/>
-        </p:nvSpPr>
-        <p:spPr>
-          <a:xfrm>
-            <a:off x="2286000" y="3291840"/>
-            <a:ext cx="4572000" cy="548640"/>
-          </a:xfrm>
-          <a:prstGeom prst="rect">
-            <a:avLst/>
-          </a:prstGeom>
-          <a:solidFill>
-            <a:srgbClr val="1565C0"/>
-          </a:solidFill>
-          <a:ln/>
-        </p:spPr>
-      </p:sp>
-      <p:sp>
-        <p:nvSpPr>
-          <p:cNvPr id="6" name="Text 4"/>
-          <p:cNvSpPr/>
-          <p:nvPr/>
-        </p:nvSpPr>
-        <p:spPr>
-          <a:xfrm>
-            <a:off x="2286000" y="3291840"/>
-            <a:ext cx="4572000" cy="548640"/>
-          </a:xfrm>
-          <a:prstGeom prst="rect">
-            <a:avLst/>
-          </a:prstGeom>
-          <a:noFill/>
-          <a:ln/>
-        </p:spPr>
-        <p:txBody>
-          <a:bodyPr wrap="square" lIns="0" tIns="0" rIns="0" bIns="0" rtlCol="0" anchor="ctr"/>
-          <a:lstStyle/>
-          <a:p>
-            <a:pPr algn="ctr" indent="0" marL="0">
-              <a:buNone/>
-            </a:pPr>
-            <a:r>
-              <a:rPr lang="en-US" sz="1800" b="1" dirty="0">
-                <a:solidFill>
-                  <a:srgbClr val="FFFFFF"/>
-                </a:solidFill>
-                <a:latin typeface="Trebuchet MS" pitchFamily="34" charset="0"/>
-                <a:ea typeface="Trebuchet MS" pitchFamily="34" charset="-122"/>
-                <a:cs typeface="Trebuchet MS" pitchFamily="34" charset="-120"/>
-              </a:rPr>
-              <a:t>▶  Lancer le jeu</a:t>
-            </a:r>
-            <a:endParaRPr lang="en-US" sz="1800" dirty="0"/>
+              <a:t>Predisez les resultats avant d'executer</a:t>
+            </a:r>
+            <a:endParaRPr lang="en-US" sz="1300" dirty="0"/>
           </a:p>
         </p:txBody>
       </p:sp>
@@ -5462,9 +5848,9 @@
 </p:sld>
 </file>
 
-<file path=ppt/slides/slide8.xml><?xml version="1.0" encoding="utf-8"?>
+<file path=ppt/slides/slide9.xml><?xml version="1.0" encoding="utf-8"?>
 <p:sld xmlns:a="http://schemas.openxmlformats.org/drawingml/2006/main" xmlns:r="http://schemas.openxmlformats.org/officeDocument/2006/relationships" xmlns:p="http://schemas.openxmlformats.org/presentationml/2006/main">
-  <p:cSld name="Slide 8">
+  <p:cSld name="Slide 9">
     <p:bg>
       <p:bgPr>
         <a:solidFill>
@@ -5495,7 +5881,7 @@
         <p:spPr>
           <a:xfrm>
             <a:off x="457200" y="137160"/>
-            <a:ext cx="5486400" cy="411480"/>
+            <a:ext cx="5486400" cy="365760"/>
           </a:xfrm>
           <a:prstGeom prst="rect">
             <a:avLst/>
@@ -5511,7 +5897,7 @@
               <a:buNone/>
             </a:pPr>
             <a:r>
-              <a:rPr lang="en-US" sz="1800" b="1" dirty="0">
+              <a:rPr lang="en-US" sz="1600" b="1" dirty="0">
                 <a:solidFill>
                   <a:srgbClr val="BF360C"/>
                 </a:solidFill>
@@ -5519,9 +5905,9 @@
                 <a:ea typeface="Trebuchet MS" pitchFamily="34" charset="-122"/>
                 <a:cs typeface="Trebuchet MS" pitchFamily="34" charset="-120"/>
               </a:rPr>
-              <a:t>📋 Mémo Module 17</a:t>
-            </a:r>
-            <a:endParaRPr lang="en-US" sz="1800" dirty="0"/>
+              <a:t>Memo Module 17</a:t>
+            </a:r>
+            <a:endParaRPr lang="en-US" sz="1600" dirty="0"/>
           </a:p>
         </p:txBody>
       </p:sp>
@@ -5533,8 +5919,8 @@
         </p:nvSpPr>
         <p:spPr>
           <a:xfrm>
-            <a:off x="457200" y="548640"/>
-            <a:ext cx="8229600" cy="274320"/>
+            <a:off x="457200" y="640080"/>
+            <a:ext cx="2286000" cy="429768"/>
           </a:xfrm>
           <a:prstGeom prst="rect">
             <a:avLst/>
@@ -5553,67 +5939,8 @@
         </p:nvSpPr>
         <p:spPr>
           <a:xfrm>
-            <a:off x="640080" y="548640"/>
-            <a:ext cx="7772400" cy="274320"/>
-          </a:xfrm>
-          <a:prstGeom prst="rect">
-            <a:avLst/>
-          </a:prstGeom>
-          <a:noFill/>
-          <a:ln/>
-        </p:spPr>
-        <p:txBody>
-          <a:bodyPr wrap="square" lIns="0" tIns="0" rIns="0" bIns="0" rtlCol="0" anchor="ctr"/>
-          <a:lstStyle/>
-          <a:p>
-            <a:pPr indent="0" marL="0">
-              <a:buNone/>
-            </a:pPr>
-            <a:r>
-              <a:rPr lang="en-US" sz="900" b="1" dirty="0">
-                <a:solidFill>
-                  <a:srgbClr val="E65100"/>
-                </a:solidFill>
-                <a:latin typeface="Calibri" pitchFamily="34" charset="0"/>
-                <a:ea typeface="Calibri" pitchFamily="34" charset="-122"/>
-                <a:cs typeface="Calibri" pitchFamily="34" charset="-120"/>
-              </a:rPr>
-              <a:t>🔒 Déblocable après complétion</a:t>
-            </a:r>
-            <a:endParaRPr lang="en-US" sz="900" dirty="0"/>
-          </a:p>
-        </p:txBody>
-      </p:sp>
-      <p:sp>
-        <p:nvSpPr>
-          <p:cNvPr id="5" name="Shape 3"/>
-          <p:cNvSpPr/>
-          <p:nvPr/>
-        </p:nvSpPr>
-        <p:spPr>
-          <a:xfrm>
-            <a:off x="457200" y="960120"/>
-            <a:ext cx="2286000" cy="475488"/>
-          </a:xfrm>
-          <a:prstGeom prst="rect">
-            <a:avLst/>
-          </a:prstGeom>
-          <a:solidFill>
-            <a:srgbClr val="FFF3E0"/>
-          </a:solidFill>
-          <a:ln/>
-        </p:spPr>
-      </p:sp>
-      <p:sp>
-        <p:nvSpPr>
-          <p:cNvPr id="6" name="Text 4"/>
-          <p:cNvSpPr/>
-          <p:nvPr/>
-        </p:nvSpPr>
-        <p:spPr>
-          <a:xfrm>
-            <a:off x="548640" y="960120"/>
-            <a:ext cx="2103120" cy="475488"/>
+            <a:off x="548640" y="640080"/>
+            <a:ext cx="2103120" cy="429768"/>
           </a:xfrm>
           <a:prstGeom prst="rect">
             <a:avLst/>
@@ -5645,14 +5972,14 @@
       </p:sp>
       <p:sp>
         <p:nvSpPr>
-          <p:cNvPr id="7" name="Shape 5"/>
-          <p:cNvSpPr/>
-          <p:nvPr/>
-        </p:nvSpPr>
-        <p:spPr>
-          <a:xfrm>
-            <a:off x="2743200" y="960120"/>
-            <a:ext cx="5943600" cy="475488"/>
+          <p:cNvPr id="5" name="Shape 3"/>
+          <p:cNvSpPr/>
+          <p:nvPr/>
+        </p:nvSpPr>
+        <p:spPr>
+          <a:xfrm>
+            <a:off x="2743200" y="640080"/>
+            <a:ext cx="5943600" cy="429768"/>
           </a:xfrm>
           <a:prstGeom prst="rect">
             <a:avLst/>
@@ -5665,14 +5992,14 @@
       </p:sp>
       <p:sp>
         <p:nvSpPr>
-          <p:cNvPr id="8" name="Text 6"/>
-          <p:cNvSpPr/>
-          <p:nvPr/>
-        </p:nvSpPr>
-        <p:spPr>
-          <a:xfrm>
-            <a:off x="2834640" y="960120"/>
-            <a:ext cx="5760720" cy="475488"/>
+          <p:cNvPr id="6" name="Text 4"/>
+          <p:cNvSpPr/>
+          <p:nvPr/>
+        </p:nvSpPr>
+        <p:spPr>
+          <a:xfrm>
+            <a:off x="2834640" y="640080"/>
+            <a:ext cx="5760720" cy="429768"/>
           </a:xfrm>
           <a:prstGeom prst="rect">
             <a:avLst/>
@@ -5696,7 +6023,7 @@
                 <a:ea typeface="Calibri" pitchFamily="34" charset="-122"/>
                 <a:cs typeface="Calibri" pitchFamily="34" charset="-120"/>
               </a:rPr>
-              <a:t>On connaît le code : tester chaque contrainte, requête, procédure</a:t>
+              <a:t>On connait le code, teste chaque contrainte</a:t>
             </a:r>
             <a:endParaRPr lang="en-US" sz="900" dirty="0"/>
           </a:p>
@@ -5704,14 +6031,14 @@
       </p:sp>
       <p:sp>
         <p:nvSpPr>
-          <p:cNvPr id="9" name="Shape 7"/>
-          <p:cNvSpPr/>
-          <p:nvPr/>
-        </p:nvSpPr>
-        <p:spPr>
-          <a:xfrm>
-            <a:off x="457200" y="1463040"/>
-            <a:ext cx="2286000" cy="475488"/>
+          <p:cNvPr id="7" name="Shape 5"/>
+          <p:cNvSpPr/>
+          <p:nvPr/>
+        </p:nvSpPr>
+        <p:spPr>
+          <a:xfrm>
+            <a:off x="457200" y="1097280"/>
+            <a:ext cx="2286000" cy="429768"/>
           </a:xfrm>
           <a:prstGeom prst="rect">
             <a:avLst/>
@@ -5724,14 +6051,14 @@
       </p:sp>
       <p:sp>
         <p:nvSpPr>
-          <p:cNvPr id="10" name="Text 8"/>
-          <p:cNvSpPr/>
-          <p:nvPr/>
-        </p:nvSpPr>
-        <p:spPr>
-          <a:xfrm>
-            <a:off x="548640" y="1463040"/>
-            <a:ext cx="2103120" cy="475488"/>
+          <p:cNvPr id="8" name="Text 6"/>
+          <p:cNvSpPr/>
+          <p:nvPr/>
+        </p:nvSpPr>
+        <p:spPr>
+          <a:xfrm>
+            <a:off x="548640" y="1097280"/>
+            <a:ext cx="2103120" cy="429768"/>
           </a:xfrm>
           <a:prstGeom prst="rect">
             <a:avLst/>
@@ -5763,14 +6090,14 @@
       </p:sp>
       <p:sp>
         <p:nvSpPr>
-          <p:cNvPr id="11" name="Shape 9"/>
-          <p:cNvSpPr/>
-          <p:nvPr/>
-        </p:nvSpPr>
-        <p:spPr>
-          <a:xfrm>
-            <a:off x="2743200" y="1463040"/>
-            <a:ext cx="5943600" cy="475488"/>
+          <p:cNvPr id="9" name="Shape 7"/>
+          <p:cNvSpPr/>
+          <p:nvPr/>
+        </p:nvSpPr>
+        <p:spPr>
+          <a:xfrm>
+            <a:off x="2743200" y="1097280"/>
+            <a:ext cx="5943600" cy="429768"/>
           </a:xfrm>
           <a:prstGeom prst="rect">
             <a:avLst/>
@@ -5783,14 +6110,14 @@
       </p:sp>
       <p:sp>
         <p:nvSpPr>
-          <p:cNvPr id="12" name="Text 10"/>
-          <p:cNvSpPr/>
-          <p:nvPr/>
-        </p:nvSpPr>
-        <p:spPr>
-          <a:xfrm>
-            <a:off x="2834640" y="1463040"/>
-            <a:ext cx="5760720" cy="475488"/>
+          <p:cNvPr id="10" name="Text 8"/>
+          <p:cNvSpPr/>
+          <p:nvPr/>
+        </p:nvSpPr>
+        <p:spPr>
+          <a:xfrm>
+            <a:off x="2834640" y="1097280"/>
+            <a:ext cx="5760720" cy="429768"/>
           </a:xfrm>
           <a:prstGeom prst="rect">
             <a:avLst/>
@@ -5814,7 +6141,7 @@
                 <a:ea typeface="Calibri" pitchFamily="34" charset="-122"/>
                 <a:cs typeface="Calibri" pitchFamily="34" charset="-120"/>
               </a:rPr>
-              <a:t>On teste entrées/sorties sans voir le code interne</a:t>
+              <a:t>On teste entrees/sorties sans voir le code</a:t>
             </a:r>
             <a:endParaRPr lang="en-US" sz="900" dirty="0"/>
           </a:p>
@@ -5822,14 +6149,14 @@
       </p:sp>
       <p:sp>
         <p:nvSpPr>
-          <p:cNvPr id="13" name="Shape 11"/>
-          <p:cNvSpPr/>
-          <p:nvPr/>
-        </p:nvSpPr>
-        <p:spPr>
-          <a:xfrm>
-            <a:off x="457200" y="1965960"/>
-            <a:ext cx="2286000" cy="475488"/>
+          <p:cNvPr id="11" name="Shape 9"/>
+          <p:cNvSpPr/>
+          <p:nvPr/>
+        </p:nvSpPr>
+        <p:spPr>
+          <a:xfrm>
+            <a:off x="457200" y="1554480"/>
+            <a:ext cx="2286000" cy="429768"/>
           </a:xfrm>
           <a:prstGeom prst="rect">
             <a:avLst/>
@@ -5842,14 +6169,14 @@
       </p:sp>
       <p:sp>
         <p:nvSpPr>
-          <p:cNvPr id="14" name="Text 12"/>
-          <p:cNvSpPr/>
-          <p:nvPr/>
-        </p:nvSpPr>
-        <p:spPr>
-          <a:xfrm>
-            <a:off x="548640" y="1965960"/>
-            <a:ext cx="2103120" cy="475488"/>
+          <p:cNvPr id="12" name="Text 10"/>
+          <p:cNvSpPr/>
+          <p:nvPr/>
+        </p:nvSpPr>
+        <p:spPr>
+          <a:xfrm>
+            <a:off x="548640" y="1554480"/>
+            <a:ext cx="2103120" cy="429768"/>
           </a:xfrm>
           <a:prstGeom prst="rect">
             <a:avLst/>
@@ -5873,7 +6200,7 @@
                 <a:ea typeface="Trebuchet MS" pitchFamily="34" charset="-122"/>
                 <a:cs typeface="Trebuchet MS" pitchFamily="34" charset="-120"/>
               </a:rPr>
-              <a:t>Données normales</a:t>
+              <a:t>Normales</a:t>
             </a:r>
             <a:endParaRPr lang="en-US" sz="900" dirty="0"/>
           </a:p>
@@ -5881,14 +6208,14 @@
       </p:sp>
       <p:sp>
         <p:nvSpPr>
-          <p:cNvPr id="15" name="Shape 13"/>
-          <p:cNvSpPr/>
-          <p:nvPr/>
-        </p:nvSpPr>
-        <p:spPr>
-          <a:xfrm>
-            <a:off x="2743200" y="1965960"/>
-            <a:ext cx="5943600" cy="475488"/>
+          <p:cNvPr id="13" name="Shape 11"/>
+          <p:cNvSpPr/>
+          <p:nvPr/>
+        </p:nvSpPr>
+        <p:spPr>
+          <a:xfrm>
+            <a:off x="2743200" y="1554480"/>
+            <a:ext cx="5943600" cy="429768"/>
           </a:xfrm>
           <a:prstGeom prst="rect">
             <a:avLst/>
@@ -5901,14 +6228,14 @@
       </p:sp>
       <p:sp>
         <p:nvSpPr>
-          <p:cNvPr id="16" name="Text 14"/>
-          <p:cNvSpPr/>
-          <p:nvPr/>
-        </p:nvSpPr>
-        <p:spPr>
-          <a:xfrm>
-            <a:off x="2834640" y="1965960"/>
-            <a:ext cx="5760720" cy="475488"/>
+          <p:cNvPr id="14" name="Text 12"/>
+          <p:cNvSpPr/>
+          <p:nvPr/>
+        </p:nvSpPr>
+        <p:spPr>
+          <a:xfrm>
+            <a:off x="2834640" y="1554480"/>
+            <a:ext cx="5760720" cy="429768"/>
           </a:xfrm>
           <a:prstGeom prst="rect">
             <a:avLst/>
@@ -5940,14 +6267,14 @@
       </p:sp>
       <p:sp>
         <p:nvSpPr>
-          <p:cNvPr id="17" name="Shape 15"/>
-          <p:cNvSpPr/>
-          <p:nvPr/>
-        </p:nvSpPr>
-        <p:spPr>
-          <a:xfrm>
-            <a:off x="457200" y="2468880"/>
-            <a:ext cx="2286000" cy="475488"/>
+          <p:cNvPr id="15" name="Shape 13"/>
+          <p:cNvSpPr/>
+          <p:nvPr/>
+        </p:nvSpPr>
+        <p:spPr>
+          <a:xfrm>
+            <a:off x="457200" y="2011680"/>
+            <a:ext cx="2286000" cy="429768"/>
           </a:xfrm>
           <a:prstGeom prst="rect">
             <a:avLst/>
@@ -5960,14 +6287,14 @@
       </p:sp>
       <p:sp>
         <p:nvSpPr>
-          <p:cNvPr id="18" name="Text 16"/>
-          <p:cNvSpPr/>
-          <p:nvPr/>
-        </p:nvSpPr>
-        <p:spPr>
-          <a:xfrm>
-            <a:off x="548640" y="2468880"/>
-            <a:ext cx="2103120" cy="475488"/>
+          <p:cNvPr id="16" name="Text 14"/>
+          <p:cNvSpPr/>
+          <p:nvPr/>
+        </p:nvSpPr>
+        <p:spPr>
+          <a:xfrm>
+            <a:off x="548640" y="2011680"/>
+            <a:ext cx="2103120" cy="429768"/>
           </a:xfrm>
           <a:prstGeom prst="rect">
             <a:avLst/>
@@ -5991,7 +6318,7 @@
                 <a:ea typeface="Trebuchet MS" pitchFamily="34" charset="-122"/>
                 <a:cs typeface="Trebuchet MS" pitchFamily="34" charset="-120"/>
               </a:rPr>
-              <a:t>Données limites</a:t>
+              <a:t>Limites</a:t>
             </a:r>
             <a:endParaRPr lang="en-US" sz="900" dirty="0"/>
           </a:p>
@@ -5999,14 +6326,14 @@
       </p:sp>
       <p:sp>
         <p:nvSpPr>
-          <p:cNvPr id="19" name="Shape 17"/>
-          <p:cNvSpPr/>
-          <p:nvPr/>
-        </p:nvSpPr>
-        <p:spPr>
-          <a:xfrm>
-            <a:off x="2743200" y="2468880"/>
-            <a:ext cx="5943600" cy="475488"/>
+          <p:cNvPr id="17" name="Shape 15"/>
+          <p:cNvSpPr/>
+          <p:nvPr/>
+        </p:nvSpPr>
+        <p:spPr>
+          <a:xfrm>
+            <a:off x="2743200" y="2011680"/>
+            <a:ext cx="5943600" cy="429768"/>
           </a:xfrm>
           <a:prstGeom prst="rect">
             <a:avLst/>
@@ -6019,14 +6346,14 @@
       </p:sp>
       <p:sp>
         <p:nvSpPr>
-          <p:cNvPr id="20" name="Text 18"/>
-          <p:cNvSpPr/>
-          <p:nvPr/>
-        </p:nvSpPr>
-        <p:spPr>
-          <a:xfrm>
-            <a:off x="2834640" y="2468880"/>
-            <a:ext cx="5760720" cy="475488"/>
+          <p:cNvPr id="18" name="Text 16"/>
+          <p:cNvSpPr/>
+          <p:nvPr/>
+        </p:nvSpPr>
+        <p:spPr>
+          <a:xfrm>
+            <a:off x="2834640" y="2011680"/>
+            <a:ext cx="5760720" cy="429768"/>
           </a:xfrm>
           <a:prstGeom prst="rect">
             <a:avLst/>
@@ -6050,7 +6377,7 @@
                 <a:ea typeface="Calibri" pitchFamily="34" charset="-122"/>
                 <a:cs typeface="Calibri" pitchFamily="34" charset="-120"/>
               </a:rPr>
-              <a:t>Valeurs aux bornes (max VARCHAR, CHECK = 0)</a:t>
+              <a:t>Aux bornes (max VARCHAR, CHECK = 0)</a:t>
             </a:r>
             <a:endParaRPr lang="en-US" sz="900" dirty="0"/>
           </a:p>
@@ -6058,14 +6385,14 @@
       </p:sp>
       <p:sp>
         <p:nvSpPr>
-          <p:cNvPr id="21" name="Shape 19"/>
-          <p:cNvSpPr/>
-          <p:nvPr/>
-        </p:nvSpPr>
-        <p:spPr>
-          <a:xfrm>
-            <a:off x="457200" y="2971800"/>
-            <a:ext cx="2286000" cy="475488"/>
+          <p:cNvPr id="19" name="Shape 17"/>
+          <p:cNvSpPr/>
+          <p:nvPr/>
+        </p:nvSpPr>
+        <p:spPr>
+          <a:xfrm>
+            <a:off x="457200" y="2468880"/>
+            <a:ext cx="2286000" cy="429768"/>
           </a:xfrm>
           <a:prstGeom prst="rect">
             <a:avLst/>
@@ -6078,14 +6405,14 @@
       </p:sp>
       <p:sp>
         <p:nvSpPr>
-          <p:cNvPr id="22" name="Text 20"/>
-          <p:cNvSpPr/>
-          <p:nvPr/>
-        </p:nvSpPr>
-        <p:spPr>
-          <a:xfrm>
-            <a:off x="548640" y="2971800"/>
-            <a:ext cx="2103120" cy="475488"/>
+          <p:cNvPr id="20" name="Text 18"/>
+          <p:cNvSpPr/>
+          <p:nvPr/>
+        </p:nvSpPr>
+        <p:spPr>
+          <a:xfrm>
+            <a:off x="548640" y="2468880"/>
+            <a:ext cx="2103120" cy="429768"/>
           </a:xfrm>
           <a:prstGeom prst="rect">
             <a:avLst/>
@@ -6109,7 +6436,7 @@
                 <a:ea typeface="Trebuchet MS" pitchFamily="34" charset="-122"/>
                 <a:cs typeface="Trebuchet MS" pitchFamily="34" charset="-120"/>
               </a:rPr>
-              <a:t>Données erronées</a:t>
+              <a:t>Erronees</a:t>
             </a:r>
             <a:endParaRPr lang="en-US" sz="900" dirty="0"/>
           </a:p>
@@ -6117,14 +6444,14 @@
       </p:sp>
       <p:sp>
         <p:nvSpPr>
-          <p:cNvPr id="23" name="Shape 21"/>
-          <p:cNvSpPr/>
-          <p:nvPr/>
-        </p:nvSpPr>
-        <p:spPr>
-          <a:xfrm>
-            <a:off x="2743200" y="2971800"/>
-            <a:ext cx="5943600" cy="475488"/>
+          <p:cNvPr id="21" name="Shape 19"/>
+          <p:cNvSpPr/>
+          <p:nvPr/>
+        </p:nvSpPr>
+        <p:spPr>
+          <a:xfrm>
+            <a:off x="2743200" y="2468880"/>
+            <a:ext cx="5943600" cy="429768"/>
           </a:xfrm>
           <a:prstGeom prst="rect">
             <a:avLst/>
@@ -6137,14 +6464,14 @@
       </p:sp>
       <p:sp>
         <p:nvSpPr>
-          <p:cNvPr id="24" name="Text 22"/>
-          <p:cNvSpPr/>
-          <p:nvPr/>
-        </p:nvSpPr>
-        <p:spPr>
-          <a:xfrm>
-            <a:off x="2834640" y="2971800"/>
-            <a:ext cx="5760720" cy="475488"/>
+          <p:cNvPr id="22" name="Text 20"/>
+          <p:cNvSpPr/>
+          <p:nvPr/>
+        </p:nvSpPr>
+        <p:spPr>
+          <a:xfrm>
+            <a:off x="2834640" y="2468880"/>
+            <a:ext cx="5760720" cy="429768"/>
           </a:xfrm>
           <a:prstGeom prst="rect">
             <a:avLst/>
@@ -6168,7 +6495,7 @@
                 <a:ea typeface="Calibri" pitchFamily="34" charset="-122"/>
                 <a:cs typeface="Calibri" pitchFamily="34" charset="-120"/>
               </a:rPr>
-              <a:t>Volontairement invalides — le système doit REJETER</a:t>
+              <a:t>Invalides — le systeme DOIT rejeter</a:t>
             </a:r>
             <a:endParaRPr lang="en-US" sz="900" dirty="0"/>
           </a:p>
@@ -6176,14 +6503,14 @@
       </p:sp>
       <p:sp>
         <p:nvSpPr>
-          <p:cNvPr id="25" name="Shape 23"/>
-          <p:cNvSpPr/>
-          <p:nvPr/>
-        </p:nvSpPr>
-        <p:spPr>
-          <a:xfrm>
-            <a:off x="457200" y="3474720"/>
-            <a:ext cx="2286000" cy="475488"/>
+          <p:cNvPr id="23" name="Shape 21"/>
+          <p:cNvSpPr/>
+          <p:nvPr/>
+        </p:nvSpPr>
+        <p:spPr>
+          <a:xfrm>
+            <a:off x="457200" y="2926080"/>
+            <a:ext cx="2286000" cy="429768"/>
           </a:xfrm>
           <a:prstGeom prst="rect">
             <a:avLst/>
@@ -6196,14 +6523,14 @@
       </p:sp>
       <p:sp>
         <p:nvSpPr>
-          <p:cNvPr id="26" name="Text 24"/>
-          <p:cNvSpPr/>
-          <p:nvPr/>
-        </p:nvSpPr>
-        <p:spPr>
-          <a:xfrm>
-            <a:off x="548640" y="3474720"/>
-            <a:ext cx="2103120" cy="475488"/>
+          <p:cNvPr id="24" name="Text 22"/>
+          <p:cNvSpPr/>
+          <p:nvPr/>
+        </p:nvSpPr>
+        <p:spPr>
+          <a:xfrm>
+            <a:off x="548640" y="2926080"/>
+            <a:ext cx="2103120" cy="429768"/>
           </a:xfrm>
           <a:prstGeom prst="rect">
             <a:avLst/>
@@ -6227,7 +6554,7 @@
                 <a:ea typeface="Trebuchet MS" pitchFamily="34" charset="-122"/>
                 <a:cs typeface="Trebuchet MS" pitchFamily="34" charset="-120"/>
               </a:rPr>
-              <a:t>Matrice traçabilité</a:t>
+              <a:t>Tracabilite</a:t>
             </a:r>
             <a:endParaRPr lang="en-US" sz="900" dirty="0"/>
           </a:p>
@@ -6235,14 +6562,14 @@
       </p:sp>
       <p:sp>
         <p:nvSpPr>
-          <p:cNvPr id="27" name="Shape 25"/>
-          <p:cNvSpPr/>
-          <p:nvPr/>
-        </p:nvSpPr>
-        <p:spPr>
-          <a:xfrm>
-            <a:off x="2743200" y="3474720"/>
-            <a:ext cx="5943600" cy="475488"/>
+          <p:cNvPr id="25" name="Shape 23"/>
+          <p:cNvSpPr/>
+          <p:nvPr/>
+        </p:nvSpPr>
+        <p:spPr>
+          <a:xfrm>
+            <a:off x="2743200" y="2926080"/>
+            <a:ext cx="5943600" cy="429768"/>
           </a:xfrm>
           <a:prstGeom prst="rect">
             <a:avLst/>
@@ -6255,14 +6582,14 @@
       </p:sp>
       <p:sp>
         <p:nvSpPr>
-          <p:cNvPr id="28" name="Text 26"/>
-          <p:cNvSpPr/>
-          <p:nvPr/>
-        </p:nvSpPr>
-        <p:spPr>
-          <a:xfrm>
-            <a:off x="2834640" y="3474720"/>
-            <a:ext cx="5760720" cy="475488"/>
+          <p:cNvPr id="26" name="Text 24"/>
+          <p:cNvSpPr/>
+          <p:nvPr/>
+        </p:nvSpPr>
+        <p:spPr>
+          <a:xfrm>
+            <a:off x="2834640" y="2926080"/>
+            <a:ext cx="5760720" cy="429768"/>
           </a:xfrm>
           <a:prstGeom prst="rect">
             <a:avLst/>
@@ -6286,7 +6613,7 @@
                 <a:ea typeface="Calibri" pitchFamily="34" charset="-122"/>
                 <a:cs typeface="Calibri" pitchFamily="34" charset="-120"/>
               </a:rPr>
-              <a:t>Chaque besoin couvert par au moins 1 test</a:t>
+              <a:t>Chaque besoin couvert par 1+ test</a:t>
             </a:r>
             <a:endParaRPr lang="en-US" sz="900" dirty="0"/>
           </a:p>
@@ -6294,14 +6621,14 @@
       </p:sp>
       <p:sp>
         <p:nvSpPr>
-          <p:cNvPr id="29" name="Shape 27"/>
-          <p:cNvSpPr/>
-          <p:nvPr/>
-        </p:nvSpPr>
-        <p:spPr>
-          <a:xfrm>
-            <a:off x="457200" y="3977640"/>
-            <a:ext cx="2286000" cy="475488"/>
+          <p:cNvPr id="27" name="Shape 25"/>
+          <p:cNvSpPr/>
+          <p:nvPr/>
+        </p:nvSpPr>
+        <p:spPr>
+          <a:xfrm>
+            <a:off x="457200" y="3383280"/>
+            <a:ext cx="2286000" cy="429768"/>
           </a:xfrm>
           <a:prstGeom prst="rect">
             <a:avLst/>
@@ -6314,14 +6641,14 @@
       </p:sp>
       <p:sp>
         <p:nvSpPr>
-          <p:cNvPr id="30" name="Text 28"/>
-          <p:cNvSpPr/>
-          <p:nvPr/>
-        </p:nvSpPr>
-        <p:spPr>
-          <a:xfrm>
-            <a:off x="548640" y="3977640"/>
-            <a:ext cx="2103120" cy="475488"/>
+          <p:cNvPr id="28" name="Text 26"/>
+          <p:cNvSpPr/>
+          <p:nvPr/>
+        </p:nvSpPr>
+        <p:spPr>
+          <a:xfrm>
+            <a:off x="548640" y="3383280"/>
+            <a:ext cx="2103120" cy="429768"/>
           </a:xfrm>
           <a:prstGeom prst="rect">
             <a:avLst/>
@@ -6353,14 +6680,14 @@
       </p:sp>
       <p:sp>
         <p:nvSpPr>
-          <p:cNvPr id="31" name="Shape 29"/>
-          <p:cNvSpPr/>
-          <p:nvPr/>
-        </p:nvSpPr>
-        <p:spPr>
-          <a:xfrm>
-            <a:off x="2743200" y="3977640"/>
-            <a:ext cx="5943600" cy="475488"/>
+          <p:cNvPr id="29" name="Shape 27"/>
+          <p:cNvSpPr/>
+          <p:nvPr/>
+        </p:nvSpPr>
+        <p:spPr>
+          <a:xfrm>
+            <a:off x="2743200" y="3383280"/>
+            <a:ext cx="5943600" cy="429768"/>
           </a:xfrm>
           <a:prstGeom prst="rect">
             <a:avLst/>
@@ -6373,14 +6700,14 @@
       </p:sp>
       <p:sp>
         <p:nvSpPr>
-          <p:cNvPr id="32" name="Text 30"/>
-          <p:cNvSpPr/>
-          <p:nvPr/>
-        </p:nvSpPr>
-        <p:spPr>
-          <a:xfrm>
-            <a:off x="2834640" y="3977640"/>
-            <a:ext cx="5760720" cy="475488"/>
+          <p:cNvPr id="30" name="Text 28"/>
+          <p:cNvSpPr/>
+          <p:nvPr/>
+        </p:nvSpPr>
+        <p:spPr>
+          <a:xfrm>
+            <a:off x="2834640" y="3383280"/>
+            <a:ext cx="5760720" cy="429768"/>
           </a:xfrm>
           <a:prstGeom prst="rect">
             <a:avLst/>
@@ -6404,7 +6731,7 @@
                 <a:ea typeface="Calibri" pitchFamily="34" charset="-122"/>
                 <a:cs typeface="Calibri" pitchFamily="34" charset="-120"/>
               </a:rPr>
-              <a:t>ID, description, type, entrée, attendu, obtenu, statut</a:t>
+              <a:t>ID, description, type, entree, attendu, obtenu, statut</a:t>
             </a:r>
             <a:endParaRPr lang="en-US" sz="900" dirty="0"/>
           </a:p>
